--- a/Artifact_Alley_College_Project_Presentation.pptx
+++ b/Artifact_Alley_College_Project_Presentation.pptx
@@ -18,6 +18,7 @@
     <p:sldId id="263" r:id="rId11"/>
     <p:sldId id="264" r:id="rId12"/>
     <p:sldId id="265" r:id="rId13"/>
+    <p:sldId id="266" r:id="rId14"/>
   </p:sldIdLst>
   <p:sldSz cx="12192000" cy="6858000"/>
   <p:notesSz cx="6858000" cy="9144000"/>
@@ -43,7 +44,7 @@
       </p:grpSpPr>
       <p:sp>
         <p:nvSpPr>
-          <p:cNvPr id="6" name="PlaceHolder 1"/>
+          <p:cNvPr id="8" name="PlaceHolder 1"/>
           <p:cNvSpPr>
             <a:spLocks noGrp="1"/>
           </p:cNvSpPr>
@@ -73,6 +74,9 @@
               <a:lnSpc>
                 <a:spcPct val="90000"/>
               </a:lnSpc>
+              <a:tabLst>
+                <a:tab pos="0" algn="l"/>
+              </a:tabLst>
             </a:pPr>
             <a:r>
               <a:rPr lang="en-US" sz="4400" b="0" u="none" strike="noStrike">
@@ -83,7 +87,18 @@
                 <a:uFillTx/>
                 <a:latin typeface="Calibri Light"/>
               </a:rPr>
-              <a:t>Click to move the slide</a:t>
+              <a:t>Click to move the </a:t>
+            </a:r>
+            <a:r>
+              <a:rPr lang="en-US" sz="4400" b="0" u="none" strike="noStrike">
+                <a:solidFill>
+                  <a:schemeClr val="dk1"/>
+                </a:solidFill>
+                <a:effectLst/>
+                <a:uFillTx/>
+                <a:latin typeface="Calibri Light"/>
+              </a:rPr>
+              <a:t>slide</a:t>
             </a:r>
             <a:endParaRPr lang="en-US" sz="4400" b="0" u="none" strike="noStrike">
               <a:solidFill>
@@ -98,7 +113,7 @@
       </p:sp>
       <p:sp>
         <p:nvSpPr>
-          <p:cNvPr id="7" name="PlaceHolder 2"/>
+          <p:cNvPr id="9" name="PlaceHolder 2"/>
           <p:cNvSpPr>
             <a:spLocks noGrp="1"/>
           </p:cNvSpPr>
@@ -151,7 +166,7 @@
       </p:sp>
       <p:sp>
         <p:nvSpPr>
-          <p:cNvPr id="8" name="PlaceHolder 3"/>
+          <p:cNvPr id="10" name="PlaceHolder 3"/>
           <p:cNvSpPr>
             <a:spLocks noGrp="1"/>
           </p:cNvSpPr>
@@ -204,7 +219,7 @@
       </p:sp>
       <p:sp>
         <p:nvSpPr>
-          <p:cNvPr id="9" name="PlaceHolder 4"/>
+          <p:cNvPr id="11" name="PlaceHolder 4"/>
           <p:cNvSpPr>
             <a:spLocks noGrp="1"/>
           </p:cNvSpPr>
@@ -270,7 +285,7 @@
       </p:sp>
       <p:sp>
         <p:nvSpPr>
-          <p:cNvPr id="10" name="PlaceHolder 5"/>
+          <p:cNvPr id="12" name="PlaceHolder 5"/>
           <p:cNvSpPr>
             <a:spLocks noGrp="1"/>
           </p:cNvSpPr>
@@ -336,7 +351,7 @@
       </p:sp>
       <p:sp>
         <p:nvSpPr>
-          <p:cNvPr id="11" name="PlaceHolder 6"/>
+          <p:cNvPr id="13" name="PlaceHolder 6"/>
           <p:cNvSpPr>
             <a:spLocks noGrp="1"/>
           </p:cNvSpPr>
@@ -378,7 +393,7 @@
             <a:pPr indent="0" algn="r">
               <a:buNone/>
             </a:pPr>
-            <a:fld id="{945FD79C-4C50-42CE-88FF-955B5F012C2D}" type="slidenum">
+            <a:fld id="{39F35C3F-2023-4E41-85DE-63CCB4ECC85C}" type="slidenum">
               <a:rPr lang="en-US" sz="1400" b="0" u="none" strike="noStrike">
                 <a:solidFill>
                   <a:srgbClr val="000000"/>
@@ -425,7 +440,7 @@
       </p:grpSpPr>
       <p:sp>
         <p:nvSpPr>
-          <p:cNvPr id="170" name="PlaceHolder 1"/>
+          <p:cNvPr id="175" name="PlaceHolder 1"/>
           <p:cNvSpPr>
             <a:spLocks noGrp="1"/>
           </p:cNvSpPr>
@@ -448,7 +463,7 @@
       </p:sp>
       <p:sp>
         <p:nvSpPr>
-          <p:cNvPr id="171" name="PlaceHolder 2"/>
+          <p:cNvPr id="176" name="PlaceHolder 2"/>
           <p:cNvSpPr>
             <a:spLocks noGrp="1"/>
           </p:cNvSpPr>
@@ -479,6 +494,9 @@
                 <a:spcPct val="100000"/>
               </a:lnSpc>
               <a:buNone/>
+              <a:tabLst>
+                <a:tab pos="0" algn="l"/>
+              </a:tabLst>
             </a:pPr>
             <a:r>
               <a:rPr lang="en-US" sz="2000" b="0" u="none" strike="noStrike">
@@ -504,7 +522,7 @@
       </p:sp>
       <p:sp>
         <p:nvSpPr>
-          <p:cNvPr id="172" name="PlaceHolder 3"/>
+          <p:cNvPr id="177" name="PlaceHolder 3"/>
           <p:cNvSpPr>
             <a:spLocks noGrp="1"/>
           </p:cNvSpPr>
@@ -533,7 +551,7 @@
             <a:pPr indent="0" algn="l">
               <a:buNone/>
             </a:pPr>
-            <a:endParaRPr lang="en-US" sz="1800" b="0" u="none" strike="noStrike">
+            <a:endParaRPr lang="en-US" sz="1400" b="0" u="none" strike="noStrike">
               <a:solidFill>
                 <a:srgbClr val="000000"/>
               </a:solidFill>
@@ -568,7 +586,7 @@
       </p:grpSpPr>
       <p:sp>
         <p:nvSpPr>
-          <p:cNvPr id="197" name="PlaceHolder 1"/>
+          <p:cNvPr id="202" name="PlaceHolder 1"/>
           <p:cNvSpPr>
             <a:spLocks noGrp="1"/>
           </p:cNvSpPr>
@@ -591,7 +609,7 @@
       </p:sp>
       <p:sp>
         <p:nvSpPr>
-          <p:cNvPr id="198" name="PlaceHolder 2"/>
+          <p:cNvPr id="203" name="PlaceHolder 2"/>
           <p:cNvSpPr>
             <a:spLocks noGrp="1"/>
           </p:cNvSpPr>
@@ -618,36 +636,22 @@
           </a:bodyPr>
           <a:p>
             <a:pPr indent="0" algn="l">
-              <a:lnSpc>
-                <a:spcPct val="100000"/>
-              </a:lnSpc>
               <a:buNone/>
             </a:pPr>
-            <a:r>
-              <a:rPr lang="en-US" sz="2000" b="0" u="none" strike="noStrike">
-                <a:solidFill>
-                  <a:srgbClr val="000000"/>
-                </a:solidFill>
-                <a:effectLst/>
-                <a:uFillTx/>
-                <a:latin typeface="Arial"/>
-              </a:rPr>
-              <a:t>Research-informed flow used for this presentation: problem, solution, objectives, architecture, technology, expected result, and future scope. Sources consulted: University of Washington CSE 403 demo guidance and final-year software project presentation examples.</a:t>
-            </a:r>
-            <a:endParaRPr lang="en-US" sz="2000" b="0" u="none" strike="noStrike">
-              <a:solidFill>
-                <a:srgbClr val="000000"/>
-              </a:solidFill>
-              <a:effectLst/>
-              <a:uFillTx/>
-              <a:latin typeface="Arial"/>
-            </a:endParaRPr>
-          </a:p>
-        </p:txBody>
-      </p:sp>
-      <p:sp>
-        <p:nvSpPr>
-          <p:cNvPr id="199" name="PlaceHolder 3"/>
+            <a:endParaRPr lang="en-US" sz="1800" b="0" u="none" strike="noStrike">
+              <a:solidFill>
+                <a:srgbClr val="000000"/>
+              </a:solidFill>
+              <a:effectLst/>
+              <a:uFillTx/>
+              <a:latin typeface="Arial"/>
+            </a:endParaRPr>
+          </a:p>
+        </p:txBody>
+      </p:sp>
+      <p:sp>
+        <p:nvSpPr>
+          <p:cNvPr id="204" name="PlaceHolder 3"/>
           <p:cNvSpPr>
             <a:spLocks noGrp="1"/>
           </p:cNvSpPr>
@@ -676,7 +680,153 @@
             <a:pPr indent="0" algn="l">
               <a:buNone/>
             </a:pPr>
-            <a:endParaRPr lang="en-US" sz="1800" b="0" u="none" strike="noStrike">
+            <a:endParaRPr lang="en-US" sz="1400" b="0" u="none" strike="noStrike">
+              <a:solidFill>
+                <a:srgbClr val="000000"/>
+              </a:solidFill>
+              <a:effectLst/>
+              <a:uFillTx/>
+              <a:latin typeface="Times New Roman"/>
+            </a:endParaRPr>
+          </a:p>
+        </p:txBody>
+      </p:sp>
+    </p:spTree>
+  </p:cSld>
+</p:notes>
+</file>
+
+<file path=ppt/notesSlides/notesSlide11.xml><?xml version="1.0" encoding="utf-8"?>
+<p:notes xmlns:a="http://schemas.openxmlformats.org/drawingml/2006/main" xmlns:p="http://schemas.openxmlformats.org/presentationml/2006/main" xmlns:r="http://schemas.openxmlformats.org/officeDocument/2006/relationships" xmlns:p14="http://schemas.microsoft.com/office/powerpoint/2010/main" xmlns:p15="http://schemas.microsoft.com/office/powerpoint/2012/main" xmlns:mc="http://schemas.openxmlformats.org/markup-compatibility/2006">
+  <p:cSld>
+    <p:spTree>
+      <p:nvGrpSpPr>
+        <p:cNvPr id="1" name=""/>
+        <p:cNvGrpSpPr/>
+        <p:nvPr/>
+      </p:nvGrpSpPr>
+      <p:grpSpPr>
+        <a:xfrm>
+          <a:off x="0" y="0"/>
+          <a:ext cx="0" cy="0"/>
+          <a:chOff x="0" y="0"/>
+          <a:chExt cx="0" cy="0"/>
+        </a:xfrm>
+      </p:grpSpPr>
+      <p:sp>
+        <p:nvSpPr>
+          <p:cNvPr id="205" name="PlaceHolder 1"/>
+          <p:cNvSpPr>
+            <a:spLocks noGrp="1"/>
+          </p:cNvSpPr>
+          <p:nvPr>
+            <p:ph type="sldImg"/>
+          </p:nvPr>
+        </p:nvSpPr>
+        <p:spPr>
+          <a:xfrm>
+            <a:off x="0" y="0"/>
+            <a:ext cx="0" cy="0"/>
+          </a:xfrm>
+          <a:prstGeom prst="rect">
+            <a:avLst/>
+          </a:prstGeom>
+          <a:ln w="0">
+            <a:noFill/>
+          </a:ln>
+        </p:spPr>
+      </p:sp>
+      <p:sp>
+        <p:nvSpPr>
+          <p:cNvPr id="206" name="PlaceHolder 2"/>
+          <p:cNvSpPr>
+            <a:spLocks noGrp="1"/>
+          </p:cNvSpPr>
+          <p:nvPr>
+            <p:ph type="body"/>
+          </p:nvPr>
+        </p:nvSpPr>
+        <p:spPr>
+          <a:xfrm>
+            <a:off x="0" y="0"/>
+            <a:ext cx="0" cy="0"/>
+          </a:xfrm>
+          <a:prstGeom prst="rect">
+            <a:avLst/>
+          </a:prstGeom>
+          <a:noFill/>
+          <a:ln w="0">
+            <a:noFill/>
+          </a:ln>
+        </p:spPr>
+        <p:txBody>
+          <a:bodyPr lIns="90000" tIns="-45000" rIns="90000" bIns="-45000" anchor="t">
+            <a:noAutofit/>
+          </a:bodyPr>
+          <a:p>
+            <a:pPr indent="0" algn="l">
+              <a:lnSpc>
+                <a:spcPct val="100000"/>
+              </a:lnSpc>
+              <a:buNone/>
+              <a:tabLst>
+                <a:tab pos="0" algn="l"/>
+              </a:tabLst>
+            </a:pPr>
+            <a:r>
+              <a:rPr lang="en-US" sz="2000" b="0" u="none" strike="noStrike">
+                <a:solidFill>
+                  <a:srgbClr val="000000"/>
+                </a:solidFill>
+                <a:effectLst/>
+                <a:uFillTx/>
+                <a:latin typeface="Arial"/>
+              </a:rPr>
+              <a:t>Research-informed flow used for this presentation: problem, solution, objectives, architecture, technology, expected result, and future scope. Sources consulted: University of Washington CSE 403 demo guidance and final-year software project presentation examples.</a:t>
+            </a:r>
+            <a:endParaRPr lang="en-US" sz="2000" b="0" u="none" strike="noStrike">
+              <a:solidFill>
+                <a:srgbClr val="000000"/>
+              </a:solidFill>
+              <a:effectLst/>
+              <a:uFillTx/>
+              <a:latin typeface="Arial"/>
+            </a:endParaRPr>
+          </a:p>
+        </p:txBody>
+      </p:sp>
+      <p:sp>
+        <p:nvSpPr>
+          <p:cNvPr id="207" name="PlaceHolder 3"/>
+          <p:cNvSpPr>
+            <a:spLocks noGrp="1"/>
+          </p:cNvSpPr>
+          <p:nvPr>
+            <p:ph type="sldNum" idx="14"/>
+          </p:nvPr>
+        </p:nvSpPr>
+        <p:spPr>
+          <a:xfrm>
+            <a:off x="0" y="0"/>
+            <a:ext cx="0" cy="0"/>
+          </a:xfrm>
+          <a:prstGeom prst="rect">
+            <a:avLst/>
+          </a:prstGeom>
+          <a:noFill/>
+          <a:ln w="0">
+            <a:noFill/>
+          </a:ln>
+        </p:spPr>
+        <p:txBody>
+          <a:bodyPr lIns="90000" tIns="-45000" rIns="90000" bIns="-45000" anchor="t">
+            <a:noAutofit/>
+          </a:bodyPr>
+          <a:p>
+            <a:pPr indent="0" algn="l">
+              <a:buNone/>
+            </a:pPr>
+            <a:endParaRPr lang="en-US" sz="1400" b="0" u="none" strike="noStrike">
               <a:solidFill>
                 <a:srgbClr val="000000"/>
               </a:solidFill>
@@ -711,7 +861,7 @@
       </p:grpSpPr>
       <p:sp>
         <p:nvSpPr>
-          <p:cNvPr id="173" name="PlaceHolder 1"/>
+          <p:cNvPr id="178" name="PlaceHolder 1"/>
           <p:cNvSpPr>
             <a:spLocks noGrp="1"/>
           </p:cNvSpPr>
@@ -734,7 +884,7 @@
       </p:sp>
       <p:sp>
         <p:nvSpPr>
-          <p:cNvPr id="174" name="PlaceHolder 2"/>
+          <p:cNvPr id="179" name="PlaceHolder 2"/>
           <p:cNvSpPr>
             <a:spLocks noGrp="1"/>
           </p:cNvSpPr>
@@ -765,6 +915,9 @@
                 <a:spcPct val="100000"/>
               </a:lnSpc>
               <a:buNone/>
+              <a:tabLst>
+                <a:tab pos="0" algn="l"/>
+              </a:tabLst>
             </a:pPr>
             <a:r>
               <a:rPr lang="en-US" sz="2000" b="0" u="none" strike="noStrike">
@@ -790,7 +943,7 @@
       </p:sp>
       <p:sp>
         <p:nvSpPr>
-          <p:cNvPr id="175" name="PlaceHolder 3"/>
+          <p:cNvPr id="180" name="PlaceHolder 3"/>
           <p:cNvSpPr>
             <a:spLocks noGrp="1"/>
           </p:cNvSpPr>
@@ -819,7 +972,7 @@
             <a:pPr indent="0" algn="l">
               <a:buNone/>
             </a:pPr>
-            <a:endParaRPr lang="en-US" sz="1800" b="0" u="none" strike="noStrike">
+            <a:endParaRPr lang="en-US" sz="1400" b="0" u="none" strike="noStrike">
               <a:solidFill>
                 <a:srgbClr val="000000"/>
               </a:solidFill>
@@ -854,7 +1007,7 @@
       </p:grpSpPr>
       <p:sp>
         <p:nvSpPr>
-          <p:cNvPr id="176" name="PlaceHolder 1"/>
+          <p:cNvPr id="181" name="PlaceHolder 1"/>
           <p:cNvSpPr>
             <a:spLocks noGrp="1"/>
           </p:cNvSpPr>
@@ -877,7 +1030,7 @@
       </p:sp>
       <p:sp>
         <p:nvSpPr>
-          <p:cNvPr id="177" name="PlaceHolder 2"/>
+          <p:cNvPr id="182" name="PlaceHolder 2"/>
           <p:cNvSpPr>
             <a:spLocks noGrp="1"/>
           </p:cNvSpPr>
@@ -919,7 +1072,7 @@
       </p:sp>
       <p:sp>
         <p:nvSpPr>
-          <p:cNvPr id="178" name="PlaceHolder 3"/>
+          <p:cNvPr id="183" name="PlaceHolder 3"/>
           <p:cNvSpPr>
             <a:spLocks noGrp="1"/>
           </p:cNvSpPr>
@@ -948,7 +1101,7 @@
             <a:pPr indent="0" algn="l">
               <a:buNone/>
             </a:pPr>
-            <a:endParaRPr lang="en-US" sz="1800" b="0" u="none" strike="noStrike">
+            <a:endParaRPr lang="en-US" sz="1400" b="0" u="none" strike="noStrike">
               <a:solidFill>
                 <a:srgbClr val="000000"/>
               </a:solidFill>
@@ -983,7 +1136,7 @@
       </p:grpSpPr>
       <p:sp>
         <p:nvSpPr>
-          <p:cNvPr id="179" name="PlaceHolder 1"/>
+          <p:cNvPr id="184" name="PlaceHolder 1"/>
           <p:cNvSpPr>
             <a:spLocks noGrp="1"/>
           </p:cNvSpPr>
@@ -1006,7 +1159,7 @@
       </p:sp>
       <p:sp>
         <p:nvSpPr>
-          <p:cNvPr id="180" name="PlaceHolder 2"/>
+          <p:cNvPr id="185" name="PlaceHolder 2"/>
           <p:cNvSpPr>
             <a:spLocks noGrp="1"/>
           </p:cNvSpPr>
@@ -1048,7 +1201,7 @@
       </p:sp>
       <p:sp>
         <p:nvSpPr>
-          <p:cNvPr id="181" name="PlaceHolder 3"/>
+          <p:cNvPr id="186" name="PlaceHolder 3"/>
           <p:cNvSpPr>
             <a:spLocks noGrp="1"/>
           </p:cNvSpPr>
@@ -1077,7 +1230,7 @@
             <a:pPr indent="0" algn="l">
               <a:buNone/>
             </a:pPr>
-            <a:endParaRPr lang="en-US" sz="1800" b="0" u="none" strike="noStrike">
+            <a:endParaRPr lang="en-US" sz="1400" b="0" u="none" strike="noStrike">
               <a:solidFill>
                 <a:srgbClr val="000000"/>
               </a:solidFill>
@@ -1112,7 +1265,7 @@
       </p:grpSpPr>
       <p:sp>
         <p:nvSpPr>
-          <p:cNvPr id="182" name="PlaceHolder 1"/>
+          <p:cNvPr id="187" name="PlaceHolder 1"/>
           <p:cNvSpPr>
             <a:spLocks noGrp="1"/>
           </p:cNvSpPr>
@@ -1135,7 +1288,7 @@
       </p:sp>
       <p:sp>
         <p:nvSpPr>
-          <p:cNvPr id="183" name="PlaceHolder 2"/>
+          <p:cNvPr id="188" name="PlaceHolder 2"/>
           <p:cNvSpPr>
             <a:spLocks noGrp="1"/>
           </p:cNvSpPr>
@@ -1177,7 +1330,7 @@
       </p:sp>
       <p:sp>
         <p:nvSpPr>
-          <p:cNvPr id="184" name="PlaceHolder 3"/>
+          <p:cNvPr id="189" name="PlaceHolder 3"/>
           <p:cNvSpPr>
             <a:spLocks noGrp="1"/>
           </p:cNvSpPr>
@@ -1206,7 +1359,7 @@
             <a:pPr indent="0" algn="l">
               <a:buNone/>
             </a:pPr>
-            <a:endParaRPr lang="en-US" sz="1800" b="0" u="none" strike="noStrike">
+            <a:endParaRPr lang="en-US" sz="1400" b="0" u="none" strike="noStrike">
               <a:solidFill>
                 <a:srgbClr val="000000"/>
               </a:solidFill>
@@ -1241,7 +1394,7 @@
       </p:grpSpPr>
       <p:sp>
         <p:nvSpPr>
-          <p:cNvPr id="185" name="PlaceHolder 1"/>
+          <p:cNvPr id="190" name="PlaceHolder 1"/>
           <p:cNvSpPr>
             <a:spLocks noGrp="1"/>
           </p:cNvSpPr>
@@ -1264,7 +1417,7 @@
       </p:sp>
       <p:sp>
         <p:nvSpPr>
-          <p:cNvPr id="186" name="PlaceHolder 2"/>
+          <p:cNvPr id="191" name="PlaceHolder 2"/>
           <p:cNvSpPr>
             <a:spLocks noGrp="1"/>
           </p:cNvSpPr>
@@ -1295,6 +1448,9 @@
                 <a:spcPct val="100000"/>
               </a:lnSpc>
               <a:buNone/>
+              <a:tabLst>
+                <a:tab pos="0" algn="l"/>
+              </a:tabLst>
             </a:pPr>
             <a:r>
               <a:rPr lang="en-US" sz="2000" b="0" u="none" strike="noStrike">
@@ -1320,7 +1476,7 @@
       </p:sp>
       <p:sp>
         <p:nvSpPr>
-          <p:cNvPr id="187" name="PlaceHolder 3"/>
+          <p:cNvPr id="192" name="PlaceHolder 3"/>
           <p:cNvSpPr>
             <a:spLocks noGrp="1"/>
           </p:cNvSpPr>
@@ -1349,7 +1505,7 @@
             <a:pPr indent="0" algn="l">
               <a:buNone/>
             </a:pPr>
-            <a:endParaRPr lang="en-US" sz="1800" b="0" u="none" strike="noStrike">
+            <a:endParaRPr lang="en-US" sz="1400" b="0" u="none" strike="noStrike">
               <a:solidFill>
                 <a:srgbClr val="000000"/>
               </a:solidFill>
@@ -1384,7 +1540,7 @@
       </p:grpSpPr>
       <p:sp>
         <p:nvSpPr>
-          <p:cNvPr id="188" name="PlaceHolder 1"/>
+          <p:cNvPr id="193" name="PlaceHolder 1"/>
           <p:cNvSpPr>
             <a:spLocks noGrp="1"/>
           </p:cNvSpPr>
@@ -1394,20 +1550,20 @@
         </p:nvSpPr>
         <p:spPr>
           <a:xfrm>
-            <a:off x="0" y="0"/>
-            <a:ext cx="0" cy="0"/>
-          </a:xfrm>
-          <a:prstGeom prst="rect">
-            <a:avLst/>
-          </a:prstGeom>
-          <a:ln w="0">
-            <a:noFill/>
-          </a:ln>
-        </p:spPr>
-      </p:sp>
-      <p:sp>
-        <p:nvSpPr>
-          <p:cNvPr id="189" name="PlaceHolder 2"/>
+            <a:off x="-360" y="-360"/>
+            <a:ext cx="720" cy="720"/>
+          </a:xfrm>
+          <a:prstGeom prst="rect">
+            <a:avLst/>
+          </a:prstGeom>
+          <a:ln w="0">
+            <a:noFill/>
+          </a:ln>
+        </p:spPr>
+      </p:sp>
+      <p:sp>
+        <p:nvSpPr>
+          <p:cNvPr id="194" name="PlaceHolder 2"/>
           <p:cNvSpPr>
             <a:spLocks noGrp="1"/>
           </p:cNvSpPr>
@@ -1434,22 +1590,61 @@
           </a:bodyPr>
           <a:p>
             <a:pPr indent="0" algn="l">
+              <a:lnSpc>
+                <a:spcPct val="100000"/>
+              </a:lnSpc>
               <a:buNone/>
-            </a:pPr>
-            <a:endParaRPr lang="en-US" sz="1800" b="0" u="none" strike="noStrike">
-              <a:solidFill>
-                <a:srgbClr val="000000"/>
-              </a:solidFill>
-              <a:effectLst/>
-              <a:uFillTx/>
-              <a:latin typeface="Arial"/>
-            </a:endParaRPr>
-          </a:p>
-        </p:txBody>
-      </p:sp>
-      <p:sp>
-        <p:nvSpPr>
-          <p:cNvPr id="190" name="PlaceHolder 3"/>
+              <a:tabLst>
+                <a:tab pos="0" algn="l"/>
+              </a:tabLst>
+            </a:pPr>
+            <a:r>
+              <a:rPr lang="en-US" sz="2000" b="0" u="none" strike="noStrike">
+                <a:solidFill>
+                  <a:srgbClr val="000000"/>
+                </a:solidFill>
+                <a:effectLst/>
+                <a:uFillTx/>
+                <a:latin typeface="Arial"/>
+              </a:rPr>
+              <a:t>Technology choices are based on the </a:t>
+            </a:r>
+            <a:r>
+              <a:rPr lang="en-US" sz="2000" b="0" u="none" strike="noStrike">
+                <a:solidFill>
+                  <a:srgbClr val="000000"/>
+                </a:solidFill>
+                <a:effectLst/>
+                <a:uFillTx/>
+                <a:latin typeface="Arial"/>
+              </a:rPr>
+              <a:t>repository pom.xml and deployment </a:t>
+            </a:r>
+            <a:r>
+              <a:rPr lang="en-US" sz="2000" b="0" u="none" strike="noStrike">
+                <a:solidFill>
+                  <a:srgbClr val="000000"/>
+                </a:solidFill>
+                <a:effectLst/>
+                <a:uFillTx/>
+                <a:latin typeface="Arial"/>
+              </a:rPr>
+              <a:t>documentation.</a:t>
+            </a:r>
+            <a:endParaRPr lang="en-US" sz="2000" b="0" u="none" strike="noStrike">
+              <a:solidFill>
+                <a:srgbClr val="000000"/>
+              </a:solidFill>
+              <a:effectLst/>
+              <a:uFillTx/>
+              <a:latin typeface="Arial"/>
+            </a:endParaRPr>
+          </a:p>
+        </p:txBody>
+      </p:sp>
+      <p:sp>
+        <p:nvSpPr>
+          <p:cNvPr id="195" name="PlaceHolder 3"/>
           <p:cNvSpPr>
             <a:spLocks noGrp="1"/>
           </p:cNvSpPr>
@@ -1478,7 +1673,7 @@
             <a:pPr indent="0" algn="l">
               <a:buNone/>
             </a:pPr>
-            <a:endParaRPr lang="en-US" sz="1800" b="0" u="none" strike="noStrike">
+            <a:endParaRPr lang="en-US" sz="1400" b="0" u="none" strike="noStrike">
               <a:solidFill>
                 <a:srgbClr val="000000"/>
               </a:solidFill>
@@ -1513,7 +1708,7 @@
       </p:grpSpPr>
       <p:sp>
         <p:nvSpPr>
-          <p:cNvPr id="191" name="PlaceHolder 1"/>
+          <p:cNvPr id="196" name="PlaceHolder 1"/>
           <p:cNvSpPr>
             <a:spLocks noGrp="1"/>
           </p:cNvSpPr>
@@ -1536,7 +1731,7 @@
       </p:sp>
       <p:sp>
         <p:nvSpPr>
-          <p:cNvPr id="192" name="PlaceHolder 2"/>
+          <p:cNvPr id="197" name="PlaceHolder 2"/>
           <p:cNvSpPr>
             <a:spLocks noGrp="1"/>
           </p:cNvSpPr>
@@ -1578,7 +1773,7 @@
       </p:sp>
       <p:sp>
         <p:nvSpPr>
-          <p:cNvPr id="193" name="PlaceHolder 3"/>
+          <p:cNvPr id="198" name="PlaceHolder 3"/>
           <p:cNvSpPr>
             <a:spLocks noGrp="1"/>
           </p:cNvSpPr>
@@ -1607,7 +1802,7 @@
             <a:pPr indent="0" algn="l">
               <a:buNone/>
             </a:pPr>
-            <a:endParaRPr lang="en-US" sz="1800" b="0" u="none" strike="noStrike">
+            <a:endParaRPr lang="en-US" sz="1400" b="0" u="none" strike="noStrike">
               <a:solidFill>
                 <a:srgbClr val="000000"/>
               </a:solidFill>
@@ -1642,7 +1837,7 @@
       </p:grpSpPr>
       <p:sp>
         <p:nvSpPr>
-          <p:cNvPr id="194" name="PlaceHolder 1"/>
+          <p:cNvPr id="199" name="PlaceHolder 1"/>
           <p:cNvSpPr>
             <a:spLocks noGrp="1"/>
           </p:cNvSpPr>
@@ -1665,7 +1860,7 @@
       </p:sp>
       <p:sp>
         <p:nvSpPr>
-          <p:cNvPr id="195" name="PlaceHolder 2"/>
+          <p:cNvPr id="200" name="PlaceHolder 2"/>
           <p:cNvSpPr>
             <a:spLocks noGrp="1"/>
           </p:cNvSpPr>
@@ -1707,7 +1902,7 @@
       </p:sp>
       <p:sp>
         <p:nvSpPr>
-          <p:cNvPr id="196" name="PlaceHolder 3"/>
+          <p:cNvPr id="201" name="PlaceHolder 3"/>
           <p:cNvSpPr>
             <a:spLocks noGrp="1"/>
           </p:cNvSpPr>
@@ -1736,7 +1931,7 @@
             <a:pPr indent="0" algn="l">
               <a:buNone/>
             </a:pPr>
-            <a:endParaRPr lang="en-US" sz="1800" b="0" u="none" strike="noStrike">
+            <a:endParaRPr lang="en-US" sz="1400" b="0" u="none" strike="noStrike">
               <a:solidFill>
                 <a:srgbClr val="000000"/>
               </a:solidFill>
@@ -1753,6 +1948,124 @@
 </file>
 
 <file path=ppt/slideLayouts/slideLayout1.xml><?xml version="1.0" encoding="utf-8"?>
+<p:sldLayout xmlns:a="http://schemas.openxmlformats.org/drawingml/2006/main" xmlns:p="http://schemas.openxmlformats.org/presentationml/2006/main" xmlns:r="http://schemas.openxmlformats.org/officeDocument/2006/relationships" xmlns:p14="http://schemas.microsoft.com/office/powerpoint/2010/main" xmlns:p15="http://schemas.microsoft.com/office/powerpoint/2012/main" xmlns:mc="http://schemas.openxmlformats.org/markup-compatibility/2006" type="tx" preserve="1">
+  <p:cSld name="Title Slide">
+    <p:spTree>
+      <p:nvGrpSpPr>
+        <p:cNvPr id="1" name=""/>
+        <p:cNvGrpSpPr/>
+        <p:nvPr/>
+      </p:nvGrpSpPr>
+      <p:grpSpPr>
+        <a:xfrm>
+          <a:off x="0" y="0"/>
+          <a:ext cx="0" cy="0"/>
+          <a:chOff x="0" y="0"/>
+          <a:chExt cx="0" cy="0"/>
+        </a:xfrm>
+      </p:grpSpPr>
+      <p:sp>
+        <p:nvSpPr>
+          <p:cNvPr id="4" name="PlaceHolder 1"/>
+          <p:cNvSpPr>
+            <a:spLocks noGrp="1"/>
+          </p:cNvSpPr>
+          <p:nvPr>
+            <p:ph type="title"/>
+          </p:nvPr>
+        </p:nvSpPr>
+        <p:spPr>
+          <a:xfrm>
+            <a:off x="609480" y="502920"/>
+            <a:ext cx="10972080" cy="686160"/>
+          </a:xfrm>
+          <a:prstGeom prst="rect">
+            <a:avLst/>
+          </a:prstGeom>
+          <a:noFill/>
+          <a:ln w="0">
+            <a:noFill/>
+          </a:ln>
+        </p:spPr>
+        <p:txBody>
+          <a:bodyPr lIns="0" tIns="0" rIns="0" bIns="0" anchor="ctr">
+            <a:spAutoFit/>
+          </a:bodyPr>
+          <a:p>
+            <a:pPr indent="0" algn="l">
+              <a:lnSpc>
+                <a:spcPct val="90000"/>
+              </a:lnSpc>
+              <a:buNone/>
+              <a:tabLst>
+                <a:tab pos="0" algn="l"/>
+              </a:tabLst>
+            </a:pPr>
+            <a:endParaRPr lang="en-US" sz="4400" b="0" u="none" strike="noStrike">
+              <a:solidFill>
+                <a:schemeClr val="dk1"/>
+              </a:solidFill>
+              <a:effectLst/>
+              <a:uFillTx/>
+              <a:latin typeface="Calibri Light"/>
+            </a:endParaRPr>
+          </a:p>
+        </p:txBody>
+      </p:sp>
+      <p:sp>
+        <p:nvSpPr>
+          <p:cNvPr id="5" name="PlaceHolder 2"/>
+          <p:cNvSpPr>
+            <a:spLocks noGrp="1"/>
+          </p:cNvSpPr>
+          <p:nvPr>
+            <p:ph/>
+          </p:nvPr>
+        </p:nvSpPr>
+        <p:spPr>
+          <a:xfrm>
+            <a:off x="609480" y="3379320"/>
+            <a:ext cx="10972080" cy="427320"/>
+          </a:xfrm>
+          <a:prstGeom prst="rect">
+            <a:avLst/>
+          </a:prstGeom>
+          <a:noFill/>
+          <a:ln w="0">
+            <a:noFill/>
+          </a:ln>
+        </p:spPr>
+        <p:txBody>
+          <a:bodyPr lIns="0" tIns="0" rIns="0" bIns="0" anchor="t">
+            <a:normAutofit/>
+          </a:bodyPr>
+          <a:p>
+            <a:pPr indent="0" algn="l">
+              <a:lnSpc>
+                <a:spcPct val="90000"/>
+              </a:lnSpc>
+              <a:spcBef>
+                <a:spcPts val="1417"/>
+              </a:spcBef>
+              <a:buNone/>
+            </a:pPr>
+            <a:endParaRPr lang="en-US" sz="2800" b="0" u="none" strike="noStrike">
+              <a:solidFill>
+                <a:schemeClr val="dk1"/>
+              </a:solidFill>
+              <a:effectLst/>
+              <a:uFillTx/>
+              <a:latin typeface="Calibri"/>
+            </a:endParaRPr>
+          </a:p>
+        </p:txBody>
+      </p:sp>
+    </p:spTree>
+  </p:cSld>
+</p:sldLayout>
+</file>
+
+<file path=ppt/slideLayouts/slideLayout2.xml><?xml version="1.0" encoding="utf-8"?>
 <p:sldLayout xmlns:a="http://schemas.openxmlformats.org/drawingml/2006/main" xmlns:p="http://schemas.openxmlformats.org/presentationml/2006/main" xmlns:r="http://schemas.openxmlformats.org/officeDocument/2006/relationships" xmlns:p14="http://schemas.microsoft.com/office/powerpoint/2010/main" xmlns:p15="http://schemas.microsoft.com/office/powerpoint/2012/main" xmlns:mc="http://schemas.openxmlformats.org/markup-compatibility/2006" type="title" preserve="1">
   <p:cSld name="Title Slide">
     <p:spTree>
@@ -1771,7 +2084,7 @@
       </p:grpSpPr>
       <p:sp>
         <p:nvSpPr>
-          <p:cNvPr id="4" name="PlaceHolder 1"/>
+          <p:cNvPr id="6" name="PlaceHolder 1"/>
           <p:cNvSpPr>
             <a:spLocks noGrp="1"/>
           </p:cNvSpPr>
@@ -1781,8 +2094,8 @@
         </p:nvSpPr>
         <p:spPr>
           <a:xfrm>
-            <a:off x="609480" y="273600"/>
-            <a:ext cx="10972440" cy="1144800"/>
+            <a:off x="609480" y="502920"/>
+            <a:ext cx="10972080" cy="686160"/>
           </a:xfrm>
           <a:prstGeom prst="rect">
             <a:avLst/>
@@ -1802,6 +2115,9 @@
                 <a:spcPct val="90000"/>
               </a:lnSpc>
               <a:buNone/>
+              <a:tabLst>
+                <a:tab pos="0" algn="l"/>
+              </a:tabLst>
             </a:pPr>
             <a:endParaRPr lang="en-US" sz="4400" b="0" u="none" strike="noStrike">
               <a:solidFill>
@@ -1816,7 +2132,7 @@
       </p:sp>
       <p:sp>
         <p:nvSpPr>
-          <p:cNvPr id="5" name="PlaceHolder 2"/>
+          <p:cNvPr id="7" name="PlaceHolder 2"/>
           <p:cNvSpPr>
             <a:spLocks noGrp="1"/>
           </p:cNvSpPr>
@@ -1826,8 +2142,8 @@
         </p:nvSpPr>
         <p:spPr>
           <a:xfrm>
-            <a:off x="609480" y="1604520"/>
-            <a:ext cx="10972440" cy="3977280"/>
+            <a:off x="609480" y="3364920"/>
+            <a:ext cx="10972080" cy="456120"/>
           </a:xfrm>
           <a:prstGeom prst="rect">
             <a:avLst/>
@@ -1897,8 +2213,8 @@
         </p:nvSpPr>
         <p:spPr>
           <a:xfrm>
-            <a:off x="609480" y="273600"/>
-            <a:ext cx="10972440" cy="1144800"/>
+            <a:off x="609480" y="543960"/>
+            <a:ext cx="10972080" cy="603720"/>
           </a:xfrm>
           <a:prstGeom prst="rect">
             <a:avLst/>
@@ -1910,7 +2226,7 @@
         </p:spPr>
         <p:txBody>
           <a:bodyPr lIns="0" tIns="0" rIns="0" bIns="0" anchor="ctr">
-            <a:noAutofit/>
+            <a:spAutoFit/>
           </a:bodyPr>
           <a:lstStyle>
             <a:lvl1pPr indent="0" algn="l">
@@ -1918,6 +2234,9 @@
                 <a:spcPct val="90000"/>
               </a:lnSpc>
               <a:buNone/>
+              <a:tabLst>
+                <a:tab pos="0" algn="l"/>
+              </a:tabLst>
               <a:defRPr lang="en-US" sz="4400" b="0" u="none" strike="noStrike">
                 <a:solidFill>
                   <a:schemeClr val="dk1"/>
@@ -1934,6 +2253,9 @@
                 <a:spcPct val="90000"/>
               </a:lnSpc>
               <a:buNone/>
+              <a:tabLst>
+                <a:tab pos="0" algn="l"/>
+              </a:tabLst>
             </a:pPr>
             <a:r>
               <a:rPr lang="en-US" sz="4400" b="0" u="none" strike="noStrike">
@@ -1944,84 +2266,7 @@
                 <a:uFillTx/>
                 <a:latin typeface="Calibri Light"/>
               </a:rPr>
-              <a:t>Click </a:t>
-            </a:r>
-            <a:r>
-              <a:rPr lang="en-US" sz="4400" b="0" u="none" strike="noStrike">
-                <a:solidFill>
-                  <a:schemeClr val="dk1"/>
-                </a:solidFill>
-                <a:effectLst/>
-                <a:uFillTx/>
-                <a:latin typeface="Calibri Light"/>
-              </a:rPr>
-              <a:t>to </a:t>
-            </a:r>
-            <a:r>
-              <a:rPr lang="en-US" sz="4400" b="0" u="none" strike="noStrike">
-                <a:solidFill>
-                  <a:schemeClr val="dk1"/>
-                </a:solidFill>
-                <a:effectLst/>
-                <a:uFillTx/>
-                <a:latin typeface="Calibri Light"/>
-              </a:rPr>
-              <a:t>edit </a:t>
-            </a:r>
-            <a:r>
-              <a:rPr lang="en-US" sz="4400" b="0" u="none" strike="noStrike">
-                <a:solidFill>
-                  <a:schemeClr val="dk1"/>
-                </a:solidFill>
-                <a:effectLst/>
-                <a:uFillTx/>
-                <a:latin typeface="Calibri Light"/>
-              </a:rPr>
-              <a:t>the </a:t>
-            </a:r>
-            <a:r>
-              <a:rPr lang="en-US" sz="4400" b="0" u="none" strike="noStrike">
-                <a:solidFill>
-                  <a:schemeClr val="dk1"/>
-                </a:solidFill>
-                <a:effectLst/>
-                <a:uFillTx/>
-                <a:latin typeface="Calibri Light"/>
-              </a:rPr>
-              <a:t>title </a:t>
-            </a:r>
-            <a:r>
-              <a:rPr lang="en-US" sz="4400" b="0" u="none" strike="noStrike">
-                <a:solidFill>
-                  <a:schemeClr val="dk1"/>
-                </a:solidFill>
-                <a:effectLst/>
-                <a:uFillTx/>
-                <a:latin typeface="Calibri Light"/>
-              </a:rPr>
-              <a:t>text </a:t>
-            </a:r>
-            <a:r>
-              <a:rPr lang="en-US" sz="4400" b="0" u="none" strike="noStrike">
-                <a:solidFill>
-                  <a:schemeClr val="dk1"/>
-                </a:solidFill>
-                <a:effectLst/>
-                <a:uFillTx/>
-                <a:latin typeface="Calibri Light"/>
-              </a:rPr>
-              <a:t>form</a:t>
-            </a:r>
-            <a:r>
-              <a:rPr lang="en-US" sz="4400" b="0" u="none" strike="noStrike">
-                <a:solidFill>
-                  <a:schemeClr val="dk1"/>
-                </a:solidFill>
-                <a:effectLst/>
-                <a:uFillTx/>
-                <a:latin typeface="Calibri Light"/>
-              </a:rPr>
-              <a:t>at</a:t>
+              <a:t>Click to edit the title text format</a:t>
             </a:r>
             <a:endParaRPr lang="en-US" sz="4400" b="0" u="none" strike="noStrike">
               <a:solidFill>
@@ -2218,7 +2463,7 @@
             </a:lvl7pPr>
           </a:lstStyle>
           <a:p>
-            <a:pPr marL="432000" indent="-324000" algn="l">
+            <a:pPr indent="-324000" algn="l">
               <a:lnSpc>
                 <a:spcPct val="90000"/>
               </a:lnSpc>
@@ -2469,6 +2714,7 @@
   <p:clrMap bg1="lt1" tx1="dk1" bg2="lt2" tx2="dk2" accent1="accent1" accent2="accent2" accent3="accent3" accent4="accent4" accent5="accent5" accent6="accent6" hlink="hlink" folHlink="folHlink"/>
   <p:sldLayoutIdLst>
     <p:sldLayoutId id="2147483649" r:id="rId2"/>
+    <p:sldLayoutId id="2147483650" r:id="rId3"/>
   </p:sldLayoutIdLst>
 </p:sldMaster>
 </file>
@@ -2499,14 +2745,14 @@
       </p:grpSpPr>
       <p:sp>
         <p:nvSpPr>
-          <p:cNvPr id="12" name=""/>
+          <p:cNvPr id="14" name=""/>
           <p:cNvSpPr/>
           <p:nvPr/>
         </p:nvSpPr>
         <p:spPr>
           <a:xfrm>
             <a:off x="0" y="0"/>
-            <a:ext cx="12191760" cy="6857640"/>
+            <a:ext cx="12191400" cy="6857280"/>
           </a:xfrm>
           <a:prstGeom prst="rect">
             <a:avLst/>
@@ -2542,14 +2788,14 @@
       </p:sp>
       <p:sp>
         <p:nvSpPr>
-          <p:cNvPr id="13" name=""/>
+          <p:cNvPr id="15" name=""/>
           <p:cNvSpPr/>
           <p:nvPr/>
         </p:nvSpPr>
         <p:spPr>
           <a:xfrm>
             <a:off x="0" y="0"/>
-            <a:ext cx="12191760" cy="114120"/>
+            <a:ext cx="12191400" cy="113760"/>
           </a:xfrm>
           <a:prstGeom prst="rect">
             <a:avLst/>
@@ -2585,14 +2831,14 @@
       </p:sp>
       <p:sp>
         <p:nvSpPr>
-          <p:cNvPr id="14" name=""/>
+          <p:cNvPr id="16" name=""/>
           <p:cNvSpPr/>
           <p:nvPr/>
         </p:nvSpPr>
         <p:spPr>
           <a:xfrm>
             <a:off x="7667640" y="914400"/>
-            <a:ext cx="3428640" cy="3428640"/>
+            <a:ext cx="3428280" cy="3428280"/>
           </a:xfrm>
           <a:prstGeom prst="roundRect">
             <a:avLst>
@@ -2630,7 +2876,7 @@
       </p:sp>
       <p:pic>
         <p:nvPicPr>
-          <p:cNvPr id="15" name=""/>
+          <p:cNvPr id="17" name=""/>
           <p:cNvPicPr/>
           <p:nvPr/>
         </p:nvPicPr>
@@ -2641,7 +2887,7 @@
         <p:spPr>
           <a:xfrm>
             <a:off x="7905600" y="1162080"/>
-            <a:ext cx="2952360" cy="2952360"/>
+            <a:ext cx="2952000" cy="2952000"/>
           </a:xfrm>
           <a:prstGeom prst="rect">
             <a:avLst/>
@@ -2654,14 +2900,14 @@
       </p:pic>
       <p:sp>
         <p:nvSpPr>
-          <p:cNvPr id="16" name=""/>
+          <p:cNvPr id="18" name=""/>
           <p:cNvSpPr/>
           <p:nvPr/>
         </p:nvSpPr>
         <p:spPr>
           <a:xfrm>
             <a:off x="781200" y="1447920"/>
-            <a:ext cx="6190920" cy="666360"/>
+            <a:ext cx="6190560" cy="666000"/>
           </a:xfrm>
           <a:prstGeom prst="rect">
             <a:avLst/>
@@ -2712,14 +2958,14 @@
       </p:sp>
       <p:sp>
         <p:nvSpPr>
-          <p:cNvPr id="17" name=""/>
+          <p:cNvPr id="19" name=""/>
           <p:cNvSpPr/>
           <p:nvPr/>
         </p:nvSpPr>
         <p:spPr>
           <a:xfrm>
             <a:off x="800280" y="2209680"/>
-            <a:ext cx="5619240" cy="590040"/>
+            <a:ext cx="5618880" cy="589680"/>
           </a:xfrm>
           <a:prstGeom prst="rect">
             <a:avLst/>
@@ -2770,39 +3016,34 @@
       </p:sp>
       <p:sp>
         <p:nvSpPr>
-          <p:cNvPr id="18" name=""/>
+          <p:cNvPr id="20" name=""/>
           <p:cNvSpPr/>
           <p:nvPr/>
         </p:nvSpPr>
         <p:spPr>
           <a:xfrm>
             <a:off x="800280" y="3105000"/>
-            <a:ext cx="3524040" cy="285480"/>
-          </a:xfrm>
-          <a:prstGeom prst="rect">
-            <a:avLst/>
-          </a:prstGeom>
-          <a:noFill/>
-          <a:ln w="0">
-            <a:noFill/>
-          </a:ln>
-        </p:spPr>
-        <p:style>
-          <a:lnRef idx="0"/>
-          <a:fillRef idx="0"/>
-          <a:effectRef idx="0"/>
-          <a:fontRef idx="minor"/>
-        </p:style>
-        <p:txBody>
-          <a:bodyPr lIns="90000" tIns="45000" rIns="90000" bIns="45000" anchor="t">
-            <a:normAutofit fontScale="85000" lnSpcReduction="9999"/>
-          </a:bodyPr>
-          <a:p>
-            <a:pPr>
-              <a:lnSpc>
-                <a:spcPct val="100000"/>
-              </a:lnSpc>
-            </a:pPr>
+            <a:ext cx="3523680" cy="285120"/>
+          </a:xfrm>
+          <a:prstGeom prst="rect">
+            <a:avLst/>
+          </a:prstGeom>
+          <a:noFill/>
+          <a:ln w="0">
+            <a:noFill/>
+          </a:ln>
+        </p:spPr>
+        <p:style>
+          <a:lnRef idx="0"/>
+          <a:fillRef idx="0"/>
+          <a:effectRef idx="0"/>
+          <a:fontRef idx="minor"/>
+        </p:style>
+        <p:txBody>
+          <a:bodyPr lIns="90000" tIns="45000" rIns="90000" bIns="45000" anchor="t">
+            <a:normAutofit fontScale="47500" lnSpcReduction="19999"/>
+          </a:bodyPr>
+          <a:p>
             <a:endParaRPr lang="en-US" sz="1800" b="0" u="none" strike="noStrike">
               <a:solidFill>
                 <a:srgbClr val="FFFFFF"/>
@@ -2816,14 +3057,14 @@
       </p:sp>
       <p:sp>
         <p:nvSpPr>
-          <p:cNvPr id="19" name=""/>
+          <p:cNvPr id="21" name=""/>
           <p:cNvSpPr/>
           <p:nvPr/>
         </p:nvSpPr>
         <p:spPr>
           <a:xfrm>
             <a:off x="800280" y="3600360"/>
-            <a:ext cx="4238280" cy="266400"/>
+            <a:ext cx="4237920" cy="266040"/>
           </a:xfrm>
           <a:prstGeom prst="rect">
             <a:avLst/>
@@ -2874,14 +3115,14 @@
       </p:sp>
       <p:sp>
         <p:nvSpPr>
-          <p:cNvPr id="20" name=""/>
+          <p:cNvPr id="22" name=""/>
           <p:cNvSpPr/>
           <p:nvPr/>
         </p:nvSpPr>
         <p:spPr>
           <a:xfrm>
             <a:off x="800280" y="4457880"/>
-            <a:ext cx="5285880" cy="552240"/>
+            <a:ext cx="5285520" cy="551880"/>
           </a:xfrm>
           <a:prstGeom prst="rect">
             <a:avLst/>
@@ -2917,7 +3158,19 @@
                 <a:latin typeface="C059"/>
                 <a:ea typeface="C059"/>
               </a:rPr>
-              <a:t>A role-based platform for trusted artifact discovery, approval, and bidding</a:t>
+              <a:t>A role-based platform for trusted artifact </a:t>
+            </a:r>
+            <a:r>
+              <a:rPr lang="en-US" sz="1500" b="0" u="none" strike="noStrike">
+                <a:solidFill>
+                  <a:srgbClr val="DDE8EE"/>
+                </a:solidFill>
+                <a:effectLst/>
+                <a:uFillTx/>
+                <a:latin typeface="C059"/>
+                <a:ea typeface="C059"/>
+              </a:rPr>
+              <a:t>discovery, approval, and bidding</a:t>
             </a:r>
             <a:endParaRPr lang="en-US" sz="1500" b="0" u="none" strike="noStrike">
               <a:solidFill>
@@ -2944,6 +3197,762 @@
 </file>
 
 <file path=ppt/slides/slide10.xml><?xml version="1.0" encoding="utf-8"?>
+<p:sld xmlns:a="http://schemas.openxmlformats.org/drawingml/2006/main" xmlns:p="http://schemas.openxmlformats.org/presentationml/2006/main" xmlns:r="http://schemas.openxmlformats.org/officeDocument/2006/relationships" xmlns:p14="http://schemas.microsoft.com/office/powerpoint/2010/main" xmlns:p15="http://schemas.microsoft.com/office/powerpoint/2012/main" xmlns:mc="http://schemas.openxmlformats.org/markup-compatibility/2006">
+  <p:cSld>
+    <p:bg>
+      <p:bgPr>
+        <a:solidFill>
+          <a:srgbClr val="F7F3EC"/>
+        </a:solidFill>
+      </p:bgPr>
+    </p:bg>
+    <p:spTree>
+      <p:nvGrpSpPr>
+        <p:cNvPr id="1" name=""/>
+        <p:cNvGrpSpPr/>
+        <p:nvPr/>
+      </p:nvGrpSpPr>
+      <p:grpSpPr>
+        <a:xfrm>
+          <a:off x="0" y="0"/>
+          <a:ext cx="0" cy="0"/>
+          <a:chOff x="0" y="0"/>
+          <a:chExt cx="0" cy="0"/>
+        </a:xfrm>
+      </p:grpSpPr>
+      <p:sp>
+        <p:nvSpPr>
+          <p:cNvPr id="158" name=""/>
+          <p:cNvSpPr/>
+          <p:nvPr/>
+        </p:nvSpPr>
+        <p:spPr>
+          <a:xfrm>
+            <a:off x="0" y="0"/>
+            <a:ext cx="12191400" cy="151560"/>
+          </a:xfrm>
+          <a:prstGeom prst="rect">
+            <a:avLst/>
+          </a:prstGeom>
+          <a:solidFill>
+            <a:srgbClr val="D99A31"/>
+          </a:solidFill>
+          <a:ln w="0">
+            <a:noFill/>
+          </a:ln>
+        </p:spPr>
+        <p:style>
+          <a:lnRef idx="0"/>
+          <a:fillRef idx="0"/>
+          <a:effectRef idx="0"/>
+          <a:fontRef idx="minor"/>
+        </p:style>
+        <p:txBody>
+          <a:bodyPr lIns="90000" tIns="45000" rIns="90000" bIns="45000" anchor="t">
+            <a:noAutofit/>
+          </a:bodyPr>
+          <a:p>
+            <a:endParaRPr lang="en-US" sz="1800" b="0" u="none" strike="noStrike">
+              <a:solidFill>
+                <a:srgbClr val="000000"/>
+              </a:solidFill>
+              <a:effectLst/>
+              <a:uFillTx/>
+              <a:latin typeface="Arial"/>
+            </a:endParaRPr>
+          </a:p>
+        </p:txBody>
+      </p:sp>
+      <p:sp>
+        <p:nvSpPr>
+          <p:cNvPr id="159" name=""/>
+          <p:cNvSpPr/>
+          <p:nvPr/>
+        </p:nvSpPr>
+        <p:spPr>
+          <a:xfrm>
+            <a:off x="666720" y="857160"/>
+            <a:ext cx="9905400" cy="570960"/>
+          </a:xfrm>
+          <a:prstGeom prst="rect">
+            <a:avLst/>
+          </a:prstGeom>
+          <a:noFill/>
+          <a:ln w="0">
+            <a:noFill/>
+          </a:ln>
+        </p:spPr>
+        <p:style>
+          <a:lnRef idx="0"/>
+          <a:fillRef idx="0"/>
+          <a:effectRef idx="0"/>
+          <a:fontRef idx="minor"/>
+        </p:style>
+        <p:txBody>
+          <a:bodyPr lIns="90000" tIns="45000" rIns="90000" bIns="45000" anchor="t">
+            <a:normAutofit/>
+          </a:bodyPr>
+          <a:p>
+            <a:pPr>
+              <a:lnSpc>
+                <a:spcPct val="100000"/>
+              </a:lnSpc>
+            </a:pPr>
+            <a:r>
+              <a:rPr lang="en-US" sz="2400" b="1" u="none" strike="noStrike">
+                <a:solidFill>
+                  <a:srgbClr val="10263F"/>
+                </a:solidFill>
+                <a:effectLst/>
+                <a:uFillTx/>
+                <a:latin typeface="C059"/>
+                <a:ea typeface="C059"/>
+              </a:rPr>
+              <a:t>Expected outcome and future scope</a:t>
+            </a:r>
+            <a:endParaRPr lang="en-US" sz="2400" b="0" u="none" strike="noStrike">
+              <a:solidFill>
+                <a:srgbClr val="000000"/>
+              </a:solidFill>
+              <a:effectLst/>
+              <a:uFillTx/>
+              <a:latin typeface="Arial"/>
+            </a:endParaRPr>
+          </a:p>
+        </p:txBody>
+      </p:sp>
+      <p:sp>
+        <p:nvSpPr>
+          <p:cNvPr id="160" name=""/>
+          <p:cNvSpPr/>
+          <p:nvPr/>
+        </p:nvSpPr>
+        <p:spPr>
+          <a:xfrm>
+            <a:off x="685800" y="1409760"/>
+            <a:ext cx="9714960" cy="266040"/>
+          </a:xfrm>
+          <a:prstGeom prst="rect">
+            <a:avLst/>
+          </a:prstGeom>
+          <a:noFill/>
+          <a:ln w="0">
+            <a:noFill/>
+          </a:ln>
+        </p:spPr>
+        <p:style>
+          <a:lnRef idx="0"/>
+          <a:fillRef idx="0"/>
+          <a:effectRef idx="0"/>
+          <a:fontRef idx="minor"/>
+        </p:style>
+        <p:txBody>
+          <a:bodyPr lIns="90000" tIns="45000" rIns="90000" bIns="45000" anchor="t">
+            <a:normAutofit lnSpcReduction="9999"/>
+          </a:bodyPr>
+          <a:p>
+            <a:pPr>
+              <a:lnSpc>
+                <a:spcPct val="100000"/>
+              </a:lnSpc>
+            </a:pPr>
+            <a:r>
+              <a:rPr lang="en-US" sz="1200" b="0" u="none" strike="noStrike">
+                <a:solidFill>
+                  <a:srgbClr val="54616D"/>
+                </a:solidFill>
+                <a:effectLst/>
+                <a:uFillTx/>
+                <a:latin typeface="C059"/>
+                <a:ea typeface="C059"/>
+              </a:rPr>
+              <a:t>The project’s intended result is a structured auction workflow that can grow beyond the first release.</a:t>
+            </a:r>
+            <a:endParaRPr lang="en-US" sz="1200" b="0" u="none" strike="noStrike">
+              <a:solidFill>
+                <a:srgbClr val="000000"/>
+              </a:solidFill>
+              <a:effectLst/>
+              <a:uFillTx/>
+              <a:latin typeface="Arial"/>
+            </a:endParaRPr>
+          </a:p>
+        </p:txBody>
+      </p:sp>
+      <p:sp>
+        <p:nvSpPr>
+          <p:cNvPr id="161" name=""/>
+          <p:cNvSpPr/>
+          <p:nvPr/>
+        </p:nvSpPr>
+        <p:spPr>
+          <a:xfrm>
+            <a:off x="10191600" y="6343560"/>
+            <a:ext cx="1428120" cy="208800"/>
+          </a:xfrm>
+          <a:prstGeom prst="rect">
+            <a:avLst/>
+          </a:prstGeom>
+          <a:noFill/>
+          <a:ln w="0">
+            <a:noFill/>
+          </a:ln>
+        </p:spPr>
+        <p:style>
+          <a:lnRef idx="0"/>
+          <a:fillRef idx="0"/>
+          <a:effectRef idx="0"/>
+          <a:fontRef idx="minor"/>
+        </p:style>
+        <p:txBody>
+          <a:bodyPr lIns="90000" tIns="45000" rIns="90000" bIns="45000" anchor="t">
+            <a:normAutofit fontScale="92500" lnSpcReduction="9999"/>
+          </a:bodyPr>
+          <a:p>
+            <a:pPr algn="r">
+              <a:lnSpc>
+                <a:spcPct val="100000"/>
+              </a:lnSpc>
+            </a:pPr>
+            <a:r>
+              <a:rPr lang="en-US" sz="900" b="0" u="none" strike="noStrike">
+                <a:solidFill>
+                  <a:srgbClr val="54616D"/>
+                </a:solidFill>
+                <a:effectLst/>
+                <a:uFillTx/>
+                <a:latin typeface="C059"/>
+                <a:ea typeface="C059"/>
+              </a:rPr>
+              <a:t>Artifact Alley  |  09</a:t>
+            </a:r>
+            <a:endParaRPr lang="en-US" sz="900" b="0" u="none" strike="noStrike">
+              <a:solidFill>
+                <a:srgbClr val="000000"/>
+              </a:solidFill>
+              <a:effectLst/>
+              <a:uFillTx/>
+              <a:latin typeface="Arial"/>
+            </a:endParaRPr>
+          </a:p>
+        </p:txBody>
+      </p:sp>
+      <p:sp>
+        <p:nvSpPr>
+          <p:cNvPr id="162" name=""/>
+          <p:cNvSpPr/>
+          <p:nvPr/>
+        </p:nvSpPr>
+        <p:spPr>
+          <a:xfrm>
+            <a:off x="762120" y="1676520"/>
+            <a:ext cx="4761720" cy="3428280"/>
+          </a:xfrm>
+          <a:prstGeom prst="roundRect">
+            <a:avLst>
+              <a:gd name="adj" fmla="val 5556"/>
+            </a:avLst>
+          </a:prstGeom>
+          <a:solidFill>
+            <a:srgbClr val="FFFFFF"/>
+          </a:solidFill>
+          <a:ln w="0">
+            <a:noFill/>
+          </a:ln>
+        </p:spPr>
+        <p:style>
+          <a:lnRef idx="0"/>
+          <a:fillRef idx="0"/>
+          <a:effectRef idx="0"/>
+          <a:fontRef idx="minor"/>
+        </p:style>
+        <p:txBody>
+          <a:bodyPr lIns="90000" tIns="45000" rIns="90000" bIns="45000" anchor="t">
+            <a:noAutofit/>
+          </a:bodyPr>
+          <a:p>
+            <a:endParaRPr lang="en-US" sz="1800" b="0" u="none" strike="noStrike">
+              <a:solidFill>
+                <a:srgbClr val="000000"/>
+              </a:solidFill>
+              <a:effectLst/>
+              <a:uFillTx/>
+              <a:latin typeface="Arial"/>
+            </a:endParaRPr>
+          </a:p>
+        </p:txBody>
+      </p:sp>
+      <p:sp>
+        <p:nvSpPr>
+          <p:cNvPr id="163" name=""/>
+          <p:cNvSpPr/>
+          <p:nvPr/>
+        </p:nvSpPr>
+        <p:spPr>
+          <a:xfrm>
+            <a:off x="1123920" y="2048040"/>
+            <a:ext cx="3332880" cy="304200"/>
+          </a:xfrm>
+          <a:prstGeom prst="rect">
+            <a:avLst/>
+          </a:prstGeom>
+          <a:noFill/>
+          <a:ln w="0">
+            <a:noFill/>
+          </a:ln>
+        </p:spPr>
+        <p:style>
+          <a:lnRef idx="0"/>
+          <a:fillRef idx="0"/>
+          <a:effectRef idx="0"/>
+          <a:fontRef idx="minor"/>
+        </p:style>
+        <p:txBody>
+          <a:bodyPr lIns="90000" tIns="45000" rIns="90000" bIns="45000" anchor="t">
+            <a:normAutofit fontScale="85000" lnSpcReduction="19999"/>
+          </a:bodyPr>
+          <a:p>
+            <a:pPr>
+              <a:lnSpc>
+                <a:spcPct val="100000"/>
+              </a:lnSpc>
+            </a:pPr>
+            <a:r>
+              <a:rPr lang="en-US" sz="1870" b="1" u="none" strike="noStrike">
+                <a:solidFill>
+                  <a:srgbClr val="10263F"/>
+                </a:solidFill>
+                <a:effectLst/>
+                <a:uFillTx/>
+                <a:latin typeface="C059"/>
+                <a:ea typeface="C059"/>
+              </a:rPr>
+              <a:t>Expected outcome</a:t>
+            </a:r>
+            <a:endParaRPr lang="en-US" sz="1870" b="0" u="none" strike="noStrike">
+              <a:solidFill>
+                <a:srgbClr val="000000"/>
+              </a:solidFill>
+              <a:effectLst/>
+              <a:uFillTx/>
+              <a:latin typeface="Arial"/>
+            </a:endParaRPr>
+          </a:p>
+        </p:txBody>
+      </p:sp>
+      <p:sp>
+        <p:nvSpPr>
+          <p:cNvPr id="164" name=""/>
+          <p:cNvSpPr/>
+          <p:nvPr/>
+        </p:nvSpPr>
+        <p:spPr>
+          <a:xfrm>
+            <a:off x="1123920" y="2647800"/>
+            <a:ext cx="3761640" cy="1571040"/>
+          </a:xfrm>
+          <a:prstGeom prst="rect">
+            <a:avLst/>
+          </a:prstGeom>
+          <a:noFill/>
+          <a:ln w="0">
+            <a:noFill/>
+          </a:ln>
+        </p:spPr>
+        <p:style>
+          <a:lnRef idx="0"/>
+          <a:fillRef idx="0"/>
+          <a:effectRef idx="0"/>
+          <a:fontRef idx="minor"/>
+        </p:style>
+        <p:txBody>
+          <a:bodyPr lIns="90000" tIns="45000" rIns="90000" bIns="45000" anchor="t">
+            <a:normAutofit/>
+          </a:bodyPr>
+          <a:p>
+            <a:pPr>
+              <a:lnSpc>
+                <a:spcPct val="100000"/>
+              </a:lnSpc>
+            </a:pPr>
+            <a:r>
+              <a:rPr lang="en-US" sz="1430" b="0" u="none" strike="noStrike">
+                <a:solidFill>
+                  <a:srgbClr val="17212B"/>
+                </a:solidFill>
+                <a:effectLst/>
+                <a:uFillTx/>
+                <a:latin typeface="C059"/>
+                <a:ea typeface="C059"/>
+              </a:rPr>
+              <a:t>A single web platform where:</a:t>
+            </a:r>
+            <a:endParaRPr lang="en-US" sz="1430" b="0" u="none" strike="noStrike">
+              <a:solidFill>
+                <a:srgbClr val="000000"/>
+              </a:solidFill>
+              <a:effectLst/>
+              <a:uFillTx/>
+              <a:latin typeface="Arial"/>
+            </a:endParaRPr>
+          </a:p>
+          <a:p>
+            <a:pPr>
+              <a:lnSpc>
+                <a:spcPct val="100000"/>
+              </a:lnSpc>
+            </a:pPr>
+            <a:endParaRPr lang="en-US" sz="1800" b="0" u="none" strike="noStrike">
+              <a:solidFill>
+                <a:srgbClr val="000000"/>
+              </a:solidFill>
+              <a:effectLst/>
+              <a:uFillTx/>
+              <a:latin typeface="Arial"/>
+            </a:endParaRPr>
+          </a:p>
+          <a:p>
+            <a:pPr>
+              <a:lnSpc>
+                <a:spcPct val="100000"/>
+              </a:lnSpc>
+            </a:pPr>
+            <a:r>
+              <a:rPr lang="en-US" sz="1430" b="0" u="none" strike="noStrike">
+                <a:solidFill>
+                  <a:srgbClr val="17212B"/>
+                </a:solidFill>
+                <a:effectLst/>
+                <a:uFillTx/>
+                <a:latin typeface="C059"/>
+                <a:ea typeface="C059"/>
+              </a:rPr>
+              <a:t>• bidders participate in live auctions</a:t>
+            </a:r>
+            <a:endParaRPr lang="en-US" sz="1430" b="0" u="none" strike="noStrike">
+              <a:solidFill>
+                <a:srgbClr val="000000"/>
+              </a:solidFill>
+              <a:effectLst/>
+              <a:uFillTx/>
+              <a:latin typeface="Arial"/>
+            </a:endParaRPr>
+          </a:p>
+          <a:p>
+            <a:pPr>
+              <a:lnSpc>
+                <a:spcPct val="100000"/>
+              </a:lnSpc>
+            </a:pPr>
+            <a:r>
+              <a:rPr lang="en-US" sz="1430" b="0" u="none" strike="noStrike">
+                <a:solidFill>
+                  <a:srgbClr val="17212B"/>
+                </a:solidFill>
+                <a:effectLst/>
+                <a:uFillTx/>
+                <a:latin typeface="C059"/>
+                <a:ea typeface="C059"/>
+              </a:rPr>
+              <a:t>• sellers submit artifacts through review</a:t>
+            </a:r>
+            <a:endParaRPr lang="en-US" sz="1430" b="0" u="none" strike="noStrike">
+              <a:solidFill>
+                <a:srgbClr val="000000"/>
+              </a:solidFill>
+              <a:effectLst/>
+              <a:uFillTx/>
+              <a:latin typeface="Arial"/>
+            </a:endParaRPr>
+          </a:p>
+          <a:p>
+            <a:pPr>
+              <a:lnSpc>
+                <a:spcPct val="100000"/>
+              </a:lnSpc>
+            </a:pPr>
+            <a:r>
+              <a:rPr lang="en-US" sz="1430" b="0" u="none" strike="noStrike">
+                <a:solidFill>
+                  <a:srgbClr val="17212B"/>
+                </a:solidFill>
+                <a:effectLst/>
+                <a:uFillTx/>
+                <a:latin typeface="C059"/>
+                <a:ea typeface="C059"/>
+              </a:rPr>
+              <a:t>• administrators control marketplace entry</a:t>
+            </a:r>
+            <a:endParaRPr lang="en-US" sz="1430" b="0" u="none" strike="noStrike">
+              <a:solidFill>
+                <a:srgbClr val="000000"/>
+              </a:solidFill>
+              <a:effectLst/>
+              <a:uFillTx/>
+              <a:latin typeface="Arial"/>
+            </a:endParaRPr>
+          </a:p>
+        </p:txBody>
+      </p:sp>
+      <p:sp>
+        <p:nvSpPr>
+          <p:cNvPr id="165" name=""/>
+          <p:cNvSpPr/>
+          <p:nvPr/>
+        </p:nvSpPr>
+        <p:spPr>
+          <a:xfrm>
+            <a:off x="6095880" y="1676520"/>
+            <a:ext cx="5333400" cy="3428280"/>
+          </a:xfrm>
+          <a:prstGeom prst="roundRect">
+            <a:avLst>
+              <a:gd name="adj" fmla="val 5556"/>
+            </a:avLst>
+          </a:prstGeom>
+          <a:solidFill>
+            <a:srgbClr val="EAF3F4"/>
+          </a:solidFill>
+          <a:ln w="0">
+            <a:noFill/>
+          </a:ln>
+        </p:spPr>
+        <p:style>
+          <a:lnRef idx="0"/>
+          <a:fillRef idx="0"/>
+          <a:effectRef idx="0"/>
+          <a:fontRef idx="minor"/>
+        </p:style>
+        <p:txBody>
+          <a:bodyPr lIns="90000" tIns="45000" rIns="90000" bIns="45000" anchor="t">
+            <a:noAutofit/>
+          </a:bodyPr>
+          <a:p>
+            <a:endParaRPr lang="en-US" sz="1800" b="0" u="none" strike="noStrike">
+              <a:solidFill>
+                <a:srgbClr val="000000"/>
+              </a:solidFill>
+              <a:effectLst/>
+              <a:uFillTx/>
+              <a:latin typeface="Arial"/>
+            </a:endParaRPr>
+          </a:p>
+        </p:txBody>
+      </p:sp>
+      <p:sp>
+        <p:nvSpPr>
+          <p:cNvPr id="166" name=""/>
+          <p:cNvSpPr/>
+          <p:nvPr/>
+        </p:nvSpPr>
+        <p:spPr>
+          <a:xfrm>
+            <a:off x="6515280" y="2048040"/>
+            <a:ext cx="3714120" cy="304200"/>
+          </a:xfrm>
+          <a:prstGeom prst="rect">
+            <a:avLst/>
+          </a:prstGeom>
+          <a:noFill/>
+          <a:ln w="0">
+            <a:noFill/>
+          </a:ln>
+        </p:spPr>
+        <p:style>
+          <a:lnRef idx="0"/>
+          <a:fillRef idx="0"/>
+          <a:effectRef idx="0"/>
+          <a:fontRef idx="minor"/>
+        </p:style>
+        <p:txBody>
+          <a:bodyPr lIns="90000" tIns="45000" rIns="90000" bIns="45000" anchor="t">
+            <a:normAutofit fontScale="85000" lnSpcReduction="19999"/>
+          </a:bodyPr>
+          <a:p>
+            <a:pPr>
+              <a:lnSpc>
+                <a:spcPct val="100000"/>
+              </a:lnSpc>
+            </a:pPr>
+            <a:r>
+              <a:rPr lang="en-US" sz="1870" b="1" u="none" strike="noStrike">
+                <a:solidFill>
+                  <a:srgbClr val="10263F"/>
+                </a:solidFill>
+                <a:effectLst/>
+                <a:uFillTx/>
+                <a:latin typeface="C059"/>
+                <a:ea typeface="C059"/>
+              </a:rPr>
+              <a:t>Next planned capabilities</a:t>
+            </a:r>
+            <a:endParaRPr lang="en-US" sz="1870" b="0" u="none" strike="noStrike">
+              <a:solidFill>
+                <a:srgbClr val="000000"/>
+              </a:solidFill>
+              <a:effectLst/>
+              <a:uFillTx/>
+              <a:latin typeface="Arial"/>
+            </a:endParaRPr>
+          </a:p>
+        </p:txBody>
+      </p:sp>
+      <p:sp>
+        <p:nvSpPr>
+          <p:cNvPr id="167" name=""/>
+          <p:cNvSpPr/>
+          <p:nvPr/>
+        </p:nvSpPr>
+        <p:spPr>
+          <a:xfrm>
+            <a:off x="6515280" y="2647800"/>
+            <a:ext cx="4190400" cy="1571040"/>
+          </a:xfrm>
+          <a:prstGeom prst="rect">
+            <a:avLst/>
+          </a:prstGeom>
+          <a:noFill/>
+          <a:ln w="0">
+            <a:noFill/>
+          </a:ln>
+        </p:spPr>
+        <p:style>
+          <a:lnRef idx="0"/>
+          <a:fillRef idx="0"/>
+          <a:effectRef idx="0"/>
+          <a:fontRef idx="minor"/>
+        </p:style>
+        <p:txBody>
+          <a:bodyPr lIns="90000" tIns="45000" rIns="90000" bIns="45000" anchor="t">
+            <a:normAutofit fontScale="92500" lnSpcReduction="9999"/>
+          </a:bodyPr>
+          <a:p>
+            <a:pPr>
+              <a:lnSpc>
+                <a:spcPct val="100000"/>
+              </a:lnSpc>
+            </a:pPr>
+            <a:r>
+              <a:rPr lang="en-US" sz="1430" b="0" u="none" strike="noStrike">
+                <a:solidFill>
+                  <a:srgbClr val="17212B"/>
+                </a:solidFill>
+                <a:effectLst/>
+                <a:uFillTx/>
+                <a:latin typeface="C059"/>
+                <a:ea typeface="C059"/>
+              </a:rPr>
+              <a:t>• Artifact photos and richer catalogue information</a:t>
+            </a:r>
+            <a:endParaRPr lang="en-US" sz="1430" b="0" u="none" strike="noStrike">
+              <a:solidFill>
+                <a:srgbClr val="000000"/>
+              </a:solidFill>
+              <a:effectLst/>
+              <a:uFillTx/>
+              <a:latin typeface="Arial"/>
+            </a:endParaRPr>
+          </a:p>
+          <a:p>
+            <a:pPr>
+              <a:lnSpc>
+                <a:spcPct val="100000"/>
+              </a:lnSpc>
+            </a:pPr>
+            <a:endParaRPr lang="en-US" sz="1800" b="0" u="none" strike="noStrike">
+              <a:solidFill>
+                <a:srgbClr val="000000"/>
+              </a:solidFill>
+              <a:effectLst/>
+              <a:uFillTx/>
+              <a:latin typeface="Arial"/>
+            </a:endParaRPr>
+          </a:p>
+          <a:p>
+            <a:pPr>
+              <a:lnSpc>
+                <a:spcPct val="100000"/>
+              </a:lnSpc>
+            </a:pPr>
+            <a:r>
+              <a:rPr lang="en-US" sz="1430" b="0" u="none" strike="noStrike">
+                <a:solidFill>
+                  <a:srgbClr val="17212B"/>
+                </a:solidFill>
+                <a:effectLst/>
+                <a:uFillTx/>
+                <a:latin typeface="C059"/>
+                <a:ea typeface="C059"/>
+              </a:rPr>
+              <a:t>• Seller dashboard for submitted listings</a:t>
+            </a:r>
+            <a:endParaRPr lang="en-US" sz="1430" b="0" u="none" strike="noStrike">
+              <a:solidFill>
+                <a:srgbClr val="000000"/>
+              </a:solidFill>
+              <a:effectLst/>
+              <a:uFillTx/>
+              <a:latin typeface="Arial"/>
+            </a:endParaRPr>
+          </a:p>
+          <a:p>
+            <a:pPr>
+              <a:lnSpc>
+                <a:spcPct val="100000"/>
+              </a:lnSpc>
+            </a:pPr>
+            <a:endParaRPr lang="en-US" sz="1800" b="0" u="none" strike="noStrike">
+              <a:solidFill>
+                <a:srgbClr val="000000"/>
+              </a:solidFill>
+              <a:effectLst/>
+              <a:uFillTx/>
+              <a:latin typeface="Arial"/>
+            </a:endParaRPr>
+          </a:p>
+          <a:p>
+            <a:pPr>
+              <a:lnSpc>
+                <a:spcPct val="100000"/>
+              </a:lnSpc>
+            </a:pPr>
+            <a:r>
+              <a:rPr lang="en-US" sz="1430" b="0" u="none" strike="noStrike">
+                <a:solidFill>
+                  <a:srgbClr val="17212B"/>
+                </a:solidFill>
+                <a:effectLst/>
+                <a:uFillTx/>
+                <a:latin typeface="C059"/>
+                <a:ea typeface="C059"/>
+              </a:rPr>
+              <a:t>• Auction closing logic, winner notification, and payment integration</a:t>
+            </a:r>
+            <a:endParaRPr lang="en-US" sz="1430" b="0" u="none" strike="noStrike">
+              <a:solidFill>
+                <a:srgbClr val="000000"/>
+              </a:solidFill>
+              <a:effectLst/>
+              <a:uFillTx/>
+              <a:latin typeface="Arial"/>
+            </a:endParaRPr>
+          </a:p>
+        </p:txBody>
+      </p:sp>
+    </p:spTree>
+  </p:cSld>
+  <mc:AlternateContent>
+    <mc:Choice Requires="p14">
+      <p:transition spd="slow" p14:dur="2000"/>
+    </mc:Choice>
+    <mc:Fallback>
+      <p:transition spd="slow"/>
+    </mc:Fallback>
+  </mc:AlternateContent>
+</p:sld>
+</file>
+
+<file path=ppt/slides/slide11.xml><?xml version="1.0" encoding="utf-8"?>
 <p:sld xmlns:a="http://schemas.openxmlformats.org/drawingml/2006/main" xmlns:p="http://schemas.openxmlformats.org/presentationml/2006/main" xmlns:r="http://schemas.openxmlformats.org/officeDocument/2006/relationships" xmlns:p14="http://schemas.microsoft.com/office/powerpoint/2010/main" xmlns:p15="http://schemas.microsoft.com/office/powerpoint/2012/main" xmlns:mc="http://schemas.openxmlformats.org/markup-compatibility/2006">
   <p:cSld>
     <p:bg>
@@ -2969,14 +3978,14 @@
       </p:grpSpPr>
       <p:sp>
         <p:nvSpPr>
-          <p:cNvPr id="163" name=""/>
+          <p:cNvPr id="168" name=""/>
           <p:cNvSpPr/>
           <p:nvPr/>
         </p:nvSpPr>
         <p:spPr>
           <a:xfrm>
             <a:off x="0" y="0"/>
-            <a:ext cx="12191760" cy="6857640"/>
+            <a:ext cx="12191400" cy="6857280"/>
           </a:xfrm>
           <a:prstGeom prst="rect">
             <a:avLst/>
@@ -3012,14 +4021,14 @@
       </p:sp>
       <p:sp>
         <p:nvSpPr>
-          <p:cNvPr id="164" name=""/>
+          <p:cNvPr id="169" name=""/>
           <p:cNvSpPr/>
           <p:nvPr/>
         </p:nvSpPr>
         <p:spPr>
           <a:xfrm>
             <a:off x="0" y="0"/>
-            <a:ext cx="12191760" cy="114120"/>
+            <a:ext cx="12191400" cy="113760"/>
           </a:xfrm>
           <a:prstGeom prst="rect">
             <a:avLst/>
@@ -3055,14 +4064,14 @@
       </p:sp>
       <p:sp>
         <p:nvSpPr>
-          <p:cNvPr id="165" name=""/>
+          <p:cNvPr id="170" name=""/>
           <p:cNvSpPr/>
           <p:nvPr/>
         </p:nvSpPr>
         <p:spPr>
           <a:xfrm>
             <a:off x="914400" y="1571760"/>
-            <a:ext cx="7619760" cy="590040"/>
+            <a:ext cx="7619400" cy="589680"/>
           </a:xfrm>
           <a:prstGeom prst="rect">
             <a:avLst/>
@@ -3113,14 +4122,14 @@
       </p:sp>
       <p:sp>
         <p:nvSpPr>
-          <p:cNvPr id="166" name=""/>
+          <p:cNvPr id="171" name=""/>
           <p:cNvSpPr/>
           <p:nvPr/>
         </p:nvSpPr>
         <p:spPr>
           <a:xfrm>
             <a:off x="933480" y="2333520"/>
-            <a:ext cx="7333920" cy="323640"/>
+            <a:ext cx="7333560" cy="323280"/>
           </a:xfrm>
           <a:prstGeom prst="rect">
             <a:avLst/>
@@ -3171,14 +4180,14 @@
       </p:sp>
       <p:sp>
         <p:nvSpPr>
-          <p:cNvPr id="167" name=""/>
+          <p:cNvPr id="172" name=""/>
           <p:cNvSpPr/>
           <p:nvPr/>
         </p:nvSpPr>
         <p:spPr>
           <a:xfrm>
             <a:off x="933480" y="3371760"/>
-            <a:ext cx="4952520" cy="37800"/>
+            <a:ext cx="4952160" cy="37440"/>
           </a:xfrm>
           <a:prstGeom prst="rect">
             <a:avLst/>
@@ -3214,14 +4223,14 @@
       </p:sp>
       <p:sp>
         <p:nvSpPr>
-          <p:cNvPr id="168" name=""/>
+          <p:cNvPr id="173" name=""/>
           <p:cNvSpPr/>
           <p:nvPr/>
         </p:nvSpPr>
         <p:spPr>
           <a:xfrm>
             <a:off x="933480" y="3809880"/>
-            <a:ext cx="6667200" cy="809280"/>
+            <a:ext cx="6666840" cy="808920"/>
           </a:xfrm>
           <a:prstGeom prst="rect">
             <a:avLst/>
@@ -3272,14 +4281,14 @@
       </p:sp>
       <p:sp>
         <p:nvSpPr>
-          <p:cNvPr id="169" name=""/>
+          <p:cNvPr id="174" name=""/>
           <p:cNvSpPr/>
           <p:nvPr/>
         </p:nvSpPr>
         <p:spPr>
           <a:xfrm>
             <a:off x="933480" y="5343480"/>
-            <a:ext cx="2190240" cy="361440"/>
+            <a:ext cx="2189880" cy="361080"/>
           </a:xfrm>
           <a:prstGeom prst="rect">
             <a:avLst/>
@@ -3367,14 +4376,14 @@
       </p:grpSpPr>
       <p:sp>
         <p:nvSpPr>
-          <p:cNvPr id="21" name=""/>
+          <p:cNvPr id="23" name=""/>
           <p:cNvSpPr/>
           <p:nvPr/>
         </p:nvSpPr>
         <p:spPr>
           <a:xfrm>
             <a:off x="0" y="0"/>
-            <a:ext cx="12191760" cy="151920"/>
+            <a:ext cx="12191400" cy="151560"/>
           </a:xfrm>
           <a:prstGeom prst="rect">
             <a:avLst/>
@@ -3410,14 +4419,14 @@
       </p:sp>
       <p:sp>
         <p:nvSpPr>
-          <p:cNvPr id="22" name=""/>
+          <p:cNvPr id="24" name=""/>
           <p:cNvSpPr/>
           <p:nvPr/>
         </p:nvSpPr>
         <p:spPr>
           <a:xfrm>
             <a:off x="666720" y="857160"/>
-            <a:ext cx="9905760" cy="571320"/>
+            <a:ext cx="9905400" cy="570960"/>
           </a:xfrm>
           <a:prstGeom prst="rect">
             <a:avLst/>
@@ -3468,14 +4477,14 @@
       </p:sp>
       <p:sp>
         <p:nvSpPr>
-          <p:cNvPr id="23" name=""/>
+          <p:cNvPr id="25" name=""/>
           <p:cNvSpPr/>
           <p:nvPr/>
         </p:nvSpPr>
         <p:spPr>
           <a:xfrm>
             <a:off x="685800" y="1409760"/>
-            <a:ext cx="9715320" cy="266400"/>
+            <a:ext cx="9714960" cy="266040"/>
           </a:xfrm>
           <a:prstGeom prst="rect">
             <a:avLst/>
@@ -3511,56 +4520,10 @@
                 <a:latin typeface="C059"/>
                 <a:ea typeface="C059"/>
               </a:rPr>
-              <a:t>The project addresses the difficulty of organizing trusted online auctions for artifacts and antiques.</a:t>
-            </a:r>
-            <a:endParaRPr lang="en-US" sz="1200" b="0" u="none" strike="noStrike">
-              <a:solidFill>
-                <a:srgbClr val="000000"/>
-              </a:solidFill>
-              <a:effectLst/>
-              <a:uFillTx/>
-              <a:latin typeface="Arial"/>
-            </a:endParaRPr>
-          </a:p>
-        </p:txBody>
-      </p:sp>
-      <p:sp>
-        <p:nvSpPr>
-          <p:cNvPr id="24" name=""/>
-          <p:cNvSpPr/>
-          <p:nvPr/>
-        </p:nvSpPr>
-        <p:spPr>
-          <a:xfrm>
-            <a:off x="10191600" y="6343560"/>
-            <a:ext cx="1428480" cy="209160"/>
-          </a:xfrm>
-          <a:prstGeom prst="rect">
-            <a:avLst/>
-          </a:prstGeom>
-          <a:noFill/>
-          <a:ln w="0">
-            <a:noFill/>
-          </a:ln>
-        </p:spPr>
-        <p:style>
-          <a:lnRef idx="0"/>
-          <a:fillRef idx="0"/>
-          <a:effectRef idx="0"/>
-          <a:fontRef idx="minor"/>
-        </p:style>
-        <p:txBody>
-          <a:bodyPr lIns="90000" tIns="45000" rIns="90000" bIns="45000" anchor="t">
-            <a:normAutofit fontScale="92500" lnSpcReduction="9999"/>
-          </a:bodyPr>
-          <a:p>
-            <a:pPr algn="r">
-              <a:lnSpc>
-                <a:spcPct val="100000"/>
-              </a:lnSpc>
-            </a:pPr>
-            <a:r>
-              <a:rPr lang="en-US" sz="900" b="0" u="none" strike="noStrike">
+              <a:t>The project addresses the difficulty of organizing trusted </a:t>
+            </a:r>
+            <a:r>
+              <a:rPr lang="en-US" sz="1200" b="0" u="none" strike="noStrike">
                 <a:solidFill>
                   <a:srgbClr val="54616D"/>
                 </a:solidFill>
@@ -3569,6 +4532,64 @@
                 <a:latin typeface="C059"/>
                 <a:ea typeface="C059"/>
               </a:rPr>
+              <a:t>online auctions for artifacts and antiques.</a:t>
+            </a:r>
+            <a:endParaRPr lang="en-US" sz="1200" b="0" u="none" strike="noStrike">
+              <a:solidFill>
+                <a:srgbClr val="000000"/>
+              </a:solidFill>
+              <a:effectLst/>
+              <a:uFillTx/>
+              <a:latin typeface="Arial"/>
+            </a:endParaRPr>
+          </a:p>
+        </p:txBody>
+      </p:sp>
+      <p:sp>
+        <p:nvSpPr>
+          <p:cNvPr id="26" name=""/>
+          <p:cNvSpPr/>
+          <p:nvPr/>
+        </p:nvSpPr>
+        <p:spPr>
+          <a:xfrm>
+            <a:off x="10191600" y="6343560"/>
+            <a:ext cx="1428120" cy="208800"/>
+          </a:xfrm>
+          <a:prstGeom prst="rect">
+            <a:avLst/>
+          </a:prstGeom>
+          <a:noFill/>
+          <a:ln w="0">
+            <a:noFill/>
+          </a:ln>
+        </p:spPr>
+        <p:style>
+          <a:lnRef idx="0"/>
+          <a:fillRef idx="0"/>
+          <a:effectRef idx="0"/>
+          <a:fontRef idx="minor"/>
+        </p:style>
+        <p:txBody>
+          <a:bodyPr lIns="90000" tIns="45000" rIns="90000" bIns="45000" anchor="t">
+            <a:normAutofit fontScale="92500" lnSpcReduction="9999"/>
+          </a:bodyPr>
+          <a:p>
+            <a:pPr algn="r">
+              <a:lnSpc>
+                <a:spcPct val="100000"/>
+              </a:lnSpc>
+            </a:pPr>
+            <a:r>
+              <a:rPr lang="en-US" sz="900" b="0" u="none" strike="noStrike">
+                <a:solidFill>
+                  <a:srgbClr val="54616D"/>
+                </a:solidFill>
+                <a:effectLst/>
+                <a:uFillTx/>
+                <a:latin typeface="C059"/>
+                <a:ea typeface="C059"/>
+              </a:rPr>
               <a:t>Artifact Alley  |  02</a:t>
             </a:r>
             <a:endParaRPr lang="en-US" sz="900" b="0" u="none" strike="noStrike">
@@ -3584,14 +4605,14 @@
       </p:sp>
       <p:sp>
         <p:nvSpPr>
-          <p:cNvPr id="25" name=""/>
+          <p:cNvPr id="27" name=""/>
           <p:cNvSpPr/>
           <p:nvPr/>
         </p:nvSpPr>
         <p:spPr>
           <a:xfrm>
             <a:off x="685800" y="1657440"/>
-            <a:ext cx="4743000" cy="3733560"/>
+            <a:ext cx="4742640" cy="3733200"/>
           </a:xfrm>
           <a:prstGeom prst="roundRect">
             <a:avLst>
@@ -3629,14 +4650,14 @@
       </p:sp>
       <p:sp>
         <p:nvSpPr>
-          <p:cNvPr id="26" name=""/>
+          <p:cNvPr id="28" name=""/>
           <p:cNvSpPr/>
           <p:nvPr/>
         </p:nvSpPr>
         <p:spPr>
           <a:xfrm>
             <a:off x="1066680" y="2038320"/>
-            <a:ext cx="3142800" cy="323640"/>
+            <a:ext cx="3142440" cy="323280"/>
           </a:xfrm>
           <a:prstGeom prst="rect">
             <a:avLst/>
@@ -3687,14 +4708,14 @@
       </p:sp>
       <p:sp>
         <p:nvSpPr>
-          <p:cNvPr id="27" name=""/>
+          <p:cNvPr id="29" name=""/>
           <p:cNvSpPr/>
           <p:nvPr/>
         </p:nvSpPr>
         <p:spPr>
           <a:xfrm>
             <a:off x="1066680" y="2629080"/>
-            <a:ext cx="3762000" cy="1752120"/>
+            <a:ext cx="3761640" cy="1751760"/>
           </a:xfrm>
           <a:prstGeom prst="rect">
             <a:avLst/>
@@ -3745,14 +4766,14 @@
       </p:sp>
       <p:sp>
         <p:nvSpPr>
-          <p:cNvPr id="28" name=""/>
+          <p:cNvPr id="30" name=""/>
           <p:cNvSpPr/>
           <p:nvPr/>
         </p:nvSpPr>
         <p:spPr>
           <a:xfrm>
             <a:off x="6114960" y="1657440"/>
-            <a:ext cx="5381280" cy="3733560"/>
+            <a:ext cx="5380920" cy="3733200"/>
           </a:xfrm>
           <a:prstGeom prst="roundRect">
             <a:avLst>
@@ -3790,14 +4811,14 @@
       </p:sp>
       <p:sp>
         <p:nvSpPr>
-          <p:cNvPr id="29" name=""/>
+          <p:cNvPr id="31" name=""/>
           <p:cNvSpPr/>
           <p:nvPr/>
         </p:nvSpPr>
         <p:spPr>
           <a:xfrm>
             <a:off x="6534000" y="2038320"/>
-            <a:ext cx="3428640" cy="323640"/>
+            <a:ext cx="3428280" cy="323280"/>
           </a:xfrm>
           <a:prstGeom prst="rect">
             <a:avLst/>
@@ -3848,14 +4869,14 @@
       </p:sp>
       <p:sp>
         <p:nvSpPr>
-          <p:cNvPr id="30" name=""/>
+          <p:cNvPr id="32" name=""/>
           <p:cNvSpPr/>
           <p:nvPr/>
         </p:nvSpPr>
         <p:spPr>
           <a:xfrm>
             <a:off x="6534000" y="2724120"/>
-            <a:ext cx="514080" cy="514080"/>
+            <a:ext cx="513720" cy="513720"/>
           </a:xfrm>
           <a:prstGeom prst="roundRect">
             <a:avLst>
@@ -3893,14 +4914,14 @@
       </p:sp>
       <p:sp>
         <p:nvSpPr>
-          <p:cNvPr id="31" name=""/>
+          <p:cNvPr id="33" name=""/>
           <p:cNvSpPr/>
           <p:nvPr/>
         </p:nvSpPr>
         <p:spPr>
           <a:xfrm>
             <a:off x="6534000" y="2819520"/>
-            <a:ext cx="514080" cy="266400"/>
+            <a:ext cx="513720" cy="266040"/>
           </a:xfrm>
           <a:prstGeom prst="rect">
             <a:avLst/>
@@ -3951,14 +4972,14 @@
       </p:sp>
       <p:sp>
         <p:nvSpPr>
-          <p:cNvPr id="32" name=""/>
+          <p:cNvPr id="34" name=""/>
           <p:cNvSpPr/>
           <p:nvPr/>
         </p:nvSpPr>
         <p:spPr>
           <a:xfrm>
             <a:off x="7219800" y="2752560"/>
-            <a:ext cx="2381040" cy="266400"/>
+            <a:ext cx="2380680" cy="266040"/>
           </a:xfrm>
           <a:prstGeom prst="rect">
             <a:avLst/>
@@ -4009,14 +5030,14 @@
       </p:sp>
       <p:sp>
         <p:nvSpPr>
-          <p:cNvPr id="33" name=""/>
+          <p:cNvPr id="35" name=""/>
           <p:cNvSpPr/>
           <p:nvPr/>
         </p:nvSpPr>
         <p:spPr>
           <a:xfrm>
             <a:off x="7219800" y="3067200"/>
-            <a:ext cx="2714400" cy="523440"/>
+            <a:ext cx="2714040" cy="523080"/>
           </a:xfrm>
           <a:prstGeom prst="rect">
             <a:avLst/>
@@ -4052,7 +5073,19 @@
                 <a:latin typeface="C059"/>
                 <a:ea typeface="C059"/>
               </a:rPr>
-              <a:t>Browse a curated catalogue of live auction items.</a:t>
+              <a:t>Browse a curated catalogue of live </a:t>
+            </a:r>
+            <a:r>
+              <a:rPr lang="en-US" sz="1170" b="0" u="none" strike="noStrike">
+                <a:solidFill>
+                  <a:srgbClr val="54616D"/>
+                </a:solidFill>
+                <a:effectLst/>
+                <a:uFillTx/>
+                <a:latin typeface="C059"/>
+                <a:ea typeface="C059"/>
+              </a:rPr>
+              <a:t>auction items.</a:t>
             </a:r>
             <a:endParaRPr lang="en-US" sz="1170" b="0" u="none" strike="noStrike">
               <a:solidFill>
@@ -4067,14 +5100,14 @@
       </p:sp>
       <p:sp>
         <p:nvSpPr>
-          <p:cNvPr id="34" name=""/>
+          <p:cNvPr id="36" name=""/>
           <p:cNvSpPr/>
           <p:nvPr/>
         </p:nvSpPr>
         <p:spPr>
           <a:xfrm>
             <a:off x="6534000" y="3714840"/>
-            <a:ext cx="514080" cy="514080"/>
+            <a:ext cx="513720" cy="513720"/>
           </a:xfrm>
           <a:prstGeom prst="roundRect">
             <a:avLst>
@@ -4112,14 +5145,14 @@
       </p:sp>
       <p:sp>
         <p:nvSpPr>
-          <p:cNvPr id="35" name=""/>
+          <p:cNvPr id="37" name=""/>
           <p:cNvSpPr/>
           <p:nvPr/>
         </p:nvSpPr>
         <p:spPr>
           <a:xfrm>
             <a:off x="6534000" y="3809880"/>
-            <a:ext cx="514080" cy="266400"/>
+            <a:ext cx="513720" cy="266040"/>
           </a:xfrm>
           <a:prstGeom prst="rect">
             <a:avLst/>
@@ -4170,14 +5203,14 @@
       </p:sp>
       <p:sp>
         <p:nvSpPr>
-          <p:cNvPr id="36" name=""/>
+          <p:cNvPr id="38" name=""/>
           <p:cNvSpPr/>
           <p:nvPr/>
         </p:nvSpPr>
         <p:spPr>
           <a:xfrm>
             <a:off x="7219800" y="3743280"/>
-            <a:ext cx="2381040" cy="266400"/>
+            <a:ext cx="2380680" cy="266040"/>
           </a:xfrm>
           <a:prstGeom prst="rect">
             <a:avLst/>
@@ -4228,14 +5261,14 @@
       </p:sp>
       <p:sp>
         <p:nvSpPr>
-          <p:cNvPr id="37" name=""/>
+          <p:cNvPr id="39" name=""/>
           <p:cNvSpPr/>
           <p:nvPr/>
         </p:nvSpPr>
         <p:spPr>
           <a:xfrm>
             <a:off x="7219800" y="4057560"/>
-            <a:ext cx="2714400" cy="523440"/>
+            <a:ext cx="2714040" cy="523080"/>
           </a:xfrm>
           <a:prstGeom prst="rect">
             <a:avLst/>
@@ -4286,14 +5319,14 @@
       </p:sp>
       <p:sp>
         <p:nvSpPr>
-          <p:cNvPr id="38" name=""/>
+          <p:cNvPr id="40" name=""/>
           <p:cNvSpPr/>
           <p:nvPr/>
         </p:nvSpPr>
         <p:spPr>
           <a:xfrm>
             <a:off x="6534000" y="4705200"/>
-            <a:ext cx="514080" cy="514080"/>
+            <a:ext cx="513720" cy="513720"/>
           </a:xfrm>
           <a:prstGeom prst="roundRect">
             <a:avLst>
@@ -4331,14 +5364,14 @@
       </p:sp>
       <p:sp>
         <p:nvSpPr>
-          <p:cNvPr id="39" name=""/>
+          <p:cNvPr id="41" name=""/>
           <p:cNvSpPr/>
           <p:nvPr/>
         </p:nvSpPr>
         <p:spPr>
           <a:xfrm>
             <a:off x="6534000" y="4800600"/>
-            <a:ext cx="514080" cy="266400"/>
+            <a:ext cx="513720" cy="266040"/>
           </a:xfrm>
           <a:prstGeom prst="rect">
             <a:avLst/>
@@ -4389,14 +5422,14 @@
       </p:sp>
       <p:sp>
         <p:nvSpPr>
-          <p:cNvPr id="40" name=""/>
+          <p:cNvPr id="42" name=""/>
           <p:cNvSpPr/>
           <p:nvPr/>
         </p:nvSpPr>
         <p:spPr>
           <a:xfrm>
             <a:off x="7219800" y="4734000"/>
-            <a:ext cx="2381040" cy="266400"/>
+            <a:ext cx="2380680" cy="266040"/>
           </a:xfrm>
           <a:prstGeom prst="rect">
             <a:avLst/>
@@ -4447,14 +5480,14 @@
       </p:sp>
       <p:sp>
         <p:nvSpPr>
-          <p:cNvPr id="41" name=""/>
+          <p:cNvPr id="43" name=""/>
           <p:cNvSpPr/>
           <p:nvPr/>
         </p:nvSpPr>
         <p:spPr>
           <a:xfrm>
             <a:off x="7219800" y="5048280"/>
-            <a:ext cx="2714400" cy="523440"/>
+            <a:ext cx="2714040" cy="523080"/>
           </a:xfrm>
           <a:prstGeom prst="rect">
             <a:avLst/>
@@ -4542,14 +5575,14 @@
       </p:grpSpPr>
       <p:sp>
         <p:nvSpPr>
-          <p:cNvPr id="42" name=""/>
+          <p:cNvPr id="44" name=""/>
           <p:cNvSpPr/>
           <p:nvPr/>
         </p:nvSpPr>
         <p:spPr>
           <a:xfrm>
             <a:off x="0" y="0"/>
-            <a:ext cx="12191760" cy="151920"/>
+            <a:ext cx="12191400" cy="151560"/>
           </a:xfrm>
           <a:prstGeom prst="rect">
             <a:avLst/>
@@ -4585,14 +5618,14 @@
       </p:sp>
       <p:sp>
         <p:nvSpPr>
-          <p:cNvPr id="43" name=""/>
+          <p:cNvPr id="45" name=""/>
           <p:cNvSpPr/>
           <p:nvPr/>
         </p:nvSpPr>
         <p:spPr>
           <a:xfrm>
             <a:off x="666720" y="857160"/>
-            <a:ext cx="9905760" cy="571320"/>
+            <a:ext cx="9905400" cy="570960"/>
           </a:xfrm>
           <a:prstGeom prst="rect">
             <a:avLst/>
@@ -4643,14 +5676,14 @@
       </p:sp>
       <p:sp>
         <p:nvSpPr>
-          <p:cNvPr id="44" name=""/>
+          <p:cNvPr id="46" name=""/>
           <p:cNvSpPr/>
           <p:nvPr/>
         </p:nvSpPr>
         <p:spPr>
           <a:xfrm>
             <a:off x="685800" y="1409760"/>
-            <a:ext cx="9715320" cy="266400"/>
+            <a:ext cx="9714960" cy="266040"/>
           </a:xfrm>
           <a:prstGeom prst="rect">
             <a:avLst/>
@@ -4701,14 +5734,14 @@
       </p:sp>
       <p:sp>
         <p:nvSpPr>
-          <p:cNvPr id="45" name=""/>
+          <p:cNvPr id="47" name=""/>
           <p:cNvSpPr/>
           <p:nvPr/>
         </p:nvSpPr>
         <p:spPr>
           <a:xfrm>
             <a:off x="10191600" y="6343560"/>
-            <a:ext cx="1428480" cy="209160"/>
+            <a:ext cx="1428120" cy="208800"/>
           </a:xfrm>
           <a:prstGeom prst="rect">
             <a:avLst/>
@@ -4759,14 +5792,14 @@
       </p:sp>
       <p:sp>
         <p:nvSpPr>
-          <p:cNvPr id="46" name=""/>
+          <p:cNvPr id="48" name=""/>
           <p:cNvSpPr/>
           <p:nvPr/>
         </p:nvSpPr>
         <p:spPr>
           <a:xfrm>
             <a:off x="685800" y="1657440"/>
-            <a:ext cx="5047920" cy="1523520"/>
+            <a:ext cx="5047560" cy="1523160"/>
           </a:xfrm>
           <a:prstGeom prst="roundRect">
             <a:avLst>
@@ -4804,14 +5837,14 @@
       </p:sp>
       <p:sp>
         <p:nvSpPr>
-          <p:cNvPr id="47" name=""/>
+          <p:cNvPr id="49" name=""/>
           <p:cNvSpPr/>
           <p:nvPr/>
         </p:nvSpPr>
         <p:spPr>
           <a:xfrm>
             <a:off x="952560" y="1952640"/>
-            <a:ext cx="132840" cy="914040"/>
+            <a:ext cx="132480" cy="913680"/>
           </a:xfrm>
           <a:prstGeom prst="roundRect">
             <a:avLst>
@@ -4832,7 +5865,7 @@
           <a:fontRef idx="minor"/>
         </p:style>
         <p:txBody>
-          <a:bodyPr lIns="90000" tIns="45000" rIns="90000" bIns="45000" anchor="t">
+          <a:bodyPr lIns="66240" tIns="45000" rIns="66240" bIns="45000" anchor="t">
             <a:noAutofit/>
           </a:bodyPr>
           <a:p>
@@ -4849,14 +5882,14 @@
       </p:sp>
       <p:sp>
         <p:nvSpPr>
-          <p:cNvPr id="48" name=""/>
+          <p:cNvPr id="50" name=""/>
           <p:cNvSpPr/>
           <p:nvPr/>
         </p:nvSpPr>
         <p:spPr>
           <a:xfrm>
             <a:off x="1314360" y="1952640"/>
-            <a:ext cx="4000320" cy="285480"/>
+            <a:ext cx="3999960" cy="285120"/>
           </a:xfrm>
           <a:prstGeom prst="rect">
             <a:avLst/>
@@ -4907,14 +5940,14 @@
       </p:sp>
       <p:sp>
         <p:nvSpPr>
-          <p:cNvPr id="49" name=""/>
+          <p:cNvPr id="51" name=""/>
           <p:cNvSpPr/>
           <p:nvPr/>
         </p:nvSpPr>
         <p:spPr>
           <a:xfrm>
             <a:off x="1314360" y="2381400"/>
-            <a:ext cx="3904920" cy="552240"/>
+            <a:ext cx="3904560" cy="551880"/>
           </a:xfrm>
           <a:prstGeom prst="rect">
             <a:avLst/>
@@ -4965,14 +5998,14 @@
       </p:sp>
       <p:sp>
         <p:nvSpPr>
-          <p:cNvPr id="50" name=""/>
+          <p:cNvPr id="52" name=""/>
           <p:cNvSpPr/>
           <p:nvPr/>
         </p:nvSpPr>
         <p:spPr>
           <a:xfrm>
             <a:off x="6114960" y="1657440"/>
-            <a:ext cx="5047920" cy="1523520"/>
+            <a:ext cx="5047560" cy="1523160"/>
           </a:xfrm>
           <a:prstGeom prst="roundRect">
             <a:avLst>
@@ -5010,14 +6043,14 @@
       </p:sp>
       <p:sp>
         <p:nvSpPr>
-          <p:cNvPr id="51" name=""/>
+          <p:cNvPr id="53" name=""/>
           <p:cNvSpPr/>
           <p:nvPr/>
         </p:nvSpPr>
         <p:spPr>
           <a:xfrm>
             <a:off x="6381720" y="1952640"/>
-            <a:ext cx="132840" cy="914040"/>
+            <a:ext cx="132480" cy="913680"/>
           </a:xfrm>
           <a:prstGeom prst="roundRect">
             <a:avLst>
@@ -5038,7 +6071,7 @@
           <a:fontRef idx="minor"/>
         </p:style>
         <p:txBody>
-          <a:bodyPr lIns="90000" tIns="45000" rIns="90000" bIns="45000" anchor="t">
+          <a:bodyPr lIns="66240" tIns="45000" rIns="66240" bIns="45000" anchor="t">
             <a:noAutofit/>
           </a:bodyPr>
           <a:p>
@@ -5055,14 +6088,14 @@
       </p:sp>
       <p:sp>
         <p:nvSpPr>
-          <p:cNvPr id="52" name=""/>
+          <p:cNvPr id="54" name=""/>
           <p:cNvSpPr/>
           <p:nvPr/>
         </p:nvSpPr>
         <p:spPr>
           <a:xfrm>
             <a:off x="6743880" y="1952640"/>
-            <a:ext cx="4000320" cy="285480"/>
+            <a:ext cx="3999960" cy="285120"/>
           </a:xfrm>
           <a:prstGeom prst="rect">
             <a:avLst/>
@@ -5113,14 +6146,14 @@
       </p:sp>
       <p:sp>
         <p:nvSpPr>
-          <p:cNvPr id="53" name=""/>
+          <p:cNvPr id="55" name=""/>
           <p:cNvSpPr/>
           <p:nvPr/>
         </p:nvSpPr>
         <p:spPr>
           <a:xfrm>
             <a:off x="6743880" y="2381400"/>
-            <a:ext cx="3904920" cy="552240"/>
+            <a:ext cx="3904560" cy="551880"/>
           </a:xfrm>
           <a:prstGeom prst="rect">
             <a:avLst/>
@@ -5171,14 +6204,14 @@
       </p:sp>
       <p:sp>
         <p:nvSpPr>
-          <p:cNvPr id="54" name=""/>
+          <p:cNvPr id="56" name=""/>
           <p:cNvSpPr/>
           <p:nvPr/>
         </p:nvSpPr>
         <p:spPr>
           <a:xfrm>
             <a:off x="685800" y="3610080"/>
-            <a:ext cx="5047920" cy="1523520"/>
+            <a:ext cx="5047560" cy="1523160"/>
           </a:xfrm>
           <a:prstGeom prst="roundRect">
             <a:avLst>
@@ -5216,14 +6249,14 @@
       </p:sp>
       <p:sp>
         <p:nvSpPr>
-          <p:cNvPr id="55" name=""/>
+          <p:cNvPr id="57" name=""/>
           <p:cNvSpPr/>
           <p:nvPr/>
         </p:nvSpPr>
         <p:spPr>
           <a:xfrm>
             <a:off x="952560" y="3905280"/>
-            <a:ext cx="132840" cy="914040"/>
+            <a:ext cx="132480" cy="913680"/>
           </a:xfrm>
           <a:prstGeom prst="roundRect">
             <a:avLst>
@@ -5244,7 +6277,7 @@
           <a:fontRef idx="minor"/>
         </p:style>
         <p:txBody>
-          <a:bodyPr lIns="90000" tIns="45000" rIns="90000" bIns="45000" anchor="t">
+          <a:bodyPr lIns="66240" tIns="45000" rIns="66240" bIns="45000" anchor="t">
             <a:noAutofit/>
           </a:bodyPr>
           <a:p>
@@ -5261,14 +6294,14 @@
       </p:sp>
       <p:sp>
         <p:nvSpPr>
-          <p:cNvPr id="56" name=""/>
+          <p:cNvPr id="58" name=""/>
           <p:cNvSpPr/>
           <p:nvPr/>
         </p:nvSpPr>
         <p:spPr>
           <a:xfrm>
             <a:off x="1314360" y="3905280"/>
-            <a:ext cx="4000320" cy="285480"/>
+            <a:ext cx="3999960" cy="285120"/>
           </a:xfrm>
           <a:prstGeom prst="rect">
             <a:avLst/>
@@ -5319,14 +6352,14 @@
       </p:sp>
       <p:sp>
         <p:nvSpPr>
-          <p:cNvPr id="57" name=""/>
+          <p:cNvPr id="59" name=""/>
           <p:cNvSpPr/>
           <p:nvPr/>
         </p:nvSpPr>
         <p:spPr>
           <a:xfrm>
             <a:off x="1314360" y="4334040"/>
-            <a:ext cx="3904920" cy="552240"/>
+            <a:ext cx="3904560" cy="551880"/>
           </a:xfrm>
           <a:prstGeom prst="rect">
             <a:avLst/>
@@ -5377,14 +6410,14 @@
       </p:sp>
       <p:sp>
         <p:nvSpPr>
-          <p:cNvPr id="58" name=""/>
+          <p:cNvPr id="60" name=""/>
           <p:cNvSpPr/>
           <p:nvPr/>
         </p:nvSpPr>
         <p:spPr>
           <a:xfrm>
             <a:off x="6114960" y="3610080"/>
-            <a:ext cx="5047920" cy="1523520"/>
+            <a:ext cx="5047560" cy="1523160"/>
           </a:xfrm>
           <a:prstGeom prst="roundRect">
             <a:avLst>
@@ -5422,14 +6455,14 @@
       </p:sp>
       <p:sp>
         <p:nvSpPr>
-          <p:cNvPr id="59" name=""/>
+          <p:cNvPr id="61" name=""/>
           <p:cNvSpPr/>
           <p:nvPr/>
         </p:nvSpPr>
         <p:spPr>
           <a:xfrm>
             <a:off x="6381720" y="3905280"/>
-            <a:ext cx="132840" cy="914040"/>
+            <a:ext cx="132480" cy="913680"/>
           </a:xfrm>
           <a:prstGeom prst="roundRect">
             <a:avLst>
@@ -5450,7 +6483,7 @@
           <a:fontRef idx="minor"/>
         </p:style>
         <p:txBody>
-          <a:bodyPr lIns="90000" tIns="45000" rIns="90000" bIns="45000" anchor="t">
+          <a:bodyPr lIns="66240" tIns="45000" rIns="66240" bIns="45000" anchor="t">
             <a:noAutofit/>
           </a:bodyPr>
           <a:p>
@@ -5467,14 +6500,14 @@
       </p:sp>
       <p:sp>
         <p:nvSpPr>
-          <p:cNvPr id="60" name=""/>
+          <p:cNvPr id="62" name=""/>
           <p:cNvSpPr/>
           <p:nvPr/>
         </p:nvSpPr>
         <p:spPr>
           <a:xfrm>
             <a:off x="6743880" y="3905280"/>
-            <a:ext cx="4000320" cy="285480"/>
+            <a:ext cx="3999960" cy="285120"/>
           </a:xfrm>
           <a:prstGeom prst="rect">
             <a:avLst/>
@@ -5525,14 +6558,14 @@
       </p:sp>
       <p:sp>
         <p:nvSpPr>
-          <p:cNvPr id="61" name=""/>
+          <p:cNvPr id="63" name=""/>
           <p:cNvSpPr/>
           <p:nvPr/>
         </p:nvSpPr>
         <p:spPr>
           <a:xfrm>
             <a:off x="6743880" y="4334040"/>
-            <a:ext cx="3904920" cy="552240"/>
+            <a:ext cx="3904560" cy="551880"/>
           </a:xfrm>
           <a:prstGeom prst="rect">
             <a:avLst/>
@@ -5620,14 +6653,14 @@
       </p:grpSpPr>
       <p:sp>
         <p:nvSpPr>
-          <p:cNvPr id="62" name=""/>
+          <p:cNvPr id="64" name=""/>
           <p:cNvSpPr/>
           <p:nvPr/>
         </p:nvSpPr>
         <p:spPr>
           <a:xfrm>
             <a:off x="0" y="0"/>
-            <a:ext cx="12191760" cy="151920"/>
+            <a:ext cx="12191400" cy="151560"/>
           </a:xfrm>
           <a:prstGeom prst="rect">
             <a:avLst/>
@@ -5663,14 +6696,14 @@
       </p:sp>
       <p:sp>
         <p:nvSpPr>
-          <p:cNvPr id="63" name=""/>
+          <p:cNvPr id="65" name=""/>
           <p:cNvSpPr/>
           <p:nvPr/>
         </p:nvSpPr>
         <p:spPr>
           <a:xfrm>
             <a:off x="666720" y="857160"/>
-            <a:ext cx="9905760" cy="571320"/>
+            <a:ext cx="9905400" cy="570960"/>
           </a:xfrm>
           <a:prstGeom prst="rect">
             <a:avLst/>
@@ -5721,14 +6754,14 @@
       </p:sp>
       <p:sp>
         <p:nvSpPr>
-          <p:cNvPr id="64" name=""/>
+          <p:cNvPr id="66" name=""/>
           <p:cNvSpPr/>
           <p:nvPr/>
         </p:nvSpPr>
         <p:spPr>
           <a:xfrm>
             <a:off x="685800" y="1409760"/>
-            <a:ext cx="9715320" cy="266400"/>
+            <a:ext cx="9714960" cy="266040"/>
           </a:xfrm>
           <a:prstGeom prst="rect">
             <a:avLst/>
@@ -5779,14 +6812,14 @@
       </p:sp>
       <p:sp>
         <p:nvSpPr>
-          <p:cNvPr id="65" name=""/>
+          <p:cNvPr id="67" name=""/>
           <p:cNvSpPr/>
           <p:nvPr/>
         </p:nvSpPr>
         <p:spPr>
           <a:xfrm>
             <a:off x="10191600" y="6343560"/>
-            <a:ext cx="1428480" cy="209160"/>
+            <a:ext cx="1428120" cy="208800"/>
           </a:xfrm>
           <a:prstGeom prst="rect">
             <a:avLst/>
@@ -5837,14 +6870,14 @@
       </p:sp>
       <p:sp>
         <p:nvSpPr>
-          <p:cNvPr id="66" name=""/>
+          <p:cNvPr id="68" name=""/>
           <p:cNvSpPr/>
           <p:nvPr/>
         </p:nvSpPr>
         <p:spPr>
           <a:xfrm>
             <a:off x="819000" y="1752480"/>
-            <a:ext cx="3142800" cy="3047760"/>
+            <a:ext cx="3142440" cy="3047400"/>
           </a:xfrm>
           <a:prstGeom prst="roundRect">
             <a:avLst>
@@ -5882,14 +6915,14 @@
       </p:sp>
       <p:sp>
         <p:nvSpPr>
-          <p:cNvPr id="67" name=""/>
+          <p:cNvPr id="69" name=""/>
           <p:cNvSpPr/>
           <p:nvPr/>
         </p:nvSpPr>
         <p:spPr>
           <a:xfrm>
             <a:off x="819000" y="1752480"/>
-            <a:ext cx="3142800" cy="95040"/>
+            <a:ext cx="3142440" cy="94680"/>
           </a:xfrm>
           <a:prstGeom prst="rect">
             <a:avLst/>
@@ -5925,14 +6958,14 @@
       </p:sp>
       <p:sp>
         <p:nvSpPr>
-          <p:cNvPr id="68" name=""/>
+          <p:cNvPr id="70" name=""/>
           <p:cNvSpPr/>
           <p:nvPr/>
         </p:nvSpPr>
         <p:spPr>
           <a:xfrm>
             <a:off x="1143000" y="2209680"/>
-            <a:ext cx="2476080" cy="361440"/>
+            <a:ext cx="2475720" cy="361080"/>
           </a:xfrm>
           <a:prstGeom prst="rect">
             <a:avLst/>
@@ -5983,14 +7016,14 @@
       </p:sp>
       <p:sp>
         <p:nvSpPr>
-          <p:cNvPr id="69" name=""/>
+          <p:cNvPr id="71" name=""/>
           <p:cNvSpPr/>
           <p:nvPr/>
         </p:nvSpPr>
         <p:spPr>
           <a:xfrm>
             <a:off x="1143000" y="2876400"/>
-            <a:ext cx="2381040" cy="1380600"/>
+            <a:ext cx="2380680" cy="1380240"/>
           </a:xfrm>
           <a:prstGeom prst="rect">
             <a:avLst/>
@@ -6095,14 +7128,14 @@
       </p:sp>
       <p:sp>
         <p:nvSpPr>
-          <p:cNvPr id="70" name=""/>
+          <p:cNvPr id="72" name=""/>
           <p:cNvSpPr/>
           <p:nvPr/>
         </p:nvSpPr>
         <p:spPr>
           <a:xfrm>
             <a:off x="4533840" y="1752480"/>
-            <a:ext cx="3142800" cy="3047760"/>
+            <a:ext cx="3142440" cy="3047400"/>
           </a:xfrm>
           <a:prstGeom prst="roundRect">
             <a:avLst>
@@ -6140,14 +7173,14 @@
       </p:sp>
       <p:sp>
         <p:nvSpPr>
-          <p:cNvPr id="71" name=""/>
+          <p:cNvPr id="73" name=""/>
           <p:cNvSpPr/>
           <p:nvPr/>
         </p:nvSpPr>
         <p:spPr>
           <a:xfrm>
             <a:off x="4533840" y="1752480"/>
-            <a:ext cx="3142800" cy="95040"/>
+            <a:ext cx="3142440" cy="94680"/>
           </a:xfrm>
           <a:prstGeom prst="rect">
             <a:avLst/>
@@ -6183,14 +7216,14 @@
       </p:sp>
       <p:sp>
         <p:nvSpPr>
-          <p:cNvPr id="72" name=""/>
+          <p:cNvPr id="74" name=""/>
           <p:cNvSpPr/>
           <p:nvPr/>
         </p:nvSpPr>
         <p:spPr>
           <a:xfrm>
             <a:off x="4857840" y="2209680"/>
-            <a:ext cx="2476080" cy="361440"/>
+            <a:ext cx="2475720" cy="361080"/>
           </a:xfrm>
           <a:prstGeom prst="rect">
             <a:avLst/>
@@ -6241,14 +7274,14 @@
       </p:sp>
       <p:sp>
         <p:nvSpPr>
-          <p:cNvPr id="73" name=""/>
+          <p:cNvPr id="75" name=""/>
           <p:cNvSpPr/>
           <p:nvPr/>
         </p:nvSpPr>
         <p:spPr>
           <a:xfrm>
             <a:off x="4857840" y="2876400"/>
-            <a:ext cx="2381040" cy="1380600"/>
+            <a:ext cx="2380680" cy="1380240"/>
           </a:xfrm>
           <a:prstGeom prst="rect">
             <a:avLst/>
@@ -6353,14 +7386,14 @@
       </p:sp>
       <p:sp>
         <p:nvSpPr>
-          <p:cNvPr id="74" name=""/>
+          <p:cNvPr id="76" name=""/>
           <p:cNvSpPr/>
           <p:nvPr/>
         </p:nvSpPr>
         <p:spPr>
           <a:xfrm>
             <a:off x="8248680" y="1752480"/>
-            <a:ext cx="3142800" cy="3047760"/>
+            <a:ext cx="3142440" cy="3047400"/>
           </a:xfrm>
           <a:prstGeom prst="roundRect">
             <a:avLst>
@@ -6398,14 +7431,14 @@
       </p:sp>
       <p:sp>
         <p:nvSpPr>
-          <p:cNvPr id="75" name=""/>
+          <p:cNvPr id="77" name=""/>
           <p:cNvSpPr/>
           <p:nvPr/>
         </p:nvSpPr>
         <p:spPr>
           <a:xfrm>
             <a:off x="8248680" y="1752480"/>
-            <a:ext cx="3142800" cy="95040"/>
+            <a:ext cx="3142440" cy="94680"/>
           </a:xfrm>
           <a:prstGeom prst="rect">
             <a:avLst/>
@@ -6441,14 +7474,14 @@
       </p:sp>
       <p:sp>
         <p:nvSpPr>
-          <p:cNvPr id="76" name=""/>
+          <p:cNvPr id="78" name=""/>
           <p:cNvSpPr/>
           <p:nvPr/>
         </p:nvSpPr>
         <p:spPr>
           <a:xfrm>
             <a:off x="8572680" y="2209680"/>
-            <a:ext cx="2476080" cy="361440"/>
+            <a:ext cx="2475720" cy="361080"/>
           </a:xfrm>
           <a:prstGeom prst="rect">
             <a:avLst/>
@@ -6499,14 +7532,14 @@
       </p:sp>
       <p:sp>
         <p:nvSpPr>
-          <p:cNvPr id="77" name=""/>
+          <p:cNvPr id="79" name=""/>
           <p:cNvSpPr/>
           <p:nvPr/>
         </p:nvSpPr>
         <p:spPr>
           <a:xfrm>
             <a:off x="8572680" y="2876400"/>
-            <a:ext cx="2381040" cy="1380600"/>
+            <a:ext cx="2380680" cy="1380240"/>
           </a:xfrm>
           <a:prstGeom prst="rect">
             <a:avLst/>
@@ -6611,14 +7644,14 @@
       </p:sp>
       <p:sp>
         <p:nvSpPr>
-          <p:cNvPr id="78" name=""/>
+          <p:cNvPr id="80" name=""/>
           <p:cNvSpPr/>
           <p:nvPr/>
         </p:nvSpPr>
         <p:spPr>
           <a:xfrm>
             <a:off x="1523880" y="5381640"/>
-            <a:ext cx="9143640" cy="285480"/>
+            <a:ext cx="9143280" cy="285120"/>
           </a:xfrm>
           <a:prstGeom prst="rect">
             <a:avLst/>
@@ -6706,14 +7739,14 @@
       </p:grpSpPr>
       <p:sp>
         <p:nvSpPr>
-          <p:cNvPr id="79" name=""/>
+          <p:cNvPr id="81" name=""/>
           <p:cNvSpPr/>
           <p:nvPr/>
         </p:nvSpPr>
         <p:spPr>
           <a:xfrm>
             <a:off x="0" y="0"/>
-            <a:ext cx="12191760" cy="151920"/>
+            <a:ext cx="12191400" cy="151560"/>
           </a:xfrm>
           <a:prstGeom prst="rect">
             <a:avLst/>
@@ -6749,14 +7782,14 @@
       </p:sp>
       <p:sp>
         <p:nvSpPr>
-          <p:cNvPr id="80" name=""/>
+          <p:cNvPr id="82" name=""/>
           <p:cNvSpPr/>
           <p:nvPr/>
         </p:nvSpPr>
         <p:spPr>
           <a:xfrm>
             <a:off x="666720" y="857160"/>
-            <a:ext cx="9905760" cy="571320"/>
+            <a:ext cx="9905400" cy="570960"/>
           </a:xfrm>
           <a:prstGeom prst="rect">
             <a:avLst/>
@@ -6807,14 +7840,14 @@
       </p:sp>
       <p:sp>
         <p:nvSpPr>
-          <p:cNvPr id="81" name=""/>
+          <p:cNvPr id="83" name=""/>
           <p:cNvSpPr/>
           <p:nvPr/>
         </p:nvSpPr>
         <p:spPr>
           <a:xfrm>
             <a:off x="685800" y="1409760"/>
-            <a:ext cx="9715320" cy="266400"/>
+            <a:ext cx="9714960" cy="266040"/>
           </a:xfrm>
           <a:prstGeom prst="rect">
             <a:avLst/>
@@ -6865,14 +7898,14 @@
       </p:sp>
       <p:sp>
         <p:nvSpPr>
-          <p:cNvPr id="82" name=""/>
+          <p:cNvPr id="84" name=""/>
           <p:cNvSpPr/>
           <p:nvPr/>
         </p:nvSpPr>
         <p:spPr>
           <a:xfrm>
             <a:off x="10191600" y="6343560"/>
-            <a:ext cx="1428480" cy="209160"/>
+            <a:ext cx="1428120" cy="208800"/>
           </a:xfrm>
           <a:prstGeom prst="rect">
             <a:avLst/>
@@ -6923,14 +7956,14 @@
       </p:sp>
       <p:sp>
         <p:nvSpPr>
-          <p:cNvPr id="83" name=""/>
+          <p:cNvPr id="85" name=""/>
           <p:cNvSpPr/>
           <p:nvPr/>
         </p:nvSpPr>
         <p:spPr>
           <a:xfrm>
             <a:off x="762120" y="2762280"/>
-            <a:ext cx="1952280" cy="1190160"/>
+            <a:ext cx="1951920" cy="1189800"/>
           </a:xfrm>
           <a:prstGeom prst="roundRect">
             <a:avLst>
@@ -6968,14 +8001,14 @@
       </p:sp>
       <p:sp>
         <p:nvSpPr>
-          <p:cNvPr id="84" name=""/>
+          <p:cNvPr id="86" name=""/>
           <p:cNvSpPr/>
           <p:nvPr/>
         </p:nvSpPr>
         <p:spPr>
           <a:xfrm>
             <a:off x="952560" y="3095640"/>
-            <a:ext cx="1571400" cy="552240"/>
+            <a:ext cx="1571040" cy="551880"/>
           </a:xfrm>
           <a:prstGeom prst="rect">
             <a:avLst/>
@@ -7053,14 +8086,14 @@
       </p:sp>
       <p:sp>
         <p:nvSpPr>
-          <p:cNvPr id="85" name=""/>
+          <p:cNvPr id="87" name=""/>
           <p:cNvSpPr/>
           <p:nvPr/>
         </p:nvSpPr>
         <p:spPr>
           <a:xfrm>
             <a:off x="3238560" y="2762280"/>
-            <a:ext cx="1952280" cy="1190160"/>
+            <a:ext cx="1951920" cy="1189800"/>
           </a:xfrm>
           <a:prstGeom prst="roundRect">
             <a:avLst>
@@ -7098,14 +8131,14 @@
       </p:sp>
       <p:sp>
         <p:nvSpPr>
-          <p:cNvPr id="86" name=""/>
+          <p:cNvPr id="88" name=""/>
           <p:cNvSpPr/>
           <p:nvPr/>
         </p:nvSpPr>
         <p:spPr>
           <a:xfrm>
             <a:off x="3429000" y="3095640"/>
-            <a:ext cx="1571400" cy="552240"/>
+            <a:ext cx="1571040" cy="551880"/>
           </a:xfrm>
           <a:prstGeom prst="rect">
             <a:avLst/>
@@ -7183,14 +8216,14 @@
       </p:sp>
       <p:sp>
         <p:nvSpPr>
-          <p:cNvPr id="87" name=""/>
+          <p:cNvPr id="89" name=""/>
           <p:cNvSpPr/>
           <p:nvPr/>
         </p:nvSpPr>
         <p:spPr>
           <a:xfrm>
             <a:off x="5715000" y="2762280"/>
-            <a:ext cx="1952280" cy="1190160"/>
+            <a:ext cx="1951920" cy="1189800"/>
           </a:xfrm>
           <a:prstGeom prst="roundRect">
             <a:avLst>
@@ -7228,14 +8261,14 @@
       </p:sp>
       <p:sp>
         <p:nvSpPr>
-          <p:cNvPr id="88" name=""/>
+          <p:cNvPr id="90" name=""/>
           <p:cNvSpPr/>
           <p:nvPr/>
         </p:nvSpPr>
         <p:spPr>
           <a:xfrm>
             <a:off x="5905440" y="3095640"/>
-            <a:ext cx="1571400" cy="552240"/>
+            <a:ext cx="1571040" cy="551880"/>
           </a:xfrm>
           <a:prstGeom prst="rect">
             <a:avLst/>
@@ -7313,14 +8346,14 @@
       </p:sp>
       <p:sp>
         <p:nvSpPr>
-          <p:cNvPr id="89" name=""/>
+          <p:cNvPr id="91" name=""/>
           <p:cNvSpPr/>
           <p:nvPr/>
         </p:nvSpPr>
         <p:spPr>
           <a:xfrm>
             <a:off x="8191440" y="2762280"/>
-            <a:ext cx="1952280" cy="1190160"/>
+            <a:ext cx="1951920" cy="1189800"/>
           </a:xfrm>
           <a:prstGeom prst="roundRect">
             <a:avLst>
@@ -7358,14 +8391,14 @@
       </p:sp>
       <p:sp>
         <p:nvSpPr>
-          <p:cNvPr id="90" name=""/>
+          <p:cNvPr id="92" name=""/>
           <p:cNvSpPr/>
           <p:nvPr/>
         </p:nvSpPr>
         <p:spPr>
           <a:xfrm>
             <a:off x="8381880" y="3095640"/>
-            <a:ext cx="1571400" cy="552240"/>
+            <a:ext cx="1571040" cy="551880"/>
           </a:xfrm>
           <a:prstGeom prst="rect">
             <a:avLst/>
@@ -7443,17 +8476,17 @@
       </p:sp>
       <p:cxnSp>
         <p:nvCxnSpPr>
-          <p:cNvPr id="91" name=""/>
+          <p:cNvPr id="93" name=""/>
           <p:cNvCxnSpPr>
-            <a:stCxn id="83" idx="3"/>
-            <a:endCxn id="85" idx="1"/>
+            <a:stCxn id="85" idx="3"/>
+            <a:endCxn id="87" idx="1"/>
           </p:cNvCxnSpPr>
           <p:nvPr/>
         </p:nvCxnSpPr>
         <p:spPr>
           <a:xfrm>
-            <a:off x="2714400" y="3357360"/>
-            <a:ext cx="524520" cy="360"/>
+            <a:off x="2714040" y="3357360"/>
+            <a:ext cx="524880" cy="360"/>
           </a:xfrm>
           <a:prstGeom prst="straightConnector1">
             <a:avLst/>
@@ -7469,17 +8502,17 @@
       </p:cxnSp>
       <p:cxnSp>
         <p:nvCxnSpPr>
-          <p:cNvPr id="92" name=""/>
+          <p:cNvPr id="94" name=""/>
           <p:cNvCxnSpPr>
-            <a:stCxn id="85" idx="3"/>
-            <a:endCxn id="87" idx="1"/>
+            <a:stCxn id="87" idx="3"/>
+            <a:endCxn id="89" idx="1"/>
           </p:cNvCxnSpPr>
           <p:nvPr/>
         </p:nvCxnSpPr>
         <p:spPr>
           <a:xfrm>
-            <a:off x="5190840" y="3357360"/>
-            <a:ext cx="524520" cy="360"/>
+            <a:off x="5190480" y="3357360"/>
+            <a:ext cx="524880" cy="360"/>
           </a:xfrm>
           <a:prstGeom prst="straightConnector1">
             <a:avLst/>
@@ -7495,17 +8528,17 @@
       </p:cxnSp>
       <p:cxnSp>
         <p:nvCxnSpPr>
-          <p:cNvPr id="93" name=""/>
+          <p:cNvPr id="95" name=""/>
           <p:cNvCxnSpPr>
-            <a:stCxn id="87" idx="3"/>
-            <a:endCxn id="89" idx="1"/>
+            <a:stCxn id="89" idx="3"/>
+            <a:endCxn id="91" idx="1"/>
           </p:cNvCxnSpPr>
           <p:nvPr/>
         </p:nvCxnSpPr>
         <p:spPr>
           <a:xfrm>
-            <a:off x="7667280" y="3357360"/>
-            <a:ext cx="524520" cy="360"/>
+            <a:off x="7666920" y="3357360"/>
+            <a:ext cx="524880" cy="360"/>
           </a:xfrm>
           <a:prstGeom prst="straightConnector1">
             <a:avLst/>
@@ -7521,14 +8554,14 @@
       </p:cxnSp>
       <p:sp>
         <p:nvSpPr>
-          <p:cNvPr id="94" name=""/>
+          <p:cNvPr id="96" name=""/>
           <p:cNvSpPr/>
           <p:nvPr/>
         </p:nvSpPr>
         <p:spPr>
           <a:xfrm>
             <a:off x="1714680" y="4896000"/>
-            <a:ext cx="8762760" cy="323640"/>
+            <a:ext cx="8762400" cy="323280"/>
           </a:xfrm>
           <a:prstGeom prst="rect">
             <a:avLst/>
@@ -7616,14 +8649,14 @@
       </p:grpSpPr>
       <p:sp>
         <p:nvSpPr>
-          <p:cNvPr id="95" name=""/>
+          <p:cNvPr id="97" name=""/>
           <p:cNvSpPr/>
           <p:nvPr/>
         </p:nvSpPr>
         <p:spPr>
           <a:xfrm>
             <a:off x="0" y="0"/>
-            <a:ext cx="12191760" cy="151920"/>
+            <a:ext cx="12191400" cy="151560"/>
           </a:xfrm>
           <a:prstGeom prst="rect">
             <a:avLst/>
@@ -7659,14 +8692,14 @@
       </p:sp>
       <p:sp>
         <p:nvSpPr>
-          <p:cNvPr id="96" name=""/>
+          <p:cNvPr id="98" name=""/>
           <p:cNvSpPr/>
           <p:nvPr/>
         </p:nvSpPr>
         <p:spPr>
           <a:xfrm>
             <a:off x="666720" y="857160"/>
-            <a:ext cx="9905760" cy="571320"/>
+            <a:ext cx="9905400" cy="570960"/>
           </a:xfrm>
           <a:prstGeom prst="rect">
             <a:avLst/>
@@ -7717,14 +8750,14 @@
       </p:sp>
       <p:sp>
         <p:nvSpPr>
-          <p:cNvPr id="97" name=""/>
+          <p:cNvPr id="99" name=""/>
           <p:cNvSpPr/>
           <p:nvPr/>
         </p:nvSpPr>
         <p:spPr>
           <a:xfrm>
             <a:off x="685800" y="1409760"/>
-            <a:ext cx="9715320" cy="266400"/>
+            <a:ext cx="9714960" cy="266040"/>
           </a:xfrm>
           <a:prstGeom prst="rect">
             <a:avLst/>
@@ -7775,14 +8808,14 @@
       </p:sp>
       <p:sp>
         <p:nvSpPr>
-          <p:cNvPr id="98" name=""/>
+          <p:cNvPr id="100" name=""/>
           <p:cNvSpPr/>
           <p:nvPr/>
         </p:nvSpPr>
         <p:spPr>
           <a:xfrm>
             <a:off x="10191600" y="6343560"/>
-            <a:ext cx="1428480" cy="209160"/>
+            <a:ext cx="1428120" cy="208800"/>
           </a:xfrm>
           <a:prstGeom prst="rect">
             <a:avLst/>
@@ -7833,14 +8866,14 @@
       </p:sp>
       <p:sp>
         <p:nvSpPr>
-          <p:cNvPr id="99" name=""/>
+          <p:cNvPr id="101" name=""/>
           <p:cNvSpPr/>
           <p:nvPr/>
         </p:nvSpPr>
         <p:spPr>
           <a:xfrm>
             <a:off x="838080" y="2619360"/>
-            <a:ext cx="2095200" cy="1142640"/>
+            <a:ext cx="2094840" cy="1142280"/>
           </a:xfrm>
           <a:prstGeom prst="roundRect">
             <a:avLst>
@@ -7878,14 +8911,14 @@
       </p:sp>
       <p:sp>
         <p:nvSpPr>
-          <p:cNvPr id="100" name=""/>
+          <p:cNvPr id="102" name=""/>
           <p:cNvSpPr/>
           <p:nvPr/>
         </p:nvSpPr>
         <p:spPr>
           <a:xfrm>
             <a:off x="3857760" y="2333520"/>
-            <a:ext cx="2381040" cy="1714320"/>
+            <a:ext cx="2380680" cy="1713960"/>
           </a:xfrm>
           <a:prstGeom prst="roundRect">
             <a:avLst>
@@ -7923,14 +8956,14 @@
       </p:sp>
       <p:sp>
         <p:nvSpPr>
-          <p:cNvPr id="101" name=""/>
+          <p:cNvPr id="103" name=""/>
           <p:cNvSpPr/>
           <p:nvPr/>
         </p:nvSpPr>
         <p:spPr>
           <a:xfrm>
             <a:off x="7219800" y="2619360"/>
-            <a:ext cx="2095200" cy="1142640"/>
+            <a:ext cx="2094840" cy="1142280"/>
           </a:xfrm>
           <a:prstGeom prst="roundRect">
             <a:avLst>
@@ -7968,14 +9001,14 @@
       </p:sp>
       <p:sp>
         <p:nvSpPr>
-          <p:cNvPr id="102" name=""/>
+          <p:cNvPr id="104" name=""/>
           <p:cNvSpPr/>
           <p:nvPr/>
         </p:nvSpPr>
         <p:spPr>
           <a:xfrm>
             <a:off x="10134720" y="2619360"/>
-            <a:ext cx="1285560" cy="1142640"/>
+            <a:ext cx="1285200" cy="1142280"/>
           </a:xfrm>
           <a:prstGeom prst="roundRect">
             <a:avLst>
@@ -8013,14 +9046,14 @@
       </p:sp>
       <p:sp>
         <p:nvSpPr>
-          <p:cNvPr id="103" name=""/>
+          <p:cNvPr id="105" name=""/>
           <p:cNvSpPr/>
           <p:nvPr/>
         </p:nvSpPr>
         <p:spPr>
           <a:xfrm>
             <a:off x="1162080" y="2857680"/>
-            <a:ext cx="1476000" cy="304560"/>
+            <a:ext cx="1475640" cy="304200"/>
           </a:xfrm>
           <a:prstGeom prst="rect">
             <a:avLst/>
@@ -8071,14 +9104,14 @@
       </p:sp>
       <p:sp>
         <p:nvSpPr>
-          <p:cNvPr id="104" name=""/>
+          <p:cNvPr id="106" name=""/>
           <p:cNvSpPr/>
           <p:nvPr/>
         </p:nvSpPr>
         <p:spPr>
           <a:xfrm>
             <a:off x="1162080" y="3247920"/>
-            <a:ext cx="1476000" cy="428400"/>
+            <a:ext cx="1475640" cy="428040"/>
           </a:xfrm>
           <a:prstGeom prst="rect">
             <a:avLst/>
@@ -8156,14 +9189,14 @@
       </p:sp>
       <p:sp>
         <p:nvSpPr>
-          <p:cNvPr id="105" name=""/>
+          <p:cNvPr id="107" name=""/>
           <p:cNvSpPr/>
           <p:nvPr/>
         </p:nvSpPr>
         <p:spPr>
           <a:xfrm>
             <a:off x="4191120" y="2571840"/>
-            <a:ext cx="1714320" cy="304560"/>
+            <a:ext cx="1713960" cy="304200"/>
           </a:xfrm>
           <a:prstGeom prst="rect">
             <a:avLst/>
@@ -8214,14 +9247,14 @@
       </p:sp>
       <p:sp>
         <p:nvSpPr>
-          <p:cNvPr id="106" name=""/>
+          <p:cNvPr id="108" name=""/>
           <p:cNvSpPr/>
           <p:nvPr/>
         </p:nvSpPr>
         <p:spPr>
           <a:xfrm>
             <a:off x="4191120" y="3029040"/>
-            <a:ext cx="1714320" cy="685440"/>
+            <a:ext cx="1713960" cy="685080"/>
           </a:xfrm>
           <a:prstGeom prst="rect">
             <a:avLst/>
@@ -8326,14 +9359,14 @@
       </p:sp>
       <p:sp>
         <p:nvSpPr>
-          <p:cNvPr id="107" name=""/>
+          <p:cNvPr id="109" name=""/>
           <p:cNvSpPr/>
           <p:nvPr/>
         </p:nvSpPr>
         <p:spPr>
           <a:xfrm>
             <a:off x="7562880" y="2857680"/>
-            <a:ext cx="1428480" cy="304560"/>
+            <a:ext cx="1428120" cy="304200"/>
           </a:xfrm>
           <a:prstGeom prst="rect">
             <a:avLst/>
@@ -8384,14 +9417,14 @@
       </p:sp>
       <p:sp>
         <p:nvSpPr>
-          <p:cNvPr id="108" name=""/>
+          <p:cNvPr id="110" name=""/>
           <p:cNvSpPr/>
           <p:nvPr/>
         </p:nvSpPr>
         <p:spPr>
           <a:xfrm>
             <a:off x="7496280" y="3247920"/>
-            <a:ext cx="1571400" cy="428400"/>
+            <a:ext cx="1571040" cy="428040"/>
           </a:xfrm>
           <a:prstGeom prst="rect">
             <a:avLst/>
@@ -8469,14 +9502,14 @@
       </p:sp>
       <p:sp>
         <p:nvSpPr>
-          <p:cNvPr id="109" name=""/>
+          <p:cNvPr id="111" name=""/>
           <p:cNvSpPr/>
           <p:nvPr/>
         </p:nvSpPr>
         <p:spPr>
           <a:xfrm>
             <a:off x="10287000" y="2886120"/>
-            <a:ext cx="952200" cy="266400"/>
+            <a:ext cx="951840" cy="266040"/>
           </a:xfrm>
           <a:prstGeom prst="rect">
             <a:avLst/>
@@ -8527,14 +9560,14 @@
       </p:sp>
       <p:sp>
         <p:nvSpPr>
-          <p:cNvPr id="110" name=""/>
+          <p:cNvPr id="112" name=""/>
           <p:cNvSpPr/>
           <p:nvPr/>
         </p:nvSpPr>
         <p:spPr>
           <a:xfrm>
             <a:off x="10287000" y="3286080"/>
-            <a:ext cx="952200" cy="228240"/>
+            <a:ext cx="951840" cy="227880"/>
           </a:xfrm>
           <a:prstGeom prst="rect">
             <a:avLst/>
@@ -8583,58 +9616,6 @@
           </a:p>
         </p:txBody>
       </p:sp>
-      <p:cxnSp>
-        <p:nvCxnSpPr>
-          <p:cNvPr id="111" name=""/>
-          <p:cNvCxnSpPr>
-            <a:stCxn id="99" idx="3"/>
-            <a:endCxn id="100" idx="1"/>
-          </p:cNvCxnSpPr>
-          <p:nvPr/>
-        </p:nvCxnSpPr>
-        <p:spPr>
-          <a:xfrm>
-            <a:off x="2933280" y="3190680"/>
-            <a:ext cx="924840" cy="360"/>
-          </a:xfrm>
-          <a:prstGeom prst="straightConnector1">
-            <a:avLst/>
-          </a:prstGeom>
-          <a:ln w="28575">
-            <a:solidFill>
-              <a:srgbClr val="D99A31"/>
-            </a:solidFill>
-            <a:round/>
-            <a:tailEnd len="med" type="arrow" w="med"/>
-          </a:ln>
-        </p:spPr>
-      </p:cxnSp>
-      <p:cxnSp>
-        <p:nvCxnSpPr>
-          <p:cNvPr id="112" name=""/>
-          <p:cNvCxnSpPr>
-            <a:stCxn id="100" idx="3"/>
-            <a:endCxn id="101" idx="1"/>
-          </p:cNvCxnSpPr>
-          <p:nvPr/>
-        </p:nvCxnSpPr>
-        <p:spPr>
-          <a:xfrm>
-            <a:off x="6238800" y="3190680"/>
-            <a:ext cx="981360" cy="360"/>
-          </a:xfrm>
-          <a:prstGeom prst="straightConnector1">
-            <a:avLst/>
-          </a:prstGeom>
-          <a:ln w="28575">
-            <a:solidFill>
-              <a:srgbClr val="D99A31"/>
-            </a:solidFill>
-            <a:round/>
-            <a:tailEnd len="med" type="arrow" w="med"/>
-          </a:ln>
-        </p:spPr>
-      </p:cxnSp>
       <p:cxnSp>
         <p:nvCxnSpPr>
           <p:cNvPr id="113" name=""/>
@@ -8646,8 +9627,60 @@
         </p:nvCxnSpPr>
         <p:spPr>
           <a:xfrm>
-            <a:off x="9315000" y="3190680"/>
-            <a:ext cx="820080" cy="360"/>
+            <a:off x="2932920" y="3190680"/>
+            <a:ext cx="925200" cy="360"/>
+          </a:xfrm>
+          <a:prstGeom prst="straightConnector1">
+            <a:avLst/>
+          </a:prstGeom>
+          <a:ln w="28575">
+            <a:solidFill>
+              <a:srgbClr val="D99A31"/>
+            </a:solidFill>
+            <a:round/>
+            <a:tailEnd len="med" type="arrow" w="med"/>
+          </a:ln>
+        </p:spPr>
+      </p:cxnSp>
+      <p:cxnSp>
+        <p:nvCxnSpPr>
+          <p:cNvPr id="114" name=""/>
+          <p:cNvCxnSpPr>
+            <a:stCxn id="102" idx="3"/>
+            <a:endCxn id="103" idx="1"/>
+          </p:cNvCxnSpPr>
+          <p:nvPr/>
+        </p:nvCxnSpPr>
+        <p:spPr>
+          <a:xfrm>
+            <a:off x="6238440" y="3190680"/>
+            <a:ext cx="981720" cy="360"/>
+          </a:xfrm>
+          <a:prstGeom prst="straightConnector1">
+            <a:avLst/>
+          </a:prstGeom>
+          <a:ln w="28575">
+            <a:solidFill>
+              <a:srgbClr val="D99A31"/>
+            </a:solidFill>
+            <a:round/>
+            <a:tailEnd len="med" type="arrow" w="med"/>
+          </a:ln>
+        </p:spPr>
+      </p:cxnSp>
+      <p:cxnSp>
+        <p:nvCxnSpPr>
+          <p:cNvPr id="115" name=""/>
+          <p:cNvCxnSpPr>
+            <a:stCxn id="103" idx="3"/>
+            <a:endCxn id="104" idx="1"/>
+          </p:cNvCxnSpPr>
+          <p:nvPr/>
+        </p:nvCxnSpPr>
+        <p:spPr>
+          <a:xfrm>
+            <a:off x="9314640" y="3190680"/>
+            <a:ext cx="820440" cy="360"/>
           </a:xfrm>
           <a:prstGeom prst="straightConnector1">
             <a:avLst/>
@@ -8700,14 +9733,14 @@
       </p:grpSpPr>
       <p:sp>
         <p:nvSpPr>
-          <p:cNvPr id="114" name=""/>
+          <p:cNvPr id="116" name=""/>
           <p:cNvSpPr/>
           <p:nvPr/>
         </p:nvSpPr>
         <p:spPr>
           <a:xfrm>
             <a:off x="0" y="0"/>
-            <a:ext cx="12191760" cy="151920"/>
+            <a:ext cx="12191400" cy="151560"/>
           </a:xfrm>
           <a:prstGeom prst="rect">
             <a:avLst/>
@@ -8743,166 +9776,50 @@
       </p:sp>
       <p:sp>
         <p:nvSpPr>
-          <p:cNvPr id="115" name=""/>
-          <p:cNvSpPr/>
-          <p:nvPr/>
-        </p:nvSpPr>
-        <p:spPr>
-          <a:xfrm>
-            <a:off x="666720" y="857160"/>
-            <a:ext cx="9905760" cy="571320"/>
-          </a:xfrm>
-          <a:prstGeom prst="rect">
-            <a:avLst/>
-          </a:prstGeom>
-          <a:noFill/>
-          <a:ln w="0">
-            <a:noFill/>
-          </a:ln>
-        </p:spPr>
-        <p:style>
-          <a:lnRef idx="0"/>
-          <a:fillRef idx="0"/>
-          <a:effectRef idx="0"/>
-          <a:fontRef idx="minor"/>
-        </p:style>
-        <p:txBody>
-          <a:bodyPr lIns="90000" tIns="45000" rIns="90000" bIns="45000" anchor="t">
-            <a:normAutofit/>
-          </a:bodyPr>
-          <a:p>
-            <a:pPr>
-              <a:lnSpc>
-                <a:spcPct val="100000"/>
-              </a:lnSpc>
-            </a:pPr>
-            <a:r>
-              <a:rPr lang="en-US" sz="2400" b="1" u="none" strike="noStrike">
-                <a:solidFill>
-                  <a:srgbClr val="10263F"/>
+          <p:cNvPr id="117" name=""/>
+          <p:cNvSpPr/>
+          <p:nvPr/>
+        </p:nvSpPr>
+        <p:spPr>
+          <a:xfrm>
+            <a:off x="10191600" y="6343560"/>
+            <a:ext cx="1428120" cy="208800"/>
+          </a:xfrm>
+          <a:prstGeom prst="rect">
+            <a:avLst/>
+          </a:prstGeom>
+          <a:noFill/>
+          <a:ln w="0">
+            <a:noFill/>
+          </a:ln>
+        </p:spPr>
+        <p:style>
+          <a:lnRef idx="0"/>
+          <a:fillRef idx="0"/>
+          <a:effectRef idx="0"/>
+          <a:fontRef idx="minor"/>
+        </p:style>
+        <p:txBody>
+          <a:bodyPr lIns="90000" tIns="45000" rIns="90000" bIns="45000" anchor="t">
+            <a:normAutofit fontScale="92500" lnSpcReduction="9999"/>
+          </a:bodyPr>
+          <a:p>
+            <a:pPr algn="r">
+              <a:lnSpc>
+                <a:spcPct val="100000"/>
+              </a:lnSpc>
+            </a:pPr>
+            <a:r>
+              <a:rPr lang="en-US" sz="900" b="0" u="none" strike="noStrike">
+                <a:solidFill>
+                  <a:srgbClr val="54616D"/>
                 </a:solidFill>
                 <a:effectLst/>
                 <a:uFillTx/>
                 <a:latin typeface="C059"/>
                 <a:ea typeface="C059"/>
               </a:rPr>
-              <a:t>Technology stack</a:t>
-            </a:r>
-            <a:endParaRPr lang="en-US" sz="2400" b="0" u="none" strike="noStrike">
-              <a:solidFill>
-                <a:srgbClr val="000000"/>
-              </a:solidFill>
-              <a:effectLst/>
-              <a:uFillTx/>
-              <a:latin typeface="Arial"/>
-            </a:endParaRPr>
-          </a:p>
-        </p:txBody>
-      </p:sp>
-      <p:sp>
-        <p:nvSpPr>
-          <p:cNvPr id="116" name=""/>
-          <p:cNvSpPr/>
-          <p:nvPr/>
-        </p:nvSpPr>
-        <p:spPr>
-          <a:xfrm>
-            <a:off x="685800" y="1409760"/>
-            <a:ext cx="9715320" cy="266400"/>
-          </a:xfrm>
-          <a:prstGeom prst="rect">
-            <a:avLst/>
-          </a:prstGeom>
-          <a:noFill/>
-          <a:ln w="0">
-            <a:noFill/>
-          </a:ln>
-        </p:spPr>
-        <p:style>
-          <a:lnRef idx="0"/>
-          <a:fillRef idx="0"/>
-          <a:effectRef idx="0"/>
-          <a:fontRef idx="minor"/>
-        </p:style>
-        <p:txBody>
-          <a:bodyPr lIns="90000" tIns="45000" rIns="90000" bIns="45000" anchor="t">
-            <a:normAutofit lnSpcReduction="9999"/>
-          </a:bodyPr>
-          <a:p>
-            <a:pPr>
-              <a:lnSpc>
-                <a:spcPct val="100000"/>
-              </a:lnSpc>
-            </a:pPr>
-            <a:r>
-              <a:rPr lang="en-US" sz="1200" b="0" u="none" strike="noStrike">
-                <a:solidFill>
-                  <a:srgbClr val="54616D"/>
-                </a:solidFill>
-                <a:effectLst/>
-                <a:uFillTx/>
-                <a:latin typeface="C059"/>
-                <a:ea typeface="C059"/>
-              </a:rPr>
-              <a:t>The stack matches the Java syllabus and supports a server-rendered web application.</a:t>
-            </a:r>
-            <a:endParaRPr lang="en-US" sz="1200" b="0" u="none" strike="noStrike">
-              <a:solidFill>
-                <a:srgbClr val="000000"/>
-              </a:solidFill>
-              <a:effectLst/>
-              <a:uFillTx/>
-              <a:latin typeface="Arial"/>
-            </a:endParaRPr>
-          </a:p>
-        </p:txBody>
-      </p:sp>
-      <p:sp>
-        <p:nvSpPr>
-          <p:cNvPr id="117" name=""/>
-          <p:cNvSpPr/>
-          <p:nvPr/>
-        </p:nvSpPr>
-        <p:spPr>
-          <a:xfrm>
-            <a:off x="10191600" y="6343560"/>
-            <a:ext cx="1428480" cy="209160"/>
-          </a:xfrm>
-          <a:prstGeom prst="rect">
-            <a:avLst/>
-          </a:prstGeom>
-          <a:noFill/>
-          <a:ln w="0">
-            <a:noFill/>
-          </a:ln>
-        </p:spPr>
-        <p:style>
-          <a:lnRef idx="0"/>
-          <a:fillRef idx="0"/>
-          <a:effectRef idx="0"/>
-          <a:fontRef idx="minor"/>
-        </p:style>
-        <p:txBody>
-          <a:bodyPr lIns="90000" tIns="45000" rIns="90000" bIns="45000" anchor="t">
-            <a:normAutofit fontScale="92500" lnSpcReduction="9999"/>
-          </a:bodyPr>
-          <a:p>
-            <a:pPr algn="r">
-              <a:lnSpc>
-                <a:spcPct val="100000"/>
-              </a:lnSpc>
-            </a:pPr>
-            <a:r>
-              <a:rPr lang="en-US" sz="900" b="0" u="none" strike="noStrike">
-                <a:solidFill>
-                  <a:srgbClr val="54616D"/>
-                </a:solidFill>
-                <a:effectLst/>
-                <a:uFillTx/>
-                <a:latin typeface="C059"/>
-                <a:ea typeface="C059"/>
-              </a:rPr>
-              <a:t>Artifact Alley  |  07</a:t>
+              <a:t>Artifact Alley  |  06</a:t>
             </a:r>
             <a:endParaRPr lang="en-US" sz="900" b="0" u="none" strike="noStrike">
               <a:solidFill>
@@ -8915,1133 +9832,54 @@
           </a:p>
         </p:txBody>
       </p:sp>
-      <p:sp>
-        <p:nvSpPr>
+      <p:pic>
+        <p:nvPicPr>
           <p:cNvPr id="118" name=""/>
-          <p:cNvSpPr/>
-          <p:nvPr/>
-        </p:nvSpPr>
-        <p:spPr>
-          <a:xfrm>
-            <a:off x="905040" y="1619280"/>
-            <a:ext cx="4857480" cy="742680"/>
-          </a:xfrm>
-          <a:prstGeom prst="roundRect">
-            <a:avLst>
-              <a:gd name="adj" fmla="val 17949"/>
-            </a:avLst>
-          </a:prstGeom>
-          <a:solidFill>
-            <a:srgbClr val="FFFFFF"/>
-          </a:solidFill>
-          <a:ln w="0">
-            <a:noFill/>
-          </a:ln>
-        </p:spPr>
-        <p:style>
-          <a:lnRef idx="0"/>
-          <a:fillRef idx="0"/>
-          <a:effectRef idx="0"/>
-          <a:fontRef idx="minor"/>
-        </p:style>
-        <p:txBody>
-          <a:bodyPr lIns="90000" tIns="45000" rIns="90000" bIns="45000" anchor="t">
-            <a:noAutofit/>
-          </a:bodyPr>
-          <a:p>
-            <a:endParaRPr lang="en-US" sz="1800" b="0" u="none" strike="noStrike">
-              <a:solidFill>
-                <a:srgbClr val="000000"/>
-              </a:solidFill>
-              <a:effectLst/>
-              <a:uFillTx/>
-              <a:latin typeface="Arial"/>
-            </a:endParaRPr>
-          </a:p>
-        </p:txBody>
-      </p:sp>
-      <p:sp>
-        <p:nvSpPr>
+          <p:cNvPicPr/>
+          <p:nvPr/>
+        </p:nvPicPr>
+        <p:blipFill>
+          <a:blip r:embed="rId1"/>
+          <a:stretch/>
+        </p:blipFill>
+        <p:spPr>
+          <a:xfrm>
+            <a:off x="572040" y="360"/>
+            <a:ext cx="5142960" cy="6857640"/>
+          </a:xfrm>
+          <a:prstGeom prst="rect">
+            <a:avLst/>
+          </a:prstGeom>
+          <a:noFill/>
+          <a:ln w="0">
+            <a:noFill/>
+          </a:ln>
+        </p:spPr>
+      </p:pic>
+      <p:pic>
+        <p:nvPicPr>
           <p:cNvPr id="119" name=""/>
-          <p:cNvSpPr/>
-          <p:nvPr/>
-        </p:nvSpPr>
-        <p:spPr>
-          <a:xfrm>
-            <a:off x="1171440" y="1838160"/>
-            <a:ext cx="1666440" cy="266400"/>
-          </a:xfrm>
-          <a:prstGeom prst="rect">
-            <a:avLst/>
-          </a:prstGeom>
-          <a:noFill/>
-          <a:ln w="0">
-            <a:noFill/>
-          </a:ln>
-        </p:spPr>
-        <p:style>
-          <a:lnRef idx="0"/>
-          <a:fillRef idx="0"/>
-          <a:effectRef idx="0"/>
-          <a:fontRef idx="minor"/>
-        </p:style>
-        <p:txBody>
-          <a:bodyPr lIns="90000" tIns="45000" rIns="90000" bIns="45000" anchor="t">
-            <a:normAutofit fontScale="92500" lnSpcReduction="9999"/>
-          </a:bodyPr>
-          <a:p>
-            <a:pPr>
-              <a:lnSpc>
-                <a:spcPct val="100000"/>
-              </a:lnSpc>
-            </a:pPr>
-            <a:r>
-              <a:rPr lang="en-US" sz="1350" b="1" u="none" strike="noStrike">
-                <a:solidFill>
-                  <a:srgbClr val="54616D"/>
-                </a:solidFill>
-                <a:effectLst/>
-                <a:uFillTx/>
-                <a:latin typeface="C059"/>
-                <a:ea typeface="C059"/>
-              </a:rPr>
-              <a:t>Language</a:t>
-            </a:r>
-            <a:endParaRPr lang="en-US" sz="1350" b="0" u="none" strike="noStrike">
-              <a:solidFill>
-                <a:srgbClr val="000000"/>
-              </a:solidFill>
-              <a:effectLst/>
-              <a:uFillTx/>
-              <a:latin typeface="Arial"/>
-            </a:endParaRPr>
-          </a:p>
-        </p:txBody>
-      </p:sp>
-      <p:sp>
-        <p:nvSpPr>
-          <p:cNvPr id="120" name=""/>
-          <p:cNvSpPr/>
-          <p:nvPr/>
-        </p:nvSpPr>
-        <p:spPr>
-          <a:xfrm>
-            <a:off x="2905200" y="1819440"/>
-            <a:ext cx="2523600" cy="285480"/>
-          </a:xfrm>
-          <a:prstGeom prst="rect">
-            <a:avLst/>
-          </a:prstGeom>
-          <a:noFill/>
-          <a:ln w="0">
-            <a:noFill/>
-          </a:ln>
-        </p:spPr>
-        <p:style>
-          <a:lnRef idx="0"/>
-          <a:fillRef idx="0"/>
-          <a:effectRef idx="0"/>
-          <a:fontRef idx="minor"/>
-        </p:style>
-        <p:txBody>
-          <a:bodyPr lIns="90000" tIns="45000" rIns="90000" bIns="45000" anchor="t">
-            <a:normAutofit fontScale="92500" lnSpcReduction="9999"/>
-          </a:bodyPr>
-          <a:p>
-            <a:pPr>
-              <a:lnSpc>
-                <a:spcPct val="100000"/>
-              </a:lnSpc>
-            </a:pPr>
-            <a:r>
-              <a:rPr lang="en-US" sz="1500" b="1" u="none" strike="noStrike">
-                <a:solidFill>
-                  <a:srgbClr val="10263F"/>
-                </a:solidFill>
-                <a:effectLst/>
-                <a:uFillTx/>
-                <a:latin typeface="C059"/>
-                <a:ea typeface="C059"/>
-              </a:rPr>
-              <a:t>Java 21</a:t>
-            </a:r>
-            <a:endParaRPr lang="en-US" sz="1500" b="0" u="none" strike="noStrike">
-              <a:solidFill>
-                <a:srgbClr val="000000"/>
-              </a:solidFill>
-              <a:effectLst/>
-              <a:uFillTx/>
-              <a:latin typeface="Arial"/>
-            </a:endParaRPr>
-          </a:p>
-        </p:txBody>
-      </p:sp>
-      <p:sp>
-        <p:nvSpPr>
-          <p:cNvPr id="121" name=""/>
-          <p:cNvSpPr/>
-          <p:nvPr/>
-        </p:nvSpPr>
-        <p:spPr>
-          <a:xfrm>
-            <a:off x="905040" y="2619360"/>
-            <a:ext cx="4857480" cy="742680"/>
-          </a:xfrm>
-          <a:prstGeom prst="roundRect">
-            <a:avLst>
-              <a:gd name="adj" fmla="val 17949"/>
-            </a:avLst>
-          </a:prstGeom>
-          <a:solidFill>
-            <a:srgbClr val="FFFFFF"/>
-          </a:solidFill>
-          <a:ln w="0">
-            <a:noFill/>
-          </a:ln>
-        </p:spPr>
-        <p:style>
-          <a:lnRef idx="0"/>
-          <a:fillRef idx="0"/>
-          <a:effectRef idx="0"/>
-          <a:fontRef idx="minor"/>
-        </p:style>
-        <p:txBody>
-          <a:bodyPr lIns="90000" tIns="45000" rIns="90000" bIns="45000" anchor="t">
-            <a:noAutofit/>
-          </a:bodyPr>
-          <a:p>
-            <a:endParaRPr lang="en-US" sz="1800" b="0" u="none" strike="noStrike">
-              <a:solidFill>
-                <a:srgbClr val="000000"/>
-              </a:solidFill>
-              <a:effectLst/>
-              <a:uFillTx/>
-              <a:latin typeface="Arial"/>
-            </a:endParaRPr>
-          </a:p>
-        </p:txBody>
-      </p:sp>
-      <p:sp>
-        <p:nvSpPr>
-          <p:cNvPr id="122" name=""/>
-          <p:cNvSpPr/>
-          <p:nvPr/>
-        </p:nvSpPr>
-        <p:spPr>
-          <a:xfrm>
-            <a:off x="1171440" y="2838600"/>
-            <a:ext cx="1666440" cy="266400"/>
-          </a:xfrm>
-          <a:prstGeom prst="rect">
-            <a:avLst/>
-          </a:prstGeom>
-          <a:noFill/>
-          <a:ln w="0">
-            <a:noFill/>
-          </a:ln>
-        </p:spPr>
-        <p:style>
-          <a:lnRef idx="0"/>
-          <a:fillRef idx="0"/>
-          <a:effectRef idx="0"/>
-          <a:fontRef idx="minor"/>
-        </p:style>
-        <p:txBody>
-          <a:bodyPr lIns="90000" tIns="45000" rIns="90000" bIns="45000" anchor="t">
-            <a:normAutofit fontScale="92500" lnSpcReduction="9999"/>
-          </a:bodyPr>
-          <a:p>
-            <a:pPr>
-              <a:lnSpc>
-                <a:spcPct val="100000"/>
-              </a:lnSpc>
-            </a:pPr>
-            <a:r>
-              <a:rPr lang="en-US" sz="1350" b="1" u="none" strike="noStrike">
-                <a:solidFill>
-                  <a:srgbClr val="54616D"/>
-                </a:solidFill>
-                <a:effectLst/>
-                <a:uFillTx/>
-                <a:latin typeface="C059"/>
-                <a:ea typeface="C059"/>
-              </a:rPr>
-              <a:t>Framework</a:t>
-            </a:r>
-            <a:endParaRPr lang="en-US" sz="1350" b="0" u="none" strike="noStrike">
-              <a:solidFill>
-                <a:srgbClr val="000000"/>
-              </a:solidFill>
-              <a:effectLst/>
-              <a:uFillTx/>
-              <a:latin typeface="Arial"/>
-            </a:endParaRPr>
-          </a:p>
-        </p:txBody>
-      </p:sp>
-      <p:sp>
-        <p:nvSpPr>
-          <p:cNvPr id="123" name=""/>
-          <p:cNvSpPr/>
-          <p:nvPr/>
-        </p:nvSpPr>
-        <p:spPr>
-          <a:xfrm>
-            <a:off x="2905200" y="2819520"/>
-            <a:ext cx="2523600" cy="285480"/>
-          </a:xfrm>
-          <a:prstGeom prst="rect">
-            <a:avLst/>
-          </a:prstGeom>
-          <a:noFill/>
-          <a:ln w="0">
-            <a:noFill/>
-          </a:ln>
-        </p:spPr>
-        <p:style>
-          <a:lnRef idx="0"/>
-          <a:fillRef idx="0"/>
-          <a:effectRef idx="0"/>
-          <a:fontRef idx="minor"/>
-        </p:style>
-        <p:txBody>
-          <a:bodyPr lIns="90000" tIns="45000" rIns="90000" bIns="45000" anchor="t">
-            <a:normAutofit fontScale="92500" lnSpcReduction="9999"/>
-          </a:bodyPr>
-          <a:p>
-            <a:pPr>
-              <a:lnSpc>
-                <a:spcPct val="100000"/>
-              </a:lnSpc>
-            </a:pPr>
-            <a:r>
-              <a:rPr lang="en-US" sz="1500" b="1" u="none" strike="noStrike">
-                <a:solidFill>
-                  <a:srgbClr val="10263F"/>
-                </a:solidFill>
-                <a:effectLst/>
-                <a:uFillTx/>
-                <a:latin typeface="C059"/>
-                <a:ea typeface="C059"/>
-              </a:rPr>
-              <a:t>Spring Boot 3.5</a:t>
-            </a:r>
-            <a:endParaRPr lang="en-US" sz="1500" b="0" u="none" strike="noStrike">
-              <a:solidFill>
-                <a:srgbClr val="000000"/>
-              </a:solidFill>
-              <a:effectLst/>
-              <a:uFillTx/>
-              <a:latin typeface="Arial"/>
-            </a:endParaRPr>
-          </a:p>
-        </p:txBody>
-      </p:sp>
-      <p:sp>
-        <p:nvSpPr>
-          <p:cNvPr id="124" name=""/>
-          <p:cNvSpPr/>
-          <p:nvPr/>
-        </p:nvSpPr>
-        <p:spPr>
-          <a:xfrm>
-            <a:off x="905040" y="3619440"/>
-            <a:ext cx="4857480" cy="742680"/>
-          </a:xfrm>
-          <a:prstGeom prst="roundRect">
-            <a:avLst>
-              <a:gd name="adj" fmla="val 17949"/>
-            </a:avLst>
-          </a:prstGeom>
-          <a:solidFill>
-            <a:srgbClr val="FFFFFF"/>
-          </a:solidFill>
-          <a:ln w="0">
-            <a:noFill/>
-          </a:ln>
-        </p:spPr>
-        <p:style>
-          <a:lnRef idx="0"/>
-          <a:fillRef idx="0"/>
-          <a:effectRef idx="0"/>
-          <a:fontRef idx="minor"/>
-        </p:style>
-        <p:txBody>
-          <a:bodyPr lIns="90000" tIns="45000" rIns="90000" bIns="45000" anchor="t">
-            <a:noAutofit/>
-          </a:bodyPr>
-          <a:p>
-            <a:endParaRPr lang="en-US" sz="1800" b="0" u="none" strike="noStrike">
-              <a:solidFill>
-                <a:srgbClr val="000000"/>
-              </a:solidFill>
-              <a:effectLst/>
-              <a:uFillTx/>
-              <a:latin typeface="Arial"/>
-            </a:endParaRPr>
-          </a:p>
-        </p:txBody>
-      </p:sp>
-      <p:sp>
-        <p:nvSpPr>
-          <p:cNvPr id="125" name=""/>
-          <p:cNvSpPr/>
-          <p:nvPr/>
-        </p:nvSpPr>
-        <p:spPr>
-          <a:xfrm>
-            <a:off x="1171440" y="3838680"/>
-            <a:ext cx="1666440" cy="266400"/>
-          </a:xfrm>
-          <a:prstGeom prst="rect">
-            <a:avLst/>
-          </a:prstGeom>
-          <a:noFill/>
-          <a:ln w="0">
-            <a:noFill/>
-          </a:ln>
-        </p:spPr>
-        <p:style>
-          <a:lnRef idx="0"/>
-          <a:fillRef idx="0"/>
-          <a:effectRef idx="0"/>
-          <a:fontRef idx="minor"/>
-        </p:style>
-        <p:txBody>
-          <a:bodyPr lIns="90000" tIns="45000" rIns="90000" bIns="45000" anchor="t">
-            <a:normAutofit fontScale="92500" lnSpcReduction="9999"/>
-          </a:bodyPr>
-          <a:p>
-            <a:pPr>
-              <a:lnSpc>
-                <a:spcPct val="100000"/>
-              </a:lnSpc>
-            </a:pPr>
-            <a:r>
-              <a:rPr lang="en-US" sz="1350" b="1" u="none" strike="noStrike">
-                <a:solidFill>
-                  <a:srgbClr val="54616D"/>
-                </a:solidFill>
-                <a:effectLst/>
-                <a:uFillTx/>
-                <a:latin typeface="C059"/>
-                <a:ea typeface="C059"/>
-              </a:rPr>
-              <a:t>Web layer</a:t>
-            </a:r>
-            <a:endParaRPr lang="en-US" sz="1350" b="0" u="none" strike="noStrike">
-              <a:solidFill>
-                <a:srgbClr val="000000"/>
-              </a:solidFill>
-              <a:effectLst/>
-              <a:uFillTx/>
-              <a:latin typeface="Arial"/>
-            </a:endParaRPr>
-          </a:p>
-        </p:txBody>
-      </p:sp>
-      <p:sp>
-        <p:nvSpPr>
-          <p:cNvPr id="126" name=""/>
-          <p:cNvSpPr/>
-          <p:nvPr/>
-        </p:nvSpPr>
-        <p:spPr>
-          <a:xfrm>
-            <a:off x="2905200" y="3819600"/>
-            <a:ext cx="2523600" cy="285480"/>
-          </a:xfrm>
-          <a:prstGeom prst="rect">
-            <a:avLst/>
-          </a:prstGeom>
-          <a:noFill/>
-          <a:ln w="0">
-            <a:noFill/>
-          </a:ln>
-        </p:spPr>
-        <p:style>
-          <a:lnRef idx="0"/>
-          <a:fillRef idx="0"/>
-          <a:effectRef idx="0"/>
-          <a:fontRef idx="minor"/>
-        </p:style>
-        <p:txBody>
-          <a:bodyPr lIns="90000" tIns="45000" rIns="90000" bIns="45000" anchor="t">
-            <a:normAutofit fontScale="92500" lnSpcReduction="9999"/>
-          </a:bodyPr>
-          <a:p>
-            <a:pPr>
-              <a:lnSpc>
-                <a:spcPct val="100000"/>
-              </a:lnSpc>
-            </a:pPr>
-            <a:r>
-              <a:rPr lang="en-US" sz="1500" b="1" u="none" strike="noStrike">
-                <a:solidFill>
-                  <a:srgbClr val="10263F"/>
-                </a:solidFill>
-                <a:effectLst/>
-                <a:uFillTx/>
-                <a:latin typeface="C059"/>
-                <a:ea typeface="C059"/>
-              </a:rPr>
-              <a:t>Spring MVC and JSP</a:t>
-            </a:r>
-            <a:endParaRPr lang="en-US" sz="1500" b="0" u="none" strike="noStrike">
-              <a:solidFill>
-                <a:srgbClr val="000000"/>
-              </a:solidFill>
-              <a:effectLst/>
-              <a:uFillTx/>
-              <a:latin typeface="Arial"/>
-            </a:endParaRPr>
-          </a:p>
-        </p:txBody>
-      </p:sp>
-      <p:sp>
-        <p:nvSpPr>
-          <p:cNvPr id="127" name=""/>
-          <p:cNvSpPr/>
-          <p:nvPr/>
-        </p:nvSpPr>
-        <p:spPr>
-          <a:xfrm>
-            <a:off x="905040" y="4619520"/>
-            <a:ext cx="4857480" cy="742680"/>
-          </a:xfrm>
-          <a:prstGeom prst="roundRect">
-            <a:avLst>
-              <a:gd name="adj" fmla="val 17949"/>
-            </a:avLst>
-          </a:prstGeom>
-          <a:solidFill>
-            <a:srgbClr val="FFFFFF"/>
-          </a:solidFill>
-          <a:ln w="0">
-            <a:noFill/>
-          </a:ln>
-        </p:spPr>
-        <p:style>
-          <a:lnRef idx="0"/>
-          <a:fillRef idx="0"/>
-          <a:effectRef idx="0"/>
-          <a:fontRef idx="minor"/>
-        </p:style>
-        <p:txBody>
-          <a:bodyPr lIns="90000" tIns="45000" rIns="90000" bIns="45000" anchor="t">
-            <a:noAutofit/>
-          </a:bodyPr>
-          <a:p>
-            <a:endParaRPr lang="en-US" sz="1800" b="0" u="none" strike="noStrike">
-              <a:solidFill>
-                <a:srgbClr val="000000"/>
-              </a:solidFill>
-              <a:effectLst/>
-              <a:uFillTx/>
-              <a:latin typeface="Arial"/>
-            </a:endParaRPr>
-          </a:p>
-        </p:txBody>
-      </p:sp>
-      <p:sp>
-        <p:nvSpPr>
-          <p:cNvPr id="128" name=""/>
-          <p:cNvSpPr/>
-          <p:nvPr/>
-        </p:nvSpPr>
-        <p:spPr>
-          <a:xfrm>
-            <a:off x="1171440" y="4838760"/>
-            <a:ext cx="1666440" cy="266400"/>
-          </a:xfrm>
-          <a:prstGeom prst="rect">
-            <a:avLst/>
-          </a:prstGeom>
-          <a:noFill/>
-          <a:ln w="0">
-            <a:noFill/>
-          </a:ln>
-        </p:spPr>
-        <p:style>
-          <a:lnRef idx="0"/>
-          <a:fillRef idx="0"/>
-          <a:effectRef idx="0"/>
-          <a:fontRef idx="minor"/>
-        </p:style>
-        <p:txBody>
-          <a:bodyPr lIns="90000" tIns="45000" rIns="90000" bIns="45000" anchor="t">
-            <a:normAutofit fontScale="92500" lnSpcReduction="9999"/>
-          </a:bodyPr>
-          <a:p>
-            <a:pPr>
-              <a:lnSpc>
-                <a:spcPct val="100000"/>
-              </a:lnSpc>
-            </a:pPr>
-            <a:r>
-              <a:rPr lang="en-US" sz="1350" b="1" u="none" strike="noStrike">
-                <a:solidFill>
-                  <a:srgbClr val="54616D"/>
-                </a:solidFill>
-                <a:effectLst/>
-                <a:uFillTx/>
-                <a:latin typeface="C059"/>
-                <a:ea typeface="C059"/>
-              </a:rPr>
-              <a:t>Data access</a:t>
-            </a:r>
-            <a:endParaRPr lang="en-US" sz="1350" b="0" u="none" strike="noStrike">
-              <a:solidFill>
-                <a:srgbClr val="000000"/>
-              </a:solidFill>
-              <a:effectLst/>
-              <a:uFillTx/>
-              <a:latin typeface="Arial"/>
-            </a:endParaRPr>
-          </a:p>
-        </p:txBody>
-      </p:sp>
-      <p:sp>
-        <p:nvSpPr>
-          <p:cNvPr id="129" name=""/>
-          <p:cNvSpPr/>
-          <p:nvPr/>
-        </p:nvSpPr>
-        <p:spPr>
-          <a:xfrm>
-            <a:off x="2905200" y="4819680"/>
-            <a:ext cx="2523600" cy="285480"/>
-          </a:xfrm>
-          <a:prstGeom prst="rect">
-            <a:avLst/>
-          </a:prstGeom>
-          <a:noFill/>
-          <a:ln w="0">
-            <a:noFill/>
-          </a:ln>
-        </p:spPr>
-        <p:style>
-          <a:lnRef idx="0"/>
-          <a:fillRef idx="0"/>
-          <a:effectRef idx="0"/>
-          <a:fontRef idx="minor"/>
-        </p:style>
-        <p:txBody>
-          <a:bodyPr lIns="90000" tIns="45000" rIns="90000" bIns="45000" anchor="t">
-            <a:normAutofit fontScale="85000" lnSpcReduction="9999"/>
-          </a:bodyPr>
-          <a:p>
-            <a:pPr>
-              <a:lnSpc>
-                <a:spcPct val="100000"/>
-              </a:lnSpc>
-            </a:pPr>
-            <a:r>
-              <a:rPr lang="en-US" sz="1500" b="1" u="none" strike="noStrike">
-                <a:solidFill>
-                  <a:srgbClr val="10263F"/>
-                </a:solidFill>
-                <a:effectLst/>
-                <a:uFillTx/>
-                <a:latin typeface="C059"/>
-                <a:ea typeface="C059"/>
-              </a:rPr>
-              <a:t>Spring Data JPA and JDBC</a:t>
-            </a:r>
-            <a:endParaRPr lang="en-US" sz="1500" b="0" u="none" strike="noStrike">
-              <a:solidFill>
-                <a:srgbClr val="000000"/>
-              </a:solidFill>
-              <a:effectLst/>
-              <a:uFillTx/>
-              <a:latin typeface="Arial"/>
-            </a:endParaRPr>
-          </a:p>
-        </p:txBody>
-      </p:sp>
-      <p:sp>
-        <p:nvSpPr>
-          <p:cNvPr id="130" name=""/>
-          <p:cNvSpPr/>
-          <p:nvPr/>
-        </p:nvSpPr>
-        <p:spPr>
-          <a:xfrm>
-            <a:off x="6286680" y="1619280"/>
-            <a:ext cx="4857480" cy="742680"/>
-          </a:xfrm>
-          <a:prstGeom prst="roundRect">
-            <a:avLst>
-              <a:gd name="adj" fmla="val 17949"/>
-            </a:avLst>
-          </a:prstGeom>
-          <a:solidFill>
-            <a:srgbClr val="FFFFFF"/>
-          </a:solidFill>
-          <a:ln w="0">
-            <a:noFill/>
-          </a:ln>
-        </p:spPr>
-        <p:style>
-          <a:lnRef idx="0"/>
-          <a:fillRef idx="0"/>
-          <a:effectRef idx="0"/>
-          <a:fontRef idx="minor"/>
-        </p:style>
-        <p:txBody>
-          <a:bodyPr lIns="90000" tIns="45000" rIns="90000" bIns="45000" anchor="t">
-            <a:noAutofit/>
-          </a:bodyPr>
-          <a:p>
-            <a:endParaRPr lang="en-US" sz="1800" b="0" u="none" strike="noStrike">
-              <a:solidFill>
-                <a:srgbClr val="000000"/>
-              </a:solidFill>
-              <a:effectLst/>
-              <a:uFillTx/>
-              <a:latin typeface="Arial"/>
-            </a:endParaRPr>
-          </a:p>
-        </p:txBody>
-      </p:sp>
-      <p:sp>
-        <p:nvSpPr>
-          <p:cNvPr id="131" name=""/>
-          <p:cNvSpPr/>
-          <p:nvPr/>
-        </p:nvSpPr>
-        <p:spPr>
-          <a:xfrm>
-            <a:off x="6553080" y="1838160"/>
-            <a:ext cx="1666440" cy="266400"/>
-          </a:xfrm>
-          <a:prstGeom prst="rect">
-            <a:avLst/>
-          </a:prstGeom>
-          <a:noFill/>
-          <a:ln w="0">
-            <a:noFill/>
-          </a:ln>
-        </p:spPr>
-        <p:style>
-          <a:lnRef idx="0"/>
-          <a:fillRef idx="0"/>
-          <a:effectRef idx="0"/>
-          <a:fontRef idx="minor"/>
-        </p:style>
-        <p:txBody>
-          <a:bodyPr lIns="90000" tIns="45000" rIns="90000" bIns="45000" anchor="t">
-            <a:normAutofit fontScale="92500" lnSpcReduction="9999"/>
-          </a:bodyPr>
-          <a:p>
-            <a:pPr>
-              <a:lnSpc>
-                <a:spcPct val="100000"/>
-              </a:lnSpc>
-            </a:pPr>
-            <a:r>
-              <a:rPr lang="en-US" sz="1350" b="1" u="none" strike="noStrike">
-                <a:solidFill>
-                  <a:srgbClr val="54616D"/>
-                </a:solidFill>
-                <a:effectLst/>
-                <a:uFillTx/>
-                <a:latin typeface="C059"/>
-                <a:ea typeface="C059"/>
-              </a:rPr>
-              <a:t>Database</a:t>
-            </a:r>
-            <a:endParaRPr lang="en-US" sz="1350" b="0" u="none" strike="noStrike">
-              <a:solidFill>
-                <a:srgbClr val="000000"/>
-              </a:solidFill>
-              <a:effectLst/>
-              <a:uFillTx/>
-              <a:latin typeface="Arial"/>
-            </a:endParaRPr>
-          </a:p>
-        </p:txBody>
-      </p:sp>
-      <p:sp>
-        <p:nvSpPr>
-          <p:cNvPr id="132" name=""/>
-          <p:cNvSpPr/>
-          <p:nvPr/>
-        </p:nvSpPr>
-        <p:spPr>
-          <a:xfrm>
-            <a:off x="8286840" y="1819440"/>
-            <a:ext cx="2523600" cy="285480"/>
-          </a:xfrm>
-          <a:prstGeom prst="rect">
-            <a:avLst/>
-          </a:prstGeom>
-          <a:noFill/>
-          <a:ln w="0">
-            <a:noFill/>
-          </a:ln>
-        </p:spPr>
-        <p:style>
-          <a:lnRef idx="0"/>
-          <a:fillRef idx="0"/>
-          <a:effectRef idx="0"/>
-          <a:fontRef idx="minor"/>
-        </p:style>
-        <p:txBody>
-          <a:bodyPr lIns="90000" tIns="45000" rIns="90000" bIns="45000" anchor="t">
-            <a:normAutofit fontScale="62500" lnSpcReduction="19999"/>
-          </a:bodyPr>
-          <a:p>
-            <a:pPr>
-              <a:lnSpc>
-                <a:spcPct val="100000"/>
-              </a:lnSpc>
-            </a:pPr>
-            <a:r>
-              <a:rPr lang="en-US" sz="1500" b="1" u="none" strike="noStrike">
-                <a:solidFill>
-                  <a:srgbClr val="10263F"/>
-                </a:solidFill>
-                <a:effectLst/>
-                <a:uFillTx/>
-                <a:latin typeface="C059"/>
-                <a:ea typeface="C059"/>
-              </a:rPr>
-              <a:t>H2 locally; PostgreSQL in production</a:t>
-            </a:r>
-            <a:endParaRPr lang="en-US" sz="1500" b="0" u="none" strike="noStrike">
-              <a:solidFill>
-                <a:srgbClr val="000000"/>
-              </a:solidFill>
-              <a:effectLst/>
-              <a:uFillTx/>
-              <a:latin typeface="Arial"/>
-            </a:endParaRPr>
-          </a:p>
-        </p:txBody>
-      </p:sp>
-      <p:sp>
-        <p:nvSpPr>
-          <p:cNvPr id="133" name=""/>
-          <p:cNvSpPr/>
-          <p:nvPr/>
-        </p:nvSpPr>
-        <p:spPr>
-          <a:xfrm>
-            <a:off x="6286680" y="2619360"/>
-            <a:ext cx="4857480" cy="742680"/>
-          </a:xfrm>
-          <a:prstGeom prst="roundRect">
-            <a:avLst>
-              <a:gd name="adj" fmla="val 17949"/>
-            </a:avLst>
-          </a:prstGeom>
-          <a:solidFill>
-            <a:srgbClr val="FFFFFF"/>
-          </a:solidFill>
-          <a:ln w="0">
-            <a:noFill/>
-          </a:ln>
-        </p:spPr>
-        <p:style>
-          <a:lnRef idx="0"/>
-          <a:fillRef idx="0"/>
-          <a:effectRef idx="0"/>
-          <a:fontRef idx="minor"/>
-        </p:style>
-        <p:txBody>
-          <a:bodyPr lIns="90000" tIns="45000" rIns="90000" bIns="45000" anchor="t">
-            <a:noAutofit/>
-          </a:bodyPr>
-          <a:p>
-            <a:endParaRPr lang="en-US" sz="1800" b="0" u="none" strike="noStrike">
-              <a:solidFill>
-                <a:srgbClr val="000000"/>
-              </a:solidFill>
-              <a:effectLst/>
-              <a:uFillTx/>
-              <a:latin typeface="Arial"/>
-            </a:endParaRPr>
-          </a:p>
-        </p:txBody>
-      </p:sp>
-      <p:sp>
-        <p:nvSpPr>
-          <p:cNvPr id="134" name=""/>
-          <p:cNvSpPr/>
-          <p:nvPr/>
-        </p:nvSpPr>
-        <p:spPr>
-          <a:xfrm>
-            <a:off x="6553080" y="2838600"/>
-            <a:ext cx="1666440" cy="266400"/>
-          </a:xfrm>
-          <a:prstGeom prst="rect">
-            <a:avLst/>
-          </a:prstGeom>
-          <a:noFill/>
-          <a:ln w="0">
-            <a:noFill/>
-          </a:ln>
-        </p:spPr>
-        <p:style>
-          <a:lnRef idx="0"/>
-          <a:fillRef idx="0"/>
-          <a:effectRef idx="0"/>
-          <a:fontRef idx="minor"/>
-        </p:style>
-        <p:txBody>
-          <a:bodyPr lIns="90000" tIns="45000" rIns="90000" bIns="45000" anchor="t">
-            <a:normAutofit fontScale="77500" lnSpcReduction="19999"/>
-          </a:bodyPr>
-          <a:p>
-            <a:pPr>
-              <a:lnSpc>
-                <a:spcPct val="100000"/>
-              </a:lnSpc>
-            </a:pPr>
-            <a:r>
-              <a:rPr lang="en-US" sz="1350" b="1" u="none" strike="noStrike">
-                <a:solidFill>
-                  <a:srgbClr val="54616D"/>
-                </a:solidFill>
-                <a:effectLst/>
-                <a:uFillTx/>
-                <a:latin typeface="C059"/>
-                <a:ea typeface="C059"/>
-              </a:rPr>
-              <a:t>Build and packaging</a:t>
-            </a:r>
-            <a:endParaRPr lang="en-US" sz="1350" b="0" u="none" strike="noStrike">
-              <a:solidFill>
-                <a:srgbClr val="000000"/>
-              </a:solidFill>
-              <a:effectLst/>
-              <a:uFillTx/>
-              <a:latin typeface="Arial"/>
-            </a:endParaRPr>
-          </a:p>
-        </p:txBody>
-      </p:sp>
-      <p:sp>
-        <p:nvSpPr>
-          <p:cNvPr id="135" name=""/>
-          <p:cNvSpPr/>
-          <p:nvPr/>
-        </p:nvSpPr>
-        <p:spPr>
-          <a:xfrm>
-            <a:off x="8286840" y="2819520"/>
-            <a:ext cx="2523600" cy="285480"/>
-          </a:xfrm>
-          <a:prstGeom prst="rect">
-            <a:avLst/>
-          </a:prstGeom>
-          <a:noFill/>
-          <a:ln w="0">
-            <a:noFill/>
-          </a:ln>
-        </p:spPr>
-        <p:style>
-          <a:lnRef idx="0"/>
-          <a:fillRef idx="0"/>
-          <a:effectRef idx="0"/>
-          <a:fontRef idx="minor"/>
-        </p:style>
-        <p:txBody>
-          <a:bodyPr lIns="90000" tIns="45000" rIns="90000" bIns="45000" anchor="t">
-            <a:normAutofit fontScale="77500" lnSpcReduction="19999"/>
-          </a:bodyPr>
-          <a:p>
-            <a:pPr>
-              <a:lnSpc>
-                <a:spcPct val="100000"/>
-              </a:lnSpc>
-            </a:pPr>
-            <a:r>
-              <a:rPr lang="en-US" sz="1500" b="1" u="none" strike="noStrike">
-                <a:solidFill>
-                  <a:srgbClr val="10263F"/>
-                </a:solidFill>
-                <a:effectLst/>
-                <a:uFillTx/>
-                <a:latin typeface="C059"/>
-                <a:ea typeface="C059"/>
-              </a:rPr>
-              <a:t>Maven and executable WAR</a:t>
-            </a:r>
-            <a:endParaRPr lang="en-US" sz="1500" b="0" u="none" strike="noStrike">
-              <a:solidFill>
-                <a:srgbClr val="000000"/>
-              </a:solidFill>
-              <a:effectLst/>
-              <a:uFillTx/>
-              <a:latin typeface="Arial"/>
-            </a:endParaRPr>
-          </a:p>
-        </p:txBody>
-      </p:sp>
-      <p:sp>
-        <p:nvSpPr>
-          <p:cNvPr id="136" name=""/>
-          <p:cNvSpPr/>
-          <p:nvPr/>
-        </p:nvSpPr>
-        <p:spPr>
-          <a:xfrm>
-            <a:off x="6286680" y="3619440"/>
-            <a:ext cx="4857480" cy="742680"/>
-          </a:xfrm>
-          <a:prstGeom prst="roundRect">
-            <a:avLst>
-              <a:gd name="adj" fmla="val 17949"/>
-            </a:avLst>
-          </a:prstGeom>
-          <a:solidFill>
-            <a:srgbClr val="FFFFFF"/>
-          </a:solidFill>
-          <a:ln w="0">
-            <a:noFill/>
-          </a:ln>
-        </p:spPr>
-        <p:style>
-          <a:lnRef idx="0"/>
-          <a:fillRef idx="0"/>
-          <a:effectRef idx="0"/>
-          <a:fontRef idx="minor"/>
-        </p:style>
-        <p:txBody>
-          <a:bodyPr lIns="90000" tIns="45000" rIns="90000" bIns="45000" anchor="t">
-            <a:noAutofit/>
-          </a:bodyPr>
-          <a:p>
-            <a:endParaRPr lang="en-US" sz="1800" b="0" u="none" strike="noStrike">
-              <a:solidFill>
-                <a:srgbClr val="000000"/>
-              </a:solidFill>
-              <a:effectLst/>
-              <a:uFillTx/>
-              <a:latin typeface="Arial"/>
-            </a:endParaRPr>
-          </a:p>
-        </p:txBody>
-      </p:sp>
-      <p:sp>
-        <p:nvSpPr>
-          <p:cNvPr id="137" name=""/>
-          <p:cNvSpPr/>
-          <p:nvPr/>
-        </p:nvSpPr>
-        <p:spPr>
-          <a:xfrm>
-            <a:off x="6553080" y="3838680"/>
-            <a:ext cx="1666440" cy="266400"/>
-          </a:xfrm>
-          <a:prstGeom prst="rect">
-            <a:avLst/>
-          </a:prstGeom>
-          <a:noFill/>
-          <a:ln w="0">
-            <a:noFill/>
-          </a:ln>
-        </p:spPr>
-        <p:style>
-          <a:lnRef idx="0"/>
-          <a:fillRef idx="0"/>
-          <a:effectRef idx="0"/>
-          <a:fontRef idx="minor"/>
-        </p:style>
-        <p:txBody>
-          <a:bodyPr lIns="90000" tIns="45000" rIns="90000" bIns="45000" anchor="t">
-            <a:normAutofit fontScale="92500" lnSpcReduction="9999"/>
-          </a:bodyPr>
-          <a:p>
-            <a:pPr>
-              <a:lnSpc>
-                <a:spcPct val="100000"/>
-              </a:lnSpc>
-            </a:pPr>
-            <a:r>
-              <a:rPr lang="en-US" sz="1350" b="1" u="none" strike="noStrike">
-                <a:solidFill>
-                  <a:srgbClr val="54616D"/>
-                </a:solidFill>
-                <a:effectLst/>
-                <a:uFillTx/>
-                <a:latin typeface="C059"/>
-                <a:ea typeface="C059"/>
-              </a:rPr>
-              <a:t>Deployment</a:t>
-            </a:r>
-            <a:endParaRPr lang="en-US" sz="1350" b="0" u="none" strike="noStrike">
-              <a:solidFill>
-                <a:srgbClr val="000000"/>
-              </a:solidFill>
-              <a:effectLst/>
-              <a:uFillTx/>
-              <a:latin typeface="Arial"/>
-            </a:endParaRPr>
-          </a:p>
-        </p:txBody>
-      </p:sp>
-      <p:sp>
-        <p:nvSpPr>
-          <p:cNvPr id="138" name=""/>
-          <p:cNvSpPr/>
-          <p:nvPr/>
-        </p:nvSpPr>
-        <p:spPr>
-          <a:xfrm>
-            <a:off x="8286840" y="3819600"/>
-            <a:ext cx="2523600" cy="285480"/>
-          </a:xfrm>
-          <a:prstGeom prst="rect">
-            <a:avLst/>
-          </a:prstGeom>
-          <a:noFill/>
-          <a:ln w="0">
-            <a:noFill/>
-          </a:ln>
-        </p:spPr>
-        <p:style>
-          <a:lnRef idx="0"/>
-          <a:fillRef idx="0"/>
-          <a:effectRef idx="0"/>
-          <a:fontRef idx="minor"/>
-        </p:style>
-        <p:txBody>
-          <a:bodyPr lIns="90000" tIns="45000" rIns="90000" bIns="45000" anchor="t">
-            <a:normAutofit fontScale="92500" lnSpcReduction="9999"/>
-          </a:bodyPr>
-          <a:p>
-            <a:pPr>
-              <a:lnSpc>
-                <a:spcPct val="100000"/>
-              </a:lnSpc>
-            </a:pPr>
-            <a:r>
-              <a:rPr lang="en-US" sz="1500" b="1" u="none" strike="noStrike">
-                <a:solidFill>
-                  <a:srgbClr val="10263F"/>
-                </a:solidFill>
-                <a:effectLst/>
-                <a:uFillTx/>
-                <a:latin typeface="C059"/>
-                <a:ea typeface="C059"/>
-              </a:rPr>
-              <a:t>Docker on Render</a:t>
-            </a:r>
-            <a:endParaRPr lang="en-US" sz="1500" b="0" u="none" strike="noStrike">
-              <a:solidFill>
-                <a:srgbClr val="000000"/>
-              </a:solidFill>
-              <a:effectLst/>
-              <a:uFillTx/>
-              <a:latin typeface="Arial"/>
-            </a:endParaRPr>
-          </a:p>
-        </p:txBody>
-      </p:sp>
+          <p:cNvPicPr/>
+          <p:nvPr/>
+        </p:nvPicPr>
+        <p:blipFill>
+          <a:blip r:embed="rId2"/>
+          <a:stretch/>
+        </p:blipFill>
+        <p:spPr>
+          <a:xfrm>
+            <a:off x="5986440" y="360"/>
+            <a:ext cx="5142960" cy="6857640"/>
+          </a:xfrm>
+          <a:prstGeom prst="rect">
+            <a:avLst/>
+          </a:prstGeom>
+          <a:noFill/>
+          <a:ln w="0">
+            <a:noFill/>
+          </a:ln>
+        </p:spPr>
+      </p:pic>
     </p:spTree>
   </p:cSld>
   <mc:AlternateContent>
@@ -10081,14 +9919,14 @@
       </p:grpSpPr>
       <p:sp>
         <p:nvSpPr>
-          <p:cNvPr id="139" name=""/>
+          <p:cNvPr id="120" name=""/>
           <p:cNvSpPr/>
           <p:nvPr/>
         </p:nvSpPr>
         <p:spPr>
           <a:xfrm>
             <a:off x="0" y="0"/>
-            <a:ext cx="12191760" cy="151920"/>
+            <a:ext cx="12191400" cy="151560"/>
           </a:xfrm>
           <a:prstGeom prst="rect">
             <a:avLst/>
@@ -10124,14 +9962,14 @@
       </p:sp>
       <p:sp>
         <p:nvSpPr>
-          <p:cNvPr id="140" name=""/>
+          <p:cNvPr id="121" name=""/>
           <p:cNvSpPr/>
           <p:nvPr/>
         </p:nvSpPr>
         <p:spPr>
           <a:xfrm>
             <a:off x="666720" y="857160"/>
-            <a:ext cx="9905760" cy="571320"/>
+            <a:ext cx="9905400" cy="570960"/>
           </a:xfrm>
           <a:prstGeom prst="rect">
             <a:avLst/>
@@ -10167,7 +10005,7 @@
                 <a:latin typeface="C059"/>
                 <a:ea typeface="C059"/>
               </a:rPr>
-              <a:t>Expected completed experience</a:t>
+              <a:t>Technology stack</a:t>
             </a:r>
             <a:endParaRPr lang="en-US" sz="2400" b="0" u="none" strike="noStrike">
               <a:solidFill>
@@ -10182,14 +10020,14 @@
       </p:sp>
       <p:sp>
         <p:nvSpPr>
-          <p:cNvPr id="141" name=""/>
+          <p:cNvPr id="122" name=""/>
           <p:cNvSpPr/>
           <p:nvPr/>
         </p:nvSpPr>
         <p:spPr>
           <a:xfrm>
             <a:off x="685800" y="1409760"/>
-            <a:ext cx="9715320" cy="266400"/>
+            <a:ext cx="9714960" cy="266040"/>
           </a:xfrm>
           <a:prstGeom prst="rect">
             <a:avLst/>
@@ -10225,7 +10063,7 @@
                 <a:latin typeface="C059"/>
                 <a:ea typeface="C059"/>
               </a:rPr>
-              <a:t>The target system creates a simple, auditable journey for each marketplace participant.</a:t>
+              <a:t>The stack matches the Java syllabus and supports a server-rendered web application.</a:t>
             </a:r>
             <a:endParaRPr lang="en-US" sz="1200" b="0" u="none" strike="noStrike">
               <a:solidFill>
@@ -10240,14 +10078,14 @@
       </p:sp>
       <p:sp>
         <p:nvSpPr>
-          <p:cNvPr id="142" name=""/>
+          <p:cNvPr id="123" name=""/>
           <p:cNvSpPr/>
           <p:nvPr/>
         </p:nvSpPr>
         <p:spPr>
           <a:xfrm>
             <a:off x="10191600" y="6343560"/>
-            <a:ext cx="1428480" cy="209160"/>
+            <a:ext cx="1428120" cy="208800"/>
           </a:xfrm>
           <a:prstGeom prst="rect">
             <a:avLst/>
@@ -10283,7 +10121,7 @@
                 <a:latin typeface="C059"/>
                 <a:ea typeface="C059"/>
               </a:rPr>
-              <a:t>Artifact Alley  |  08</a:t>
+              <a:t>Artifact Alley  |  07</a:t>
             </a:r>
             <a:endParaRPr lang="en-US" sz="900" b="0" u="none" strike="noStrike">
               <a:solidFill>
@@ -10296,304 +10134,346 @@
           </a:p>
         </p:txBody>
       </p:sp>
-      <p:pic>
-        <p:nvPicPr>
-          <p:cNvPr id="143" name=""/>
-          <p:cNvPicPr/>
-          <p:nvPr/>
-        </p:nvPicPr>
-        <p:blipFill>
-          <a:blip r:embed="rId1"/>
-          <a:stretch/>
-        </p:blipFill>
-        <p:spPr>
-          <a:xfrm>
-            <a:off x="809640" y="1762200"/>
-            <a:ext cx="2619000" cy="2619000"/>
-          </a:xfrm>
-          <a:prstGeom prst="rect">
-            <a:avLst/>
-          </a:prstGeom>
-          <a:noFill/>
-          <a:ln w="0">
-            <a:noFill/>
-          </a:ln>
-        </p:spPr>
-      </p:pic>
-      <p:pic>
-        <p:nvPicPr>
-          <p:cNvPr id="144" name=""/>
-          <p:cNvPicPr/>
-          <p:nvPr/>
-        </p:nvPicPr>
-        <p:blipFill>
-          <a:blip r:embed="rId2"/>
-          <a:stretch/>
-        </p:blipFill>
-        <p:spPr>
-          <a:xfrm>
-            <a:off x="8429760" y="1762200"/>
-            <a:ext cx="2619000" cy="2619000"/>
-          </a:xfrm>
-          <a:prstGeom prst="rect">
-            <a:avLst/>
-          </a:prstGeom>
-          <a:noFill/>
-          <a:ln w="0">
-            <a:noFill/>
-          </a:ln>
-        </p:spPr>
-      </p:pic>
-      <p:sp>
-        <p:nvSpPr>
-          <p:cNvPr id="145" name=""/>
-          <p:cNvSpPr/>
-          <p:nvPr/>
-        </p:nvSpPr>
-        <p:spPr>
-          <a:xfrm>
-            <a:off x="800280" y="4781520"/>
-            <a:ext cx="2666520" cy="285480"/>
-          </a:xfrm>
-          <a:prstGeom prst="rect">
-            <a:avLst/>
-          </a:prstGeom>
-          <a:noFill/>
-          <a:ln w="0">
-            <a:noFill/>
-          </a:ln>
-        </p:spPr>
-        <p:style>
-          <a:lnRef idx="0"/>
-          <a:fillRef idx="0"/>
-          <a:effectRef idx="0"/>
-          <a:fontRef idx="minor"/>
-        </p:style>
-        <p:txBody>
-          <a:bodyPr lIns="90000" tIns="45000" rIns="90000" bIns="45000" anchor="t">
-            <a:normAutofit fontScale="85000" lnSpcReduction="19999"/>
-          </a:bodyPr>
-          <a:p>
-            <a:pPr algn="ctr">
-              <a:lnSpc>
-                <a:spcPct val="100000"/>
-              </a:lnSpc>
-            </a:pPr>
-            <a:r>
-              <a:rPr lang="en-US" sz="1800" b="1" u="none" strike="noStrike">
-                <a:solidFill>
-                  <a:srgbClr val="10263F"/>
+      <p:sp>
+        <p:nvSpPr>
+          <p:cNvPr id="124" name=""/>
+          <p:cNvSpPr/>
+          <p:nvPr/>
+        </p:nvSpPr>
+        <p:spPr>
+          <a:xfrm>
+            <a:off x="905040" y="1619280"/>
+            <a:ext cx="4857120" cy="742320"/>
+          </a:xfrm>
+          <a:prstGeom prst="roundRect">
+            <a:avLst>
+              <a:gd name="adj" fmla="val 17949"/>
+            </a:avLst>
+          </a:prstGeom>
+          <a:solidFill>
+            <a:srgbClr val="FFFFFF"/>
+          </a:solidFill>
+          <a:ln w="0">
+            <a:noFill/>
+          </a:ln>
+        </p:spPr>
+        <p:style>
+          <a:lnRef idx="0"/>
+          <a:fillRef idx="0"/>
+          <a:effectRef idx="0"/>
+          <a:fontRef idx="minor"/>
+        </p:style>
+        <p:txBody>
+          <a:bodyPr lIns="90000" tIns="45000" rIns="90000" bIns="45000" anchor="t">
+            <a:noAutofit/>
+          </a:bodyPr>
+          <a:p>
+            <a:endParaRPr lang="en-US" sz="1800" b="0" u="none" strike="noStrike">
+              <a:solidFill>
+                <a:srgbClr val="000000"/>
+              </a:solidFill>
+              <a:effectLst/>
+              <a:uFillTx/>
+              <a:latin typeface="Arial"/>
+            </a:endParaRPr>
+          </a:p>
+        </p:txBody>
+      </p:sp>
+      <p:sp>
+        <p:nvSpPr>
+          <p:cNvPr id="125" name=""/>
+          <p:cNvSpPr/>
+          <p:nvPr/>
+        </p:nvSpPr>
+        <p:spPr>
+          <a:xfrm>
+            <a:off x="1171440" y="1838160"/>
+            <a:ext cx="1666080" cy="266040"/>
+          </a:xfrm>
+          <a:prstGeom prst="rect">
+            <a:avLst/>
+          </a:prstGeom>
+          <a:noFill/>
+          <a:ln w="0">
+            <a:noFill/>
+          </a:ln>
+        </p:spPr>
+        <p:style>
+          <a:lnRef idx="0"/>
+          <a:fillRef idx="0"/>
+          <a:effectRef idx="0"/>
+          <a:fontRef idx="minor"/>
+        </p:style>
+        <p:txBody>
+          <a:bodyPr lIns="90000" tIns="45000" rIns="90000" bIns="45000" anchor="t">
+            <a:normAutofit fontScale="92500" lnSpcReduction="9999"/>
+          </a:bodyPr>
+          <a:p>
+            <a:pPr>
+              <a:lnSpc>
+                <a:spcPct val="100000"/>
+              </a:lnSpc>
+            </a:pPr>
+            <a:r>
+              <a:rPr lang="en-US" sz="1350" b="1" u="none" strike="noStrike">
+                <a:solidFill>
+                  <a:srgbClr val="54616D"/>
                 </a:solidFill>
                 <a:effectLst/>
                 <a:uFillTx/>
                 <a:latin typeface="C059"/>
                 <a:ea typeface="C059"/>
               </a:rPr>
-              <a:t>Seller journey</a:t>
-            </a:r>
-            <a:endParaRPr lang="en-US" sz="1800" b="0" u="none" strike="noStrike">
-              <a:solidFill>
-                <a:srgbClr val="000000"/>
-              </a:solidFill>
-              <a:effectLst/>
-              <a:uFillTx/>
-              <a:latin typeface="Arial"/>
-            </a:endParaRPr>
-          </a:p>
-        </p:txBody>
-      </p:sp>
-      <p:sp>
-        <p:nvSpPr>
-          <p:cNvPr id="146" name=""/>
-          <p:cNvSpPr/>
-          <p:nvPr/>
-        </p:nvSpPr>
-        <p:spPr>
-          <a:xfrm>
-            <a:off x="781200" y="5143680"/>
-            <a:ext cx="2714400" cy="456840"/>
-          </a:xfrm>
-          <a:prstGeom prst="rect">
-            <a:avLst/>
-          </a:prstGeom>
-          <a:noFill/>
-          <a:ln w="0">
-            <a:noFill/>
-          </a:ln>
-        </p:spPr>
-        <p:style>
-          <a:lnRef idx="0"/>
-          <a:fillRef idx="0"/>
-          <a:effectRef idx="0"/>
-          <a:fontRef idx="minor"/>
-        </p:style>
-        <p:txBody>
-          <a:bodyPr lIns="90000" tIns="45000" rIns="90000" bIns="45000" anchor="t">
-            <a:normAutofit lnSpcReduction="9999"/>
-          </a:bodyPr>
-          <a:p>
-            <a:pPr algn="ctr">
-              <a:lnSpc>
-                <a:spcPct val="100000"/>
-              </a:lnSpc>
-            </a:pPr>
-            <a:r>
-              <a:rPr lang="en-US" sz="1280" b="0" u="none" strike="noStrike">
-                <a:solidFill>
-                  <a:srgbClr val="54616D"/>
+              <a:t>Language</a:t>
+            </a:r>
+            <a:endParaRPr lang="en-US" sz="1350" b="0" u="none" strike="noStrike">
+              <a:solidFill>
+                <a:srgbClr val="000000"/>
+              </a:solidFill>
+              <a:effectLst/>
+              <a:uFillTx/>
+              <a:latin typeface="Arial"/>
+            </a:endParaRPr>
+          </a:p>
+        </p:txBody>
+      </p:sp>
+      <p:sp>
+        <p:nvSpPr>
+          <p:cNvPr id="126" name=""/>
+          <p:cNvSpPr/>
+          <p:nvPr/>
+        </p:nvSpPr>
+        <p:spPr>
+          <a:xfrm>
+            <a:off x="2905200" y="1819440"/>
+            <a:ext cx="2523240" cy="285120"/>
+          </a:xfrm>
+          <a:prstGeom prst="rect">
+            <a:avLst/>
+          </a:prstGeom>
+          <a:noFill/>
+          <a:ln w="0">
+            <a:noFill/>
+          </a:ln>
+        </p:spPr>
+        <p:style>
+          <a:lnRef idx="0"/>
+          <a:fillRef idx="0"/>
+          <a:effectRef idx="0"/>
+          <a:fontRef idx="minor"/>
+        </p:style>
+        <p:txBody>
+          <a:bodyPr lIns="90000" tIns="45000" rIns="90000" bIns="45000" anchor="t">
+            <a:normAutofit fontScale="92500" lnSpcReduction="9999"/>
+          </a:bodyPr>
+          <a:p>
+            <a:pPr>
+              <a:lnSpc>
+                <a:spcPct val="100000"/>
+              </a:lnSpc>
+            </a:pPr>
+            <a:r>
+              <a:rPr lang="en-US" sz="1500" b="1" u="none" strike="noStrike">
+                <a:solidFill>
+                  <a:srgbClr val="10263F"/>
                 </a:solidFill>
                 <a:effectLst/>
                 <a:uFillTx/>
                 <a:latin typeface="C059"/>
                 <a:ea typeface="C059"/>
               </a:rPr>
-              <a:t>Create account, submit artifact, await approval</a:t>
-            </a:r>
-            <a:endParaRPr lang="en-US" sz="1280" b="0" u="none" strike="noStrike">
-              <a:solidFill>
-                <a:srgbClr val="000000"/>
-              </a:solidFill>
-              <a:effectLst/>
-              <a:uFillTx/>
-              <a:latin typeface="Arial"/>
-            </a:endParaRPr>
-          </a:p>
-        </p:txBody>
-      </p:sp>
-      <p:sp>
-        <p:nvSpPr>
-          <p:cNvPr id="147" name=""/>
-          <p:cNvSpPr/>
-          <p:nvPr/>
-        </p:nvSpPr>
-        <p:spPr>
-          <a:xfrm>
-            <a:off x="8439120" y="4781520"/>
-            <a:ext cx="2571480" cy="285480"/>
-          </a:xfrm>
-          <a:prstGeom prst="rect">
-            <a:avLst/>
-          </a:prstGeom>
-          <a:noFill/>
-          <a:ln w="0">
-            <a:noFill/>
-          </a:ln>
-        </p:spPr>
-        <p:style>
-          <a:lnRef idx="0"/>
-          <a:fillRef idx="0"/>
-          <a:effectRef idx="0"/>
-          <a:fontRef idx="minor"/>
-        </p:style>
-        <p:txBody>
-          <a:bodyPr lIns="90000" tIns="45000" rIns="90000" bIns="45000" anchor="t">
-            <a:normAutofit fontScale="85000" lnSpcReduction="19999"/>
-          </a:bodyPr>
-          <a:p>
-            <a:pPr algn="ctr">
-              <a:lnSpc>
-                <a:spcPct val="100000"/>
-              </a:lnSpc>
-            </a:pPr>
-            <a:r>
-              <a:rPr lang="en-US" sz="1800" b="1" u="none" strike="noStrike">
-                <a:solidFill>
-                  <a:srgbClr val="10263F"/>
+              <a:t>Java 21</a:t>
+            </a:r>
+            <a:endParaRPr lang="en-US" sz="1500" b="0" u="none" strike="noStrike">
+              <a:solidFill>
+                <a:srgbClr val="000000"/>
+              </a:solidFill>
+              <a:effectLst/>
+              <a:uFillTx/>
+              <a:latin typeface="Arial"/>
+            </a:endParaRPr>
+          </a:p>
+        </p:txBody>
+      </p:sp>
+      <p:sp>
+        <p:nvSpPr>
+          <p:cNvPr id="127" name=""/>
+          <p:cNvSpPr/>
+          <p:nvPr/>
+        </p:nvSpPr>
+        <p:spPr>
+          <a:xfrm>
+            <a:off x="905040" y="2619360"/>
+            <a:ext cx="4857120" cy="742320"/>
+          </a:xfrm>
+          <a:prstGeom prst="roundRect">
+            <a:avLst>
+              <a:gd name="adj" fmla="val 17949"/>
+            </a:avLst>
+          </a:prstGeom>
+          <a:solidFill>
+            <a:srgbClr val="FFFFFF"/>
+          </a:solidFill>
+          <a:ln w="0">
+            <a:noFill/>
+          </a:ln>
+        </p:spPr>
+        <p:style>
+          <a:lnRef idx="0"/>
+          <a:fillRef idx="0"/>
+          <a:effectRef idx="0"/>
+          <a:fontRef idx="minor"/>
+        </p:style>
+        <p:txBody>
+          <a:bodyPr lIns="90000" tIns="45000" rIns="90000" bIns="45000" anchor="t">
+            <a:noAutofit/>
+          </a:bodyPr>
+          <a:p>
+            <a:endParaRPr lang="en-US" sz="1800" b="0" u="none" strike="noStrike">
+              <a:solidFill>
+                <a:srgbClr val="000000"/>
+              </a:solidFill>
+              <a:effectLst/>
+              <a:uFillTx/>
+              <a:latin typeface="Arial"/>
+            </a:endParaRPr>
+          </a:p>
+        </p:txBody>
+      </p:sp>
+      <p:sp>
+        <p:nvSpPr>
+          <p:cNvPr id="128" name=""/>
+          <p:cNvSpPr/>
+          <p:nvPr/>
+        </p:nvSpPr>
+        <p:spPr>
+          <a:xfrm>
+            <a:off x="1171440" y="2838600"/>
+            <a:ext cx="1666080" cy="266040"/>
+          </a:xfrm>
+          <a:prstGeom prst="rect">
+            <a:avLst/>
+          </a:prstGeom>
+          <a:noFill/>
+          <a:ln w="0">
+            <a:noFill/>
+          </a:ln>
+        </p:spPr>
+        <p:style>
+          <a:lnRef idx="0"/>
+          <a:fillRef idx="0"/>
+          <a:effectRef idx="0"/>
+          <a:fontRef idx="minor"/>
+        </p:style>
+        <p:txBody>
+          <a:bodyPr lIns="90000" tIns="45000" rIns="90000" bIns="45000" anchor="t">
+            <a:normAutofit fontScale="92500" lnSpcReduction="9999"/>
+          </a:bodyPr>
+          <a:p>
+            <a:pPr>
+              <a:lnSpc>
+                <a:spcPct val="100000"/>
+              </a:lnSpc>
+            </a:pPr>
+            <a:r>
+              <a:rPr lang="en-US" sz="1350" b="1" u="none" strike="noStrike">
+                <a:solidFill>
+                  <a:srgbClr val="54616D"/>
                 </a:solidFill>
                 <a:effectLst/>
                 <a:uFillTx/>
                 <a:latin typeface="C059"/>
                 <a:ea typeface="C059"/>
               </a:rPr>
-              <a:t>Bidder journey</a:t>
-            </a:r>
-            <a:endParaRPr lang="en-US" sz="1800" b="0" u="none" strike="noStrike">
-              <a:solidFill>
-                <a:srgbClr val="000000"/>
-              </a:solidFill>
-              <a:effectLst/>
-              <a:uFillTx/>
-              <a:latin typeface="Arial"/>
-            </a:endParaRPr>
-          </a:p>
-        </p:txBody>
-      </p:sp>
-      <p:sp>
-        <p:nvSpPr>
-          <p:cNvPr id="148" name=""/>
-          <p:cNvSpPr/>
-          <p:nvPr/>
-        </p:nvSpPr>
-        <p:spPr>
-          <a:xfrm>
-            <a:off x="8400960" y="5143680"/>
-            <a:ext cx="2714400" cy="456840"/>
-          </a:xfrm>
-          <a:prstGeom prst="rect">
-            <a:avLst/>
-          </a:prstGeom>
-          <a:noFill/>
-          <a:ln w="0">
-            <a:noFill/>
-          </a:ln>
-        </p:spPr>
-        <p:style>
-          <a:lnRef idx="0"/>
-          <a:fillRef idx="0"/>
-          <a:effectRef idx="0"/>
-          <a:fontRef idx="minor"/>
-        </p:style>
-        <p:txBody>
-          <a:bodyPr lIns="90000" tIns="45000" rIns="90000" bIns="45000" anchor="t">
-            <a:normAutofit lnSpcReduction="9999"/>
-          </a:bodyPr>
-          <a:p>
-            <a:pPr algn="ctr">
-              <a:lnSpc>
-                <a:spcPct val="100000"/>
-              </a:lnSpc>
-            </a:pPr>
-            <a:r>
-              <a:rPr lang="en-US" sz="1280" b="0" u="none" strike="noStrike">
-                <a:solidFill>
-                  <a:srgbClr val="54616D"/>
+              <a:t>Framework</a:t>
+            </a:r>
+            <a:endParaRPr lang="en-US" sz="1350" b="0" u="none" strike="noStrike">
+              <a:solidFill>
+                <a:srgbClr val="000000"/>
+              </a:solidFill>
+              <a:effectLst/>
+              <a:uFillTx/>
+              <a:latin typeface="Arial"/>
+            </a:endParaRPr>
+          </a:p>
+        </p:txBody>
+      </p:sp>
+      <p:sp>
+        <p:nvSpPr>
+          <p:cNvPr id="129" name=""/>
+          <p:cNvSpPr/>
+          <p:nvPr/>
+        </p:nvSpPr>
+        <p:spPr>
+          <a:xfrm>
+            <a:off x="2905200" y="2819520"/>
+            <a:ext cx="2523240" cy="285120"/>
+          </a:xfrm>
+          <a:prstGeom prst="rect">
+            <a:avLst/>
+          </a:prstGeom>
+          <a:noFill/>
+          <a:ln w="0">
+            <a:noFill/>
+          </a:ln>
+        </p:spPr>
+        <p:style>
+          <a:lnRef idx="0"/>
+          <a:fillRef idx="0"/>
+          <a:effectRef idx="0"/>
+          <a:fontRef idx="minor"/>
+        </p:style>
+        <p:txBody>
+          <a:bodyPr lIns="90000" tIns="45000" rIns="90000" bIns="45000" anchor="t">
+            <a:normAutofit fontScale="92500" lnSpcReduction="9999"/>
+          </a:bodyPr>
+          <a:p>
+            <a:pPr>
+              <a:lnSpc>
+                <a:spcPct val="100000"/>
+              </a:lnSpc>
+            </a:pPr>
+            <a:r>
+              <a:rPr lang="en-US" sz="1500" b="1" u="none" strike="noStrike">
+                <a:solidFill>
+                  <a:srgbClr val="10263F"/>
                 </a:solidFill>
                 <a:effectLst/>
                 <a:uFillTx/>
                 <a:latin typeface="C059"/>
                 <a:ea typeface="C059"/>
               </a:rPr>
-              <a:t>Browse live items, inspect details, place a valid bid</a:t>
-            </a:r>
-            <a:endParaRPr lang="en-US" sz="1280" b="0" u="none" strike="noStrike">
-              <a:solidFill>
-                <a:srgbClr val="000000"/>
-              </a:solidFill>
-              <a:effectLst/>
-              <a:uFillTx/>
-              <a:latin typeface="Arial"/>
-            </a:endParaRPr>
-          </a:p>
-        </p:txBody>
-      </p:sp>
-      <p:sp>
-        <p:nvSpPr>
-          <p:cNvPr id="149" name=""/>
-          <p:cNvSpPr/>
-          <p:nvPr/>
-        </p:nvSpPr>
-        <p:spPr>
-          <a:xfrm>
-            <a:off x="3781440" y="2457360"/>
-            <a:ext cx="4647960" cy="1571400"/>
+              <a:t>Spring Boot 3.5</a:t>
+            </a:r>
+            <a:endParaRPr lang="en-US" sz="1500" b="0" u="none" strike="noStrike">
+              <a:solidFill>
+                <a:srgbClr val="000000"/>
+              </a:solidFill>
+              <a:effectLst/>
+              <a:uFillTx/>
+              <a:latin typeface="Arial"/>
+            </a:endParaRPr>
+          </a:p>
+        </p:txBody>
+      </p:sp>
+      <p:sp>
+        <p:nvSpPr>
+          <p:cNvPr id="130" name=""/>
+          <p:cNvSpPr/>
+          <p:nvPr/>
+        </p:nvSpPr>
+        <p:spPr>
+          <a:xfrm>
+            <a:off x="905040" y="3619440"/>
+            <a:ext cx="4857120" cy="742320"/>
           </a:xfrm>
           <a:prstGeom prst="roundRect">
             <a:avLst>
-              <a:gd name="adj" fmla="val 13333"/>
+              <a:gd name="adj" fmla="val 17949"/>
             </a:avLst>
           </a:prstGeom>
           <a:solidFill>
-            <a:srgbClr val="10263F"/>
+            <a:srgbClr val="FFFFFF"/>
           </a:solidFill>
           <a:ln w="0">
             <a:noFill/>
@@ -10612,83 +10492,83 @@
           <a:p>
             <a:endParaRPr lang="en-US" sz="1800" b="0" u="none" strike="noStrike">
               <a:solidFill>
-                <a:srgbClr val="FFFFFF"/>
-              </a:solidFill>
-              <a:effectLst/>
-              <a:uFillTx/>
-              <a:latin typeface="Arial"/>
-            </a:endParaRPr>
-          </a:p>
-        </p:txBody>
-      </p:sp>
-      <p:sp>
-        <p:nvSpPr>
-          <p:cNvPr id="150" name=""/>
-          <p:cNvSpPr/>
-          <p:nvPr/>
-        </p:nvSpPr>
-        <p:spPr>
-          <a:xfrm>
-            <a:off x="4143240" y="2800440"/>
-            <a:ext cx="3904920" cy="304560"/>
-          </a:xfrm>
-          <a:prstGeom prst="rect">
-            <a:avLst/>
-          </a:prstGeom>
-          <a:noFill/>
-          <a:ln w="0">
-            <a:noFill/>
-          </a:ln>
-        </p:spPr>
-        <p:style>
-          <a:lnRef idx="0"/>
-          <a:fillRef idx="0"/>
-          <a:effectRef idx="0"/>
-          <a:fontRef idx="minor"/>
-        </p:style>
-        <p:txBody>
-          <a:bodyPr lIns="90000" tIns="45000" rIns="90000" bIns="45000" anchor="t">
-            <a:normAutofit fontScale="85000" lnSpcReduction="19999"/>
-          </a:bodyPr>
-          <a:p>
-            <a:pPr algn="ctr">
-              <a:lnSpc>
-                <a:spcPct val="100000"/>
-              </a:lnSpc>
-            </a:pPr>
-            <a:r>
-              <a:rPr lang="en-US" sz="2020" b="1" u="none" strike="noStrike">
-                <a:solidFill>
-                  <a:srgbClr val="FFFFFF"/>
+                <a:srgbClr val="000000"/>
+              </a:solidFill>
+              <a:effectLst/>
+              <a:uFillTx/>
+              <a:latin typeface="Arial"/>
+            </a:endParaRPr>
+          </a:p>
+        </p:txBody>
+      </p:sp>
+      <p:sp>
+        <p:nvSpPr>
+          <p:cNvPr id="131" name=""/>
+          <p:cNvSpPr/>
+          <p:nvPr/>
+        </p:nvSpPr>
+        <p:spPr>
+          <a:xfrm>
+            <a:off x="1171440" y="3838680"/>
+            <a:ext cx="1666080" cy="266040"/>
+          </a:xfrm>
+          <a:prstGeom prst="rect">
+            <a:avLst/>
+          </a:prstGeom>
+          <a:noFill/>
+          <a:ln w="0">
+            <a:noFill/>
+          </a:ln>
+        </p:spPr>
+        <p:style>
+          <a:lnRef idx="0"/>
+          <a:fillRef idx="0"/>
+          <a:effectRef idx="0"/>
+          <a:fontRef idx="minor"/>
+        </p:style>
+        <p:txBody>
+          <a:bodyPr lIns="90000" tIns="45000" rIns="90000" bIns="45000" anchor="t">
+            <a:normAutofit fontScale="92500" lnSpcReduction="9999"/>
+          </a:bodyPr>
+          <a:p>
+            <a:pPr>
+              <a:lnSpc>
+                <a:spcPct val="100000"/>
+              </a:lnSpc>
+            </a:pPr>
+            <a:r>
+              <a:rPr lang="en-US" sz="1350" b="1" u="none" strike="noStrike">
+                <a:solidFill>
+                  <a:srgbClr val="54616D"/>
                 </a:solidFill>
                 <a:effectLst/>
                 <a:uFillTx/>
                 <a:latin typeface="C059"/>
                 <a:ea typeface="C059"/>
               </a:rPr>
-              <a:t>Marketplace quality</a:t>
-            </a:r>
-            <a:endParaRPr lang="en-US" sz="2020" b="0" u="none" strike="noStrike">
-              <a:solidFill>
-                <a:srgbClr val="000000"/>
-              </a:solidFill>
-              <a:effectLst/>
-              <a:uFillTx/>
-              <a:latin typeface="Arial"/>
-            </a:endParaRPr>
-          </a:p>
-        </p:txBody>
-      </p:sp>
-      <p:sp>
-        <p:nvSpPr>
-          <p:cNvPr id="151" name=""/>
-          <p:cNvSpPr/>
-          <p:nvPr/>
-        </p:nvSpPr>
-        <p:spPr>
-          <a:xfrm>
-            <a:off x="4095720" y="3257640"/>
-            <a:ext cx="4000320" cy="495000"/>
+              <a:t>Web layer</a:t>
+            </a:r>
+            <a:endParaRPr lang="en-US" sz="1350" b="0" u="none" strike="noStrike">
+              <a:solidFill>
+                <a:srgbClr val="000000"/>
+              </a:solidFill>
+              <a:effectLst/>
+              <a:uFillTx/>
+              <a:latin typeface="Arial"/>
+            </a:endParaRPr>
+          </a:p>
+        </p:txBody>
+      </p:sp>
+      <p:sp>
+        <p:nvSpPr>
+          <p:cNvPr id="132" name=""/>
+          <p:cNvSpPr/>
+          <p:nvPr/>
+        </p:nvSpPr>
+        <p:spPr>
+          <a:xfrm>
+            <a:off x="2905200" y="3819600"/>
+            <a:ext cx="2523240" cy="285120"/>
           </a:xfrm>
           <a:prstGeom prst="rect">
             <a:avLst/>
@@ -10709,51 +10589,668 @@
             <a:normAutofit fontScale="92500" lnSpcReduction="9999"/>
           </a:bodyPr>
           <a:p>
-            <a:pPr algn="ctr">
-              <a:lnSpc>
-                <a:spcPct val="100000"/>
-              </a:lnSpc>
-            </a:pPr>
-            <a:r>
-              <a:rPr lang="en-US" sz="1350" b="0" u="none" strike="noStrike">
-                <a:solidFill>
-                  <a:srgbClr val="DCEBF0"/>
+            <a:pPr>
+              <a:lnSpc>
+                <a:spcPct val="100000"/>
+              </a:lnSpc>
+            </a:pPr>
+            <a:r>
+              <a:rPr lang="en-US" sz="1500" b="1" u="none" strike="noStrike">
+                <a:solidFill>
+                  <a:srgbClr val="10263F"/>
                 </a:solidFill>
                 <a:effectLst/>
                 <a:uFillTx/>
                 <a:latin typeface="C059"/>
                 <a:ea typeface="C059"/>
               </a:rPr>
-              <a:t>Only approved items appear in the live catalogue.</a:t>
-            </a:r>
-            <a:endParaRPr lang="en-US" sz="1350" b="0" u="none" strike="noStrike">
-              <a:solidFill>
-                <a:srgbClr val="000000"/>
-              </a:solidFill>
-              <a:effectLst/>
-              <a:uFillTx/>
-              <a:latin typeface="Arial"/>
-            </a:endParaRPr>
-          </a:p>
-          <a:p>
-            <a:pPr algn="ctr">
-              <a:lnSpc>
-                <a:spcPct val="100000"/>
-              </a:lnSpc>
-            </a:pPr>
-            <a:r>
-              <a:rPr lang="en-US" sz="1350" b="0" u="none" strike="noStrike">
-                <a:solidFill>
-                  <a:srgbClr val="DCEBF0"/>
+              <a:t>Spring MVC and JSP</a:t>
+            </a:r>
+            <a:endParaRPr lang="en-US" sz="1500" b="0" u="none" strike="noStrike">
+              <a:solidFill>
+                <a:srgbClr val="000000"/>
+              </a:solidFill>
+              <a:effectLst/>
+              <a:uFillTx/>
+              <a:latin typeface="Arial"/>
+            </a:endParaRPr>
+          </a:p>
+        </p:txBody>
+      </p:sp>
+      <p:sp>
+        <p:nvSpPr>
+          <p:cNvPr id="133" name=""/>
+          <p:cNvSpPr/>
+          <p:nvPr/>
+        </p:nvSpPr>
+        <p:spPr>
+          <a:xfrm>
+            <a:off x="905040" y="4619520"/>
+            <a:ext cx="4857120" cy="742320"/>
+          </a:xfrm>
+          <a:prstGeom prst="roundRect">
+            <a:avLst>
+              <a:gd name="adj" fmla="val 17949"/>
+            </a:avLst>
+          </a:prstGeom>
+          <a:solidFill>
+            <a:srgbClr val="FFFFFF"/>
+          </a:solidFill>
+          <a:ln w="0">
+            <a:noFill/>
+          </a:ln>
+        </p:spPr>
+        <p:style>
+          <a:lnRef idx="0"/>
+          <a:fillRef idx="0"/>
+          <a:effectRef idx="0"/>
+          <a:fontRef idx="minor"/>
+        </p:style>
+        <p:txBody>
+          <a:bodyPr lIns="90000" tIns="45000" rIns="90000" bIns="45000" anchor="t">
+            <a:noAutofit/>
+          </a:bodyPr>
+          <a:p>
+            <a:endParaRPr lang="en-US" sz="1800" b="0" u="none" strike="noStrike">
+              <a:solidFill>
+                <a:srgbClr val="000000"/>
+              </a:solidFill>
+              <a:effectLst/>
+              <a:uFillTx/>
+              <a:latin typeface="Arial"/>
+            </a:endParaRPr>
+          </a:p>
+        </p:txBody>
+      </p:sp>
+      <p:sp>
+        <p:nvSpPr>
+          <p:cNvPr id="134" name=""/>
+          <p:cNvSpPr/>
+          <p:nvPr/>
+        </p:nvSpPr>
+        <p:spPr>
+          <a:xfrm>
+            <a:off x="1171440" y="4838760"/>
+            <a:ext cx="1666080" cy="266040"/>
+          </a:xfrm>
+          <a:prstGeom prst="rect">
+            <a:avLst/>
+          </a:prstGeom>
+          <a:noFill/>
+          <a:ln w="0">
+            <a:noFill/>
+          </a:ln>
+        </p:spPr>
+        <p:style>
+          <a:lnRef idx="0"/>
+          <a:fillRef idx="0"/>
+          <a:effectRef idx="0"/>
+          <a:fontRef idx="minor"/>
+        </p:style>
+        <p:txBody>
+          <a:bodyPr lIns="90000" tIns="45000" rIns="90000" bIns="45000" anchor="t">
+            <a:normAutofit fontScale="92500" lnSpcReduction="9999"/>
+          </a:bodyPr>
+          <a:p>
+            <a:pPr>
+              <a:lnSpc>
+                <a:spcPct val="100000"/>
+              </a:lnSpc>
+            </a:pPr>
+            <a:r>
+              <a:rPr lang="en-US" sz="1350" b="1" u="none" strike="noStrike">
+                <a:solidFill>
+                  <a:srgbClr val="54616D"/>
                 </a:solidFill>
                 <a:effectLst/>
                 <a:uFillTx/>
                 <a:latin typeface="C059"/>
                 <a:ea typeface="C059"/>
               </a:rPr>
-              <a:t>Bidding rules reject invalid actions.</a:t>
+              <a:t>Data access</a:t>
             </a:r>
             <a:endParaRPr lang="en-US" sz="1350" b="0" u="none" strike="noStrike">
+              <a:solidFill>
+                <a:srgbClr val="000000"/>
+              </a:solidFill>
+              <a:effectLst/>
+              <a:uFillTx/>
+              <a:latin typeface="Arial"/>
+            </a:endParaRPr>
+          </a:p>
+        </p:txBody>
+      </p:sp>
+      <p:sp>
+        <p:nvSpPr>
+          <p:cNvPr id="135" name=""/>
+          <p:cNvSpPr/>
+          <p:nvPr/>
+        </p:nvSpPr>
+        <p:spPr>
+          <a:xfrm>
+            <a:off x="2905200" y="4819680"/>
+            <a:ext cx="2523240" cy="285120"/>
+          </a:xfrm>
+          <a:prstGeom prst="rect">
+            <a:avLst/>
+          </a:prstGeom>
+          <a:noFill/>
+          <a:ln w="0">
+            <a:noFill/>
+          </a:ln>
+        </p:spPr>
+        <p:style>
+          <a:lnRef idx="0"/>
+          <a:fillRef idx="0"/>
+          <a:effectRef idx="0"/>
+          <a:fontRef idx="minor"/>
+        </p:style>
+        <p:txBody>
+          <a:bodyPr lIns="90000" tIns="45000" rIns="90000" bIns="45000" anchor="t">
+            <a:normAutofit fontScale="85000" lnSpcReduction="9999"/>
+          </a:bodyPr>
+          <a:p>
+            <a:pPr>
+              <a:lnSpc>
+                <a:spcPct val="100000"/>
+              </a:lnSpc>
+            </a:pPr>
+            <a:r>
+              <a:rPr lang="en-US" sz="1500" b="1" u="none" strike="noStrike">
+                <a:solidFill>
+                  <a:srgbClr val="10263F"/>
+                </a:solidFill>
+                <a:effectLst/>
+                <a:uFillTx/>
+                <a:latin typeface="C059"/>
+                <a:ea typeface="C059"/>
+              </a:rPr>
+              <a:t>Spring Data JPA and JDBC</a:t>
+            </a:r>
+            <a:endParaRPr lang="en-US" sz="1500" b="0" u="none" strike="noStrike">
+              <a:solidFill>
+                <a:srgbClr val="000000"/>
+              </a:solidFill>
+              <a:effectLst/>
+              <a:uFillTx/>
+              <a:latin typeface="Arial"/>
+            </a:endParaRPr>
+          </a:p>
+        </p:txBody>
+      </p:sp>
+      <p:sp>
+        <p:nvSpPr>
+          <p:cNvPr id="136" name=""/>
+          <p:cNvSpPr/>
+          <p:nvPr/>
+        </p:nvSpPr>
+        <p:spPr>
+          <a:xfrm>
+            <a:off x="6286680" y="1619280"/>
+            <a:ext cx="4857120" cy="742320"/>
+          </a:xfrm>
+          <a:prstGeom prst="roundRect">
+            <a:avLst>
+              <a:gd name="adj" fmla="val 17949"/>
+            </a:avLst>
+          </a:prstGeom>
+          <a:solidFill>
+            <a:srgbClr val="FFFFFF"/>
+          </a:solidFill>
+          <a:ln w="0">
+            <a:noFill/>
+          </a:ln>
+        </p:spPr>
+        <p:style>
+          <a:lnRef idx="0"/>
+          <a:fillRef idx="0"/>
+          <a:effectRef idx="0"/>
+          <a:fontRef idx="minor"/>
+        </p:style>
+        <p:txBody>
+          <a:bodyPr lIns="90000" tIns="45000" rIns="90000" bIns="45000" anchor="t">
+            <a:noAutofit/>
+          </a:bodyPr>
+          <a:p>
+            <a:endParaRPr lang="en-US" sz="1800" b="0" u="none" strike="noStrike">
+              <a:solidFill>
+                <a:srgbClr val="000000"/>
+              </a:solidFill>
+              <a:effectLst/>
+              <a:uFillTx/>
+              <a:latin typeface="Arial"/>
+            </a:endParaRPr>
+          </a:p>
+        </p:txBody>
+      </p:sp>
+      <p:sp>
+        <p:nvSpPr>
+          <p:cNvPr id="137" name=""/>
+          <p:cNvSpPr/>
+          <p:nvPr/>
+        </p:nvSpPr>
+        <p:spPr>
+          <a:xfrm>
+            <a:off x="6553080" y="1838160"/>
+            <a:ext cx="1666080" cy="266040"/>
+          </a:xfrm>
+          <a:prstGeom prst="rect">
+            <a:avLst/>
+          </a:prstGeom>
+          <a:noFill/>
+          <a:ln w="0">
+            <a:noFill/>
+          </a:ln>
+        </p:spPr>
+        <p:style>
+          <a:lnRef idx="0"/>
+          <a:fillRef idx="0"/>
+          <a:effectRef idx="0"/>
+          <a:fontRef idx="minor"/>
+        </p:style>
+        <p:txBody>
+          <a:bodyPr lIns="90000" tIns="45000" rIns="90000" bIns="45000" anchor="t">
+            <a:normAutofit fontScale="92500" lnSpcReduction="9999"/>
+          </a:bodyPr>
+          <a:p>
+            <a:pPr>
+              <a:lnSpc>
+                <a:spcPct val="100000"/>
+              </a:lnSpc>
+            </a:pPr>
+            <a:r>
+              <a:rPr lang="en-US" sz="1350" b="1" u="none" strike="noStrike">
+                <a:solidFill>
+                  <a:srgbClr val="54616D"/>
+                </a:solidFill>
+                <a:effectLst/>
+                <a:uFillTx/>
+                <a:latin typeface="C059"/>
+                <a:ea typeface="C059"/>
+              </a:rPr>
+              <a:t>Database</a:t>
+            </a:r>
+            <a:endParaRPr lang="en-US" sz="1350" b="0" u="none" strike="noStrike">
+              <a:solidFill>
+                <a:srgbClr val="000000"/>
+              </a:solidFill>
+              <a:effectLst/>
+              <a:uFillTx/>
+              <a:latin typeface="Arial"/>
+            </a:endParaRPr>
+          </a:p>
+        </p:txBody>
+      </p:sp>
+      <p:sp>
+        <p:nvSpPr>
+          <p:cNvPr id="138" name=""/>
+          <p:cNvSpPr/>
+          <p:nvPr/>
+        </p:nvSpPr>
+        <p:spPr>
+          <a:xfrm>
+            <a:off x="8286840" y="1819440"/>
+            <a:ext cx="2523240" cy="285120"/>
+          </a:xfrm>
+          <a:prstGeom prst="rect">
+            <a:avLst/>
+          </a:prstGeom>
+          <a:noFill/>
+          <a:ln w="0">
+            <a:noFill/>
+          </a:ln>
+        </p:spPr>
+        <p:style>
+          <a:lnRef idx="0"/>
+          <a:fillRef idx="0"/>
+          <a:effectRef idx="0"/>
+          <a:fontRef idx="minor"/>
+        </p:style>
+        <p:txBody>
+          <a:bodyPr lIns="90000" tIns="45000" rIns="90000" bIns="45000" anchor="t">
+            <a:normAutofit fontScale="62500" lnSpcReduction="19999"/>
+          </a:bodyPr>
+          <a:p>
+            <a:pPr>
+              <a:lnSpc>
+                <a:spcPct val="100000"/>
+              </a:lnSpc>
+            </a:pPr>
+            <a:r>
+              <a:rPr lang="en-US" sz="1500" b="1" u="none" strike="noStrike">
+                <a:solidFill>
+                  <a:srgbClr val="10263F"/>
+                </a:solidFill>
+                <a:effectLst/>
+                <a:uFillTx/>
+                <a:latin typeface="C059"/>
+                <a:ea typeface="C059"/>
+              </a:rPr>
+              <a:t>H2 locally; PostgreSQL in production</a:t>
+            </a:r>
+            <a:endParaRPr lang="en-US" sz="1500" b="0" u="none" strike="noStrike">
+              <a:solidFill>
+                <a:srgbClr val="000000"/>
+              </a:solidFill>
+              <a:effectLst/>
+              <a:uFillTx/>
+              <a:latin typeface="Arial"/>
+            </a:endParaRPr>
+          </a:p>
+        </p:txBody>
+      </p:sp>
+      <p:sp>
+        <p:nvSpPr>
+          <p:cNvPr id="139" name=""/>
+          <p:cNvSpPr/>
+          <p:nvPr/>
+        </p:nvSpPr>
+        <p:spPr>
+          <a:xfrm>
+            <a:off x="6286680" y="2619360"/>
+            <a:ext cx="4857120" cy="742320"/>
+          </a:xfrm>
+          <a:prstGeom prst="roundRect">
+            <a:avLst>
+              <a:gd name="adj" fmla="val 17949"/>
+            </a:avLst>
+          </a:prstGeom>
+          <a:solidFill>
+            <a:srgbClr val="FFFFFF"/>
+          </a:solidFill>
+          <a:ln w="0">
+            <a:noFill/>
+          </a:ln>
+        </p:spPr>
+        <p:style>
+          <a:lnRef idx="0"/>
+          <a:fillRef idx="0"/>
+          <a:effectRef idx="0"/>
+          <a:fontRef idx="minor"/>
+        </p:style>
+        <p:txBody>
+          <a:bodyPr lIns="90000" tIns="45000" rIns="90000" bIns="45000" anchor="t">
+            <a:noAutofit/>
+          </a:bodyPr>
+          <a:p>
+            <a:endParaRPr lang="en-US" sz="1800" b="0" u="none" strike="noStrike">
+              <a:solidFill>
+                <a:srgbClr val="000000"/>
+              </a:solidFill>
+              <a:effectLst/>
+              <a:uFillTx/>
+              <a:latin typeface="Arial"/>
+            </a:endParaRPr>
+          </a:p>
+        </p:txBody>
+      </p:sp>
+      <p:sp>
+        <p:nvSpPr>
+          <p:cNvPr id="140" name=""/>
+          <p:cNvSpPr/>
+          <p:nvPr/>
+        </p:nvSpPr>
+        <p:spPr>
+          <a:xfrm>
+            <a:off x="6553080" y="2838600"/>
+            <a:ext cx="1666080" cy="266040"/>
+          </a:xfrm>
+          <a:prstGeom prst="rect">
+            <a:avLst/>
+          </a:prstGeom>
+          <a:noFill/>
+          <a:ln w="0">
+            <a:noFill/>
+          </a:ln>
+        </p:spPr>
+        <p:style>
+          <a:lnRef idx="0"/>
+          <a:fillRef idx="0"/>
+          <a:effectRef idx="0"/>
+          <a:fontRef idx="minor"/>
+        </p:style>
+        <p:txBody>
+          <a:bodyPr lIns="90000" tIns="45000" rIns="90000" bIns="45000" anchor="t">
+            <a:normAutofit fontScale="77500" lnSpcReduction="19999"/>
+          </a:bodyPr>
+          <a:p>
+            <a:pPr>
+              <a:lnSpc>
+                <a:spcPct val="100000"/>
+              </a:lnSpc>
+            </a:pPr>
+            <a:r>
+              <a:rPr lang="en-US" sz="1350" b="1" u="none" strike="noStrike">
+                <a:solidFill>
+                  <a:srgbClr val="54616D"/>
+                </a:solidFill>
+                <a:effectLst/>
+                <a:uFillTx/>
+                <a:latin typeface="C059"/>
+                <a:ea typeface="C059"/>
+              </a:rPr>
+              <a:t>Build and packaging</a:t>
+            </a:r>
+            <a:endParaRPr lang="en-US" sz="1350" b="0" u="none" strike="noStrike">
+              <a:solidFill>
+                <a:srgbClr val="000000"/>
+              </a:solidFill>
+              <a:effectLst/>
+              <a:uFillTx/>
+              <a:latin typeface="Arial"/>
+            </a:endParaRPr>
+          </a:p>
+        </p:txBody>
+      </p:sp>
+      <p:sp>
+        <p:nvSpPr>
+          <p:cNvPr id="141" name=""/>
+          <p:cNvSpPr/>
+          <p:nvPr/>
+        </p:nvSpPr>
+        <p:spPr>
+          <a:xfrm>
+            <a:off x="8286840" y="2819520"/>
+            <a:ext cx="2523240" cy="285120"/>
+          </a:xfrm>
+          <a:prstGeom prst="rect">
+            <a:avLst/>
+          </a:prstGeom>
+          <a:noFill/>
+          <a:ln w="0">
+            <a:noFill/>
+          </a:ln>
+        </p:spPr>
+        <p:style>
+          <a:lnRef idx="0"/>
+          <a:fillRef idx="0"/>
+          <a:effectRef idx="0"/>
+          <a:fontRef idx="minor"/>
+        </p:style>
+        <p:txBody>
+          <a:bodyPr lIns="90000" tIns="45000" rIns="90000" bIns="45000" anchor="t">
+            <a:normAutofit fontScale="77500" lnSpcReduction="19999"/>
+          </a:bodyPr>
+          <a:p>
+            <a:pPr>
+              <a:lnSpc>
+                <a:spcPct val="100000"/>
+              </a:lnSpc>
+            </a:pPr>
+            <a:r>
+              <a:rPr lang="en-US" sz="1500" b="1" u="none" strike="noStrike">
+                <a:solidFill>
+                  <a:srgbClr val="10263F"/>
+                </a:solidFill>
+                <a:effectLst/>
+                <a:uFillTx/>
+                <a:latin typeface="C059"/>
+                <a:ea typeface="C059"/>
+              </a:rPr>
+              <a:t>Maven and executable WAR</a:t>
+            </a:r>
+            <a:endParaRPr lang="en-US" sz="1500" b="0" u="none" strike="noStrike">
+              <a:solidFill>
+                <a:srgbClr val="000000"/>
+              </a:solidFill>
+              <a:effectLst/>
+              <a:uFillTx/>
+              <a:latin typeface="Arial"/>
+            </a:endParaRPr>
+          </a:p>
+        </p:txBody>
+      </p:sp>
+      <p:sp>
+        <p:nvSpPr>
+          <p:cNvPr id="142" name=""/>
+          <p:cNvSpPr/>
+          <p:nvPr/>
+        </p:nvSpPr>
+        <p:spPr>
+          <a:xfrm>
+            <a:off x="6286680" y="3619440"/>
+            <a:ext cx="4857120" cy="742320"/>
+          </a:xfrm>
+          <a:prstGeom prst="roundRect">
+            <a:avLst>
+              <a:gd name="adj" fmla="val 17949"/>
+            </a:avLst>
+          </a:prstGeom>
+          <a:solidFill>
+            <a:srgbClr val="FFFFFF"/>
+          </a:solidFill>
+          <a:ln w="0">
+            <a:noFill/>
+          </a:ln>
+        </p:spPr>
+        <p:style>
+          <a:lnRef idx="0"/>
+          <a:fillRef idx="0"/>
+          <a:effectRef idx="0"/>
+          <a:fontRef idx="minor"/>
+        </p:style>
+        <p:txBody>
+          <a:bodyPr lIns="90000" tIns="45000" rIns="90000" bIns="45000" anchor="t">
+            <a:noAutofit/>
+          </a:bodyPr>
+          <a:p>
+            <a:endParaRPr lang="en-US" sz="1800" b="0" u="none" strike="noStrike">
+              <a:solidFill>
+                <a:srgbClr val="000000"/>
+              </a:solidFill>
+              <a:effectLst/>
+              <a:uFillTx/>
+              <a:latin typeface="Arial"/>
+            </a:endParaRPr>
+          </a:p>
+        </p:txBody>
+      </p:sp>
+      <p:sp>
+        <p:nvSpPr>
+          <p:cNvPr id="143" name=""/>
+          <p:cNvSpPr/>
+          <p:nvPr/>
+        </p:nvSpPr>
+        <p:spPr>
+          <a:xfrm>
+            <a:off x="6553080" y="3838680"/>
+            <a:ext cx="1666080" cy="266040"/>
+          </a:xfrm>
+          <a:prstGeom prst="rect">
+            <a:avLst/>
+          </a:prstGeom>
+          <a:noFill/>
+          <a:ln w="0">
+            <a:noFill/>
+          </a:ln>
+        </p:spPr>
+        <p:style>
+          <a:lnRef idx="0"/>
+          <a:fillRef idx="0"/>
+          <a:effectRef idx="0"/>
+          <a:fontRef idx="minor"/>
+        </p:style>
+        <p:txBody>
+          <a:bodyPr lIns="90000" tIns="45000" rIns="90000" bIns="45000" anchor="t">
+            <a:normAutofit fontScale="92500" lnSpcReduction="9999"/>
+          </a:bodyPr>
+          <a:p>
+            <a:pPr>
+              <a:lnSpc>
+                <a:spcPct val="100000"/>
+              </a:lnSpc>
+            </a:pPr>
+            <a:r>
+              <a:rPr lang="en-US" sz="1350" b="1" u="none" strike="noStrike">
+                <a:solidFill>
+                  <a:srgbClr val="54616D"/>
+                </a:solidFill>
+                <a:effectLst/>
+                <a:uFillTx/>
+                <a:latin typeface="C059"/>
+                <a:ea typeface="C059"/>
+              </a:rPr>
+              <a:t>Deployment</a:t>
+            </a:r>
+            <a:endParaRPr lang="en-US" sz="1350" b="0" u="none" strike="noStrike">
+              <a:solidFill>
+                <a:srgbClr val="000000"/>
+              </a:solidFill>
+              <a:effectLst/>
+              <a:uFillTx/>
+              <a:latin typeface="Arial"/>
+            </a:endParaRPr>
+          </a:p>
+        </p:txBody>
+      </p:sp>
+      <p:sp>
+        <p:nvSpPr>
+          <p:cNvPr id="144" name=""/>
+          <p:cNvSpPr/>
+          <p:nvPr/>
+        </p:nvSpPr>
+        <p:spPr>
+          <a:xfrm>
+            <a:off x="8286840" y="3819600"/>
+            <a:ext cx="2523240" cy="285120"/>
+          </a:xfrm>
+          <a:prstGeom prst="rect">
+            <a:avLst/>
+          </a:prstGeom>
+          <a:noFill/>
+          <a:ln w="0">
+            <a:noFill/>
+          </a:ln>
+        </p:spPr>
+        <p:style>
+          <a:lnRef idx="0"/>
+          <a:fillRef idx="0"/>
+          <a:effectRef idx="0"/>
+          <a:fontRef idx="minor"/>
+        </p:style>
+        <p:txBody>
+          <a:bodyPr lIns="90000" tIns="45000" rIns="90000" bIns="45000" anchor="t">
+            <a:normAutofit fontScale="92500" lnSpcReduction="9999"/>
+          </a:bodyPr>
+          <a:p>
+            <a:pPr>
+              <a:lnSpc>
+                <a:spcPct val="100000"/>
+              </a:lnSpc>
+            </a:pPr>
+            <a:r>
+              <a:rPr lang="en-US" sz="1500" b="1" u="none" strike="noStrike">
+                <a:solidFill>
+                  <a:srgbClr val="10263F"/>
+                </a:solidFill>
+                <a:effectLst/>
+                <a:uFillTx/>
+                <a:latin typeface="C059"/>
+                <a:ea typeface="C059"/>
+              </a:rPr>
+              <a:t>Docker on Render</a:t>
+            </a:r>
+            <a:endParaRPr lang="en-US" sz="1500" b="0" u="none" strike="noStrike">
               <a:solidFill>
                 <a:srgbClr val="000000"/>
               </a:solidFill>
@@ -10803,14 +11300,14 @@
       </p:grpSpPr>
       <p:sp>
         <p:nvSpPr>
-          <p:cNvPr id="152" name=""/>
+          <p:cNvPr id="145" name=""/>
           <p:cNvSpPr/>
           <p:nvPr/>
         </p:nvSpPr>
         <p:spPr>
           <a:xfrm>
             <a:off x="0" y="0"/>
-            <a:ext cx="12191760" cy="151920"/>
+            <a:ext cx="12191400" cy="151560"/>
           </a:xfrm>
           <a:prstGeom prst="rect">
             <a:avLst/>
@@ -10846,14 +11343,14 @@
       </p:sp>
       <p:sp>
         <p:nvSpPr>
-          <p:cNvPr id="153" name=""/>
+          <p:cNvPr id="146" name=""/>
           <p:cNvSpPr/>
           <p:nvPr/>
         </p:nvSpPr>
         <p:spPr>
           <a:xfrm>
             <a:off x="666720" y="857160"/>
-            <a:ext cx="9905760" cy="571320"/>
+            <a:ext cx="9905400" cy="570960"/>
           </a:xfrm>
           <a:prstGeom prst="rect">
             <a:avLst/>
@@ -10889,7 +11386,7 @@
                 <a:latin typeface="C059"/>
                 <a:ea typeface="C059"/>
               </a:rPr>
-              <a:t>Expected outcome and future scope</a:t>
+              <a:t>Expected completed experience</a:t>
             </a:r>
             <a:endParaRPr lang="en-US" sz="2400" b="0" u="none" strike="noStrike">
               <a:solidFill>
@@ -10904,14 +11401,14 @@
       </p:sp>
       <p:sp>
         <p:nvSpPr>
-          <p:cNvPr id="154" name=""/>
+          <p:cNvPr id="147" name=""/>
           <p:cNvSpPr/>
           <p:nvPr/>
         </p:nvSpPr>
         <p:spPr>
           <a:xfrm>
             <a:off x="685800" y="1409760"/>
-            <a:ext cx="9715320" cy="266400"/>
+            <a:ext cx="9714960" cy="266040"/>
           </a:xfrm>
           <a:prstGeom prst="rect">
             <a:avLst/>
@@ -10947,7 +11444,7 @@
                 <a:latin typeface="C059"/>
                 <a:ea typeface="C059"/>
               </a:rPr>
-              <a:t>The project’s intended result is a structured auction workflow that can grow beyond the first release.</a:t>
+              <a:t>The target system creates a simple, auditable journey for each marketplace participant.</a:t>
             </a:r>
             <a:endParaRPr lang="en-US" sz="1200" b="0" u="none" strike="noStrike">
               <a:solidFill>
@@ -10962,14 +11459,14 @@
       </p:sp>
       <p:sp>
         <p:nvSpPr>
-          <p:cNvPr id="155" name=""/>
+          <p:cNvPr id="148" name=""/>
           <p:cNvSpPr/>
           <p:nvPr/>
         </p:nvSpPr>
         <p:spPr>
           <a:xfrm>
             <a:off x="10191600" y="6343560"/>
-            <a:ext cx="1428480" cy="209160"/>
+            <a:ext cx="1428120" cy="208800"/>
           </a:xfrm>
           <a:prstGeom prst="rect">
             <a:avLst/>
@@ -11005,7 +11502,7 @@
                 <a:latin typeface="C059"/>
                 <a:ea typeface="C059"/>
               </a:rPr>
-              <a:t>Artifact Alley  |  09</a:t>
+              <a:t>Artifact Alley  |  08</a:t>
             </a:r>
             <a:endParaRPr lang="en-US" sz="900" b="0" u="none" strike="noStrike">
               <a:solidFill>
@@ -11018,24 +11515,304 @@
           </a:p>
         </p:txBody>
       </p:sp>
-      <p:sp>
-        <p:nvSpPr>
-          <p:cNvPr id="156" name=""/>
-          <p:cNvSpPr/>
-          <p:nvPr/>
-        </p:nvSpPr>
-        <p:spPr>
-          <a:xfrm>
-            <a:off x="762120" y="1676520"/>
-            <a:ext cx="4762080" cy="3428640"/>
+      <p:pic>
+        <p:nvPicPr>
+          <p:cNvPr id="149" name=""/>
+          <p:cNvPicPr/>
+          <p:nvPr/>
+        </p:nvPicPr>
+        <p:blipFill>
+          <a:blip r:embed="rId1"/>
+          <a:stretch/>
+        </p:blipFill>
+        <p:spPr>
+          <a:xfrm>
+            <a:off x="809640" y="1762200"/>
+            <a:ext cx="2618640" cy="2618640"/>
+          </a:xfrm>
+          <a:prstGeom prst="rect">
+            <a:avLst/>
+          </a:prstGeom>
+          <a:noFill/>
+          <a:ln w="0">
+            <a:noFill/>
+          </a:ln>
+        </p:spPr>
+      </p:pic>
+      <p:pic>
+        <p:nvPicPr>
+          <p:cNvPr id="150" name=""/>
+          <p:cNvPicPr/>
+          <p:nvPr/>
+        </p:nvPicPr>
+        <p:blipFill>
+          <a:blip r:embed="rId2"/>
+          <a:stretch/>
+        </p:blipFill>
+        <p:spPr>
+          <a:xfrm>
+            <a:off x="8429760" y="1762200"/>
+            <a:ext cx="2618640" cy="2618640"/>
+          </a:xfrm>
+          <a:prstGeom prst="rect">
+            <a:avLst/>
+          </a:prstGeom>
+          <a:noFill/>
+          <a:ln w="0">
+            <a:noFill/>
+          </a:ln>
+        </p:spPr>
+      </p:pic>
+      <p:sp>
+        <p:nvSpPr>
+          <p:cNvPr id="151" name=""/>
+          <p:cNvSpPr/>
+          <p:nvPr/>
+        </p:nvSpPr>
+        <p:spPr>
+          <a:xfrm>
+            <a:off x="800280" y="4781520"/>
+            <a:ext cx="2666160" cy="285120"/>
+          </a:xfrm>
+          <a:prstGeom prst="rect">
+            <a:avLst/>
+          </a:prstGeom>
+          <a:noFill/>
+          <a:ln w="0">
+            <a:noFill/>
+          </a:ln>
+        </p:spPr>
+        <p:style>
+          <a:lnRef idx="0"/>
+          <a:fillRef idx="0"/>
+          <a:effectRef idx="0"/>
+          <a:fontRef idx="minor"/>
+        </p:style>
+        <p:txBody>
+          <a:bodyPr lIns="90000" tIns="45000" rIns="90000" bIns="45000" anchor="t">
+            <a:normAutofit fontScale="85000" lnSpcReduction="19999"/>
+          </a:bodyPr>
+          <a:p>
+            <a:pPr algn="ctr">
+              <a:lnSpc>
+                <a:spcPct val="100000"/>
+              </a:lnSpc>
+            </a:pPr>
+            <a:r>
+              <a:rPr lang="en-US" sz="1800" b="1" u="none" strike="noStrike">
+                <a:solidFill>
+                  <a:srgbClr val="10263F"/>
+                </a:solidFill>
+                <a:effectLst/>
+                <a:uFillTx/>
+                <a:latin typeface="C059"/>
+                <a:ea typeface="C059"/>
+              </a:rPr>
+              <a:t>Seller journey</a:t>
+            </a:r>
+            <a:endParaRPr lang="en-US" sz="1800" b="0" u="none" strike="noStrike">
+              <a:solidFill>
+                <a:srgbClr val="000000"/>
+              </a:solidFill>
+              <a:effectLst/>
+              <a:uFillTx/>
+              <a:latin typeface="Arial"/>
+            </a:endParaRPr>
+          </a:p>
+        </p:txBody>
+      </p:sp>
+      <p:sp>
+        <p:nvSpPr>
+          <p:cNvPr id="152" name=""/>
+          <p:cNvSpPr/>
+          <p:nvPr/>
+        </p:nvSpPr>
+        <p:spPr>
+          <a:xfrm>
+            <a:off x="781200" y="5143680"/>
+            <a:ext cx="2714040" cy="456480"/>
+          </a:xfrm>
+          <a:prstGeom prst="rect">
+            <a:avLst/>
+          </a:prstGeom>
+          <a:noFill/>
+          <a:ln w="0">
+            <a:noFill/>
+          </a:ln>
+        </p:spPr>
+        <p:style>
+          <a:lnRef idx="0"/>
+          <a:fillRef idx="0"/>
+          <a:effectRef idx="0"/>
+          <a:fontRef idx="minor"/>
+        </p:style>
+        <p:txBody>
+          <a:bodyPr lIns="90000" tIns="45000" rIns="90000" bIns="45000" anchor="t">
+            <a:normAutofit lnSpcReduction="9999"/>
+          </a:bodyPr>
+          <a:p>
+            <a:pPr algn="ctr">
+              <a:lnSpc>
+                <a:spcPct val="100000"/>
+              </a:lnSpc>
+            </a:pPr>
+            <a:r>
+              <a:rPr lang="en-US" sz="1280" b="0" u="none" strike="noStrike">
+                <a:solidFill>
+                  <a:srgbClr val="54616D"/>
+                </a:solidFill>
+                <a:effectLst/>
+                <a:uFillTx/>
+                <a:latin typeface="C059"/>
+                <a:ea typeface="C059"/>
+              </a:rPr>
+              <a:t>Create account, submit artifact, await approval</a:t>
+            </a:r>
+            <a:endParaRPr lang="en-US" sz="1280" b="0" u="none" strike="noStrike">
+              <a:solidFill>
+                <a:srgbClr val="000000"/>
+              </a:solidFill>
+              <a:effectLst/>
+              <a:uFillTx/>
+              <a:latin typeface="Arial"/>
+            </a:endParaRPr>
+          </a:p>
+        </p:txBody>
+      </p:sp>
+      <p:sp>
+        <p:nvSpPr>
+          <p:cNvPr id="153" name=""/>
+          <p:cNvSpPr/>
+          <p:nvPr/>
+        </p:nvSpPr>
+        <p:spPr>
+          <a:xfrm>
+            <a:off x="8439120" y="4781520"/>
+            <a:ext cx="2571120" cy="285120"/>
+          </a:xfrm>
+          <a:prstGeom prst="rect">
+            <a:avLst/>
+          </a:prstGeom>
+          <a:noFill/>
+          <a:ln w="0">
+            <a:noFill/>
+          </a:ln>
+        </p:spPr>
+        <p:style>
+          <a:lnRef idx="0"/>
+          <a:fillRef idx="0"/>
+          <a:effectRef idx="0"/>
+          <a:fontRef idx="minor"/>
+        </p:style>
+        <p:txBody>
+          <a:bodyPr lIns="90000" tIns="45000" rIns="90000" bIns="45000" anchor="t">
+            <a:normAutofit fontScale="85000" lnSpcReduction="19999"/>
+          </a:bodyPr>
+          <a:p>
+            <a:pPr algn="ctr">
+              <a:lnSpc>
+                <a:spcPct val="100000"/>
+              </a:lnSpc>
+            </a:pPr>
+            <a:r>
+              <a:rPr lang="en-US" sz="1800" b="1" u="none" strike="noStrike">
+                <a:solidFill>
+                  <a:srgbClr val="10263F"/>
+                </a:solidFill>
+                <a:effectLst/>
+                <a:uFillTx/>
+                <a:latin typeface="C059"/>
+                <a:ea typeface="C059"/>
+              </a:rPr>
+              <a:t>Bidder journey</a:t>
+            </a:r>
+            <a:endParaRPr lang="en-US" sz="1800" b="0" u="none" strike="noStrike">
+              <a:solidFill>
+                <a:srgbClr val="000000"/>
+              </a:solidFill>
+              <a:effectLst/>
+              <a:uFillTx/>
+              <a:latin typeface="Arial"/>
+            </a:endParaRPr>
+          </a:p>
+        </p:txBody>
+      </p:sp>
+      <p:sp>
+        <p:nvSpPr>
+          <p:cNvPr id="154" name=""/>
+          <p:cNvSpPr/>
+          <p:nvPr/>
+        </p:nvSpPr>
+        <p:spPr>
+          <a:xfrm>
+            <a:off x="8400960" y="5143680"/>
+            <a:ext cx="2714040" cy="456480"/>
+          </a:xfrm>
+          <a:prstGeom prst="rect">
+            <a:avLst/>
+          </a:prstGeom>
+          <a:noFill/>
+          <a:ln w="0">
+            <a:noFill/>
+          </a:ln>
+        </p:spPr>
+        <p:style>
+          <a:lnRef idx="0"/>
+          <a:fillRef idx="0"/>
+          <a:effectRef idx="0"/>
+          <a:fontRef idx="minor"/>
+        </p:style>
+        <p:txBody>
+          <a:bodyPr lIns="90000" tIns="45000" rIns="90000" bIns="45000" anchor="t">
+            <a:normAutofit lnSpcReduction="9999"/>
+          </a:bodyPr>
+          <a:p>
+            <a:pPr algn="ctr">
+              <a:lnSpc>
+                <a:spcPct val="100000"/>
+              </a:lnSpc>
+            </a:pPr>
+            <a:r>
+              <a:rPr lang="en-US" sz="1280" b="0" u="none" strike="noStrike">
+                <a:solidFill>
+                  <a:srgbClr val="54616D"/>
+                </a:solidFill>
+                <a:effectLst/>
+                <a:uFillTx/>
+                <a:latin typeface="C059"/>
+                <a:ea typeface="C059"/>
+              </a:rPr>
+              <a:t>Browse live items, inspect details, place a valid bid</a:t>
+            </a:r>
+            <a:endParaRPr lang="en-US" sz="1280" b="0" u="none" strike="noStrike">
+              <a:solidFill>
+                <a:srgbClr val="000000"/>
+              </a:solidFill>
+              <a:effectLst/>
+              <a:uFillTx/>
+              <a:latin typeface="Arial"/>
+            </a:endParaRPr>
+          </a:p>
+        </p:txBody>
+      </p:sp>
+      <p:sp>
+        <p:nvSpPr>
+          <p:cNvPr id="155" name=""/>
+          <p:cNvSpPr/>
+          <p:nvPr/>
+        </p:nvSpPr>
+        <p:spPr>
+          <a:xfrm>
+            <a:off x="3781440" y="2457360"/>
+            <a:ext cx="4647600" cy="1571040"/>
           </a:xfrm>
           <a:prstGeom prst="roundRect">
             <a:avLst>
-              <a:gd name="adj" fmla="val 5556"/>
+              <a:gd name="adj" fmla="val 13333"/>
             </a:avLst>
           </a:prstGeom>
           <a:solidFill>
-            <a:srgbClr val="FFFFFF"/>
+            <a:srgbClr val="10263F"/>
           </a:solidFill>
           <a:ln w="0">
             <a:noFill/>
@@ -11054,25 +11831,25 @@
           <a:p>
             <a:endParaRPr lang="en-US" sz="1800" b="0" u="none" strike="noStrike">
               <a:solidFill>
-                <a:srgbClr val="000000"/>
-              </a:solidFill>
-              <a:effectLst/>
-              <a:uFillTx/>
-              <a:latin typeface="Arial"/>
-            </a:endParaRPr>
-          </a:p>
-        </p:txBody>
-      </p:sp>
-      <p:sp>
-        <p:nvSpPr>
-          <p:cNvPr id="157" name=""/>
-          <p:cNvSpPr/>
-          <p:nvPr/>
-        </p:nvSpPr>
-        <p:spPr>
-          <a:xfrm>
-            <a:off x="1123920" y="2048040"/>
-            <a:ext cx="3333240" cy="304560"/>
+                <a:srgbClr val="FFFFFF"/>
+              </a:solidFill>
+              <a:effectLst/>
+              <a:uFillTx/>
+              <a:latin typeface="Arial"/>
+            </a:endParaRPr>
+          </a:p>
+        </p:txBody>
+      </p:sp>
+      <p:sp>
+        <p:nvSpPr>
+          <p:cNvPr id="156" name=""/>
+          <p:cNvSpPr/>
+          <p:nvPr/>
+        </p:nvSpPr>
+        <p:spPr>
+          <a:xfrm>
+            <a:off x="4143240" y="2800440"/>
+            <a:ext cx="3904560" cy="304200"/>
           </a:xfrm>
           <a:prstGeom prst="rect">
             <a:avLst/>
@@ -11093,481 +11870,109 @@
             <a:normAutofit fontScale="85000" lnSpcReduction="19999"/>
           </a:bodyPr>
           <a:p>
-            <a:pPr>
-              <a:lnSpc>
-                <a:spcPct val="100000"/>
-              </a:lnSpc>
-            </a:pPr>
-            <a:r>
-              <a:rPr lang="en-US" sz="1870" b="1" u="none" strike="noStrike">
-                <a:solidFill>
-                  <a:srgbClr val="10263F"/>
+            <a:pPr algn="ctr">
+              <a:lnSpc>
+                <a:spcPct val="100000"/>
+              </a:lnSpc>
+            </a:pPr>
+            <a:r>
+              <a:rPr lang="en-US" sz="2020" b="1" u="none" strike="noStrike">
+                <a:solidFill>
+                  <a:srgbClr val="FFFFFF"/>
                 </a:solidFill>
                 <a:effectLst/>
                 <a:uFillTx/>
                 <a:latin typeface="C059"/>
                 <a:ea typeface="C059"/>
               </a:rPr>
-              <a:t>Expected outcome</a:t>
-            </a:r>
-            <a:endParaRPr lang="en-US" sz="1870" b="0" u="none" strike="noStrike">
-              <a:solidFill>
-                <a:srgbClr val="000000"/>
-              </a:solidFill>
-              <a:effectLst/>
-              <a:uFillTx/>
-              <a:latin typeface="Arial"/>
-            </a:endParaRPr>
-          </a:p>
-        </p:txBody>
-      </p:sp>
-      <p:sp>
-        <p:nvSpPr>
-          <p:cNvPr id="158" name=""/>
-          <p:cNvSpPr/>
-          <p:nvPr/>
-        </p:nvSpPr>
-        <p:spPr>
-          <a:xfrm>
-            <a:off x="1123920" y="2647800"/>
-            <a:ext cx="3762000" cy="1571400"/>
-          </a:xfrm>
-          <a:prstGeom prst="rect">
-            <a:avLst/>
-          </a:prstGeom>
-          <a:noFill/>
-          <a:ln w="0">
-            <a:noFill/>
-          </a:ln>
-        </p:spPr>
-        <p:style>
-          <a:lnRef idx="0"/>
-          <a:fillRef idx="0"/>
-          <a:effectRef idx="0"/>
-          <a:fontRef idx="minor"/>
-        </p:style>
-        <p:txBody>
-          <a:bodyPr lIns="90000" tIns="45000" rIns="90000" bIns="45000" anchor="t">
-            <a:normAutofit/>
-          </a:bodyPr>
-          <a:p>
-            <a:pPr>
-              <a:lnSpc>
-                <a:spcPct val="100000"/>
-              </a:lnSpc>
-            </a:pPr>
-            <a:r>
-              <a:rPr lang="en-US" sz="1430" b="0" u="none" strike="noStrike">
-                <a:solidFill>
-                  <a:srgbClr val="17212B"/>
+              <a:t>Marketplace quality</a:t>
+            </a:r>
+            <a:endParaRPr lang="en-US" sz="2020" b="0" u="none" strike="noStrike">
+              <a:solidFill>
+                <a:srgbClr val="000000"/>
+              </a:solidFill>
+              <a:effectLst/>
+              <a:uFillTx/>
+              <a:latin typeface="Arial"/>
+            </a:endParaRPr>
+          </a:p>
+        </p:txBody>
+      </p:sp>
+      <p:sp>
+        <p:nvSpPr>
+          <p:cNvPr id="157" name=""/>
+          <p:cNvSpPr/>
+          <p:nvPr/>
+        </p:nvSpPr>
+        <p:spPr>
+          <a:xfrm>
+            <a:off x="4095720" y="3257640"/>
+            <a:ext cx="3999960" cy="494640"/>
+          </a:xfrm>
+          <a:prstGeom prst="rect">
+            <a:avLst/>
+          </a:prstGeom>
+          <a:noFill/>
+          <a:ln w="0">
+            <a:noFill/>
+          </a:ln>
+        </p:spPr>
+        <p:style>
+          <a:lnRef idx="0"/>
+          <a:fillRef idx="0"/>
+          <a:effectRef idx="0"/>
+          <a:fontRef idx="minor"/>
+        </p:style>
+        <p:txBody>
+          <a:bodyPr lIns="90000" tIns="45000" rIns="90000" bIns="45000" anchor="t">
+            <a:normAutofit fontScale="92500" lnSpcReduction="9999"/>
+          </a:bodyPr>
+          <a:p>
+            <a:pPr algn="ctr">
+              <a:lnSpc>
+                <a:spcPct val="100000"/>
+              </a:lnSpc>
+            </a:pPr>
+            <a:r>
+              <a:rPr lang="en-US" sz="1350" b="0" u="none" strike="noStrike">
+                <a:solidFill>
+                  <a:srgbClr val="DCEBF0"/>
                 </a:solidFill>
                 <a:effectLst/>
                 <a:uFillTx/>
                 <a:latin typeface="C059"/>
                 <a:ea typeface="C059"/>
               </a:rPr>
-              <a:t>A single web platform where:</a:t>
-            </a:r>
-            <a:endParaRPr lang="en-US" sz="1430" b="0" u="none" strike="noStrike">
-              <a:solidFill>
-                <a:srgbClr val="000000"/>
-              </a:solidFill>
-              <a:effectLst/>
-              <a:uFillTx/>
-              <a:latin typeface="Arial"/>
-            </a:endParaRPr>
-          </a:p>
-          <a:p>
-            <a:pPr>
-              <a:lnSpc>
-                <a:spcPct val="100000"/>
-              </a:lnSpc>
-            </a:pPr>
-            <a:endParaRPr lang="en-US" sz="1800" b="0" u="none" strike="noStrike">
-              <a:solidFill>
-                <a:srgbClr val="000000"/>
-              </a:solidFill>
-              <a:effectLst/>
-              <a:uFillTx/>
-              <a:latin typeface="Arial"/>
-            </a:endParaRPr>
-          </a:p>
-          <a:p>
-            <a:pPr>
-              <a:lnSpc>
-                <a:spcPct val="100000"/>
-              </a:lnSpc>
-            </a:pPr>
-            <a:r>
-              <a:rPr lang="en-US" sz="1430" b="0" u="none" strike="noStrike">
-                <a:solidFill>
-                  <a:srgbClr val="17212B"/>
+              <a:t>Only approved items appear in the live catalogue.</a:t>
+            </a:r>
+            <a:endParaRPr lang="en-US" sz="1350" b="0" u="none" strike="noStrike">
+              <a:solidFill>
+                <a:srgbClr val="000000"/>
+              </a:solidFill>
+              <a:effectLst/>
+              <a:uFillTx/>
+              <a:latin typeface="Arial"/>
+            </a:endParaRPr>
+          </a:p>
+          <a:p>
+            <a:pPr algn="ctr">
+              <a:lnSpc>
+                <a:spcPct val="100000"/>
+              </a:lnSpc>
+            </a:pPr>
+            <a:r>
+              <a:rPr lang="en-US" sz="1350" b="0" u="none" strike="noStrike">
+                <a:solidFill>
+                  <a:srgbClr val="DCEBF0"/>
                 </a:solidFill>
                 <a:effectLst/>
                 <a:uFillTx/>
                 <a:latin typeface="C059"/>
                 <a:ea typeface="C059"/>
               </a:rPr>
-              <a:t>• bidders participate in live auctions</a:t>
-            </a:r>
-            <a:endParaRPr lang="en-US" sz="1430" b="0" u="none" strike="noStrike">
-              <a:solidFill>
-                <a:srgbClr val="000000"/>
-              </a:solidFill>
-              <a:effectLst/>
-              <a:uFillTx/>
-              <a:latin typeface="Arial"/>
-            </a:endParaRPr>
-          </a:p>
-          <a:p>
-            <a:pPr>
-              <a:lnSpc>
-                <a:spcPct val="100000"/>
-              </a:lnSpc>
-            </a:pPr>
-            <a:r>
-              <a:rPr lang="en-US" sz="1430" b="0" u="none" strike="noStrike">
-                <a:solidFill>
-                  <a:srgbClr val="17212B"/>
-                </a:solidFill>
-                <a:effectLst/>
-                <a:uFillTx/>
-                <a:latin typeface="C059"/>
-                <a:ea typeface="C059"/>
-              </a:rPr>
-              <a:t>• sellers submit artifacts through review</a:t>
-            </a:r>
-            <a:endParaRPr lang="en-US" sz="1430" b="0" u="none" strike="noStrike">
-              <a:solidFill>
-                <a:srgbClr val="000000"/>
-              </a:solidFill>
-              <a:effectLst/>
-              <a:uFillTx/>
-              <a:latin typeface="Arial"/>
-            </a:endParaRPr>
-          </a:p>
-          <a:p>
-            <a:pPr>
-              <a:lnSpc>
-                <a:spcPct val="100000"/>
-              </a:lnSpc>
-            </a:pPr>
-            <a:r>
-              <a:rPr lang="en-US" sz="1430" b="0" u="none" strike="noStrike">
-                <a:solidFill>
-                  <a:srgbClr val="17212B"/>
-                </a:solidFill>
-                <a:effectLst/>
-                <a:uFillTx/>
-                <a:latin typeface="C059"/>
-                <a:ea typeface="C059"/>
-              </a:rPr>
-              <a:t>• administrators control marketplace entry</a:t>
-            </a:r>
-            <a:endParaRPr lang="en-US" sz="1430" b="0" u="none" strike="noStrike">
-              <a:solidFill>
-                <a:srgbClr val="000000"/>
-              </a:solidFill>
-              <a:effectLst/>
-              <a:uFillTx/>
-              <a:latin typeface="Arial"/>
-            </a:endParaRPr>
-          </a:p>
-        </p:txBody>
-      </p:sp>
-      <p:sp>
-        <p:nvSpPr>
-          <p:cNvPr id="159" name=""/>
-          <p:cNvSpPr/>
-          <p:nvPr/>
-        </p:nvSpPr>
-        <p:spPr>
-          <a:xfrm>
-            <a:off x="6095880" y="1676520"/>
-            <a:ext cx="5333760" cy="3428640"/>
-          </a:xfrm>
-          <a:prstGeom prst="roundRect">
-            <a:avLst>
-              <a:gd name="adj" fmla="val 5556"/>
-            </a:avLst>
-          </a:prstGeom>
-          <a:solidFill>
-            <a:srgbClr val="EAF3F4"/>
-          </a:solidFill>
-          <a:ln w="0">
-            <a:noFill/>
-          </a:ln>
-        </p:spPr>
-        <p:style>
-          <a:lnRef idx="0"/>
-          <a:fillRef idx="0"/>
-          <a:effectRef idx="0"/>
-          <a:fontRef idx="minor"/>
-        </p:style>
-        <p:txBody>
-          <a:bodyPr lIns="90000" tIns="45000" rIns="90000" bIns="45000" anchor="t">
-            <a:noAutofit/>
-          </a:bodyPr>
-          <a:p>
-            <a:endParaRPr lang="en-US" sz="1800" b="0" u="none" strike="noStrike">
-              <a:solidFill>
-                <a:srgbClr val="000000"/>
-              </a:solidFill>
-              <a:effectLst/>
-              <a:uFillTx/>
-              <a:latin typeface="Arial"/>
-            </a:endParaRPr>
-          </a:p>
-        </p:txBody>
-      </p:sp>
-      <p:sp>
-        <p:nvSpPr>
-          <p:cNvPr id="160" name=""/>
-          <p:cNvSpPr/>
-          <p:nvPr/>
-        </p:nvSpPr>
-        <p:spPr>
-          <a:xfrm>
-            <a:off x="6515280" y="2048040"/>
-            <a:ext cx="3714480" cy="304560"/>
-          </a:xfrm>
-          <a:prstGeom prst="rect">
-            <a:avLst/>
-          </a:prstGeom>
-          <a:noFill/>
-          <a:ln w="0">
-            <a:noFill/>
-          </a:ln>
-        </p:spPr>
-        <p:style>
-          <a:lnRef idx="0"/>
-          <a:fillRef idx="0"/>
-          <a:effectRef idx="0"/>
-          <a:fontRef idx="minor"/>
-        </p:style>
-        <p:txBody>
-          <a:bodyPr lIns="90000" tIns="45000" rIns="90000" bIns="45000" anchor="t">
-            <a:normAutofit fontScale="85000" lnSpcReduction="19999"/>
-          </a:bodyPr>
-          <a:p>
-            <a:pPr>
-              <a:lnSpc>
-                <a:spcPct val="100000"/>
-              </a:lnSpc>
-            </a:pPr>
-            <a:r>
-              <a:rPr lang="en-US" sz="1870" b="1" u="none" strike="noStrike">
-                <a:solidFill>
-                  <a:srgbClr val="10263F"/>
-                </a:solidFill>
-                <a:effectLst/>
-                <a:uFillTx/>
-                <a:latin typeface="C059"/>
-                <a:ea typeface="C059"/>
-              </a:rPr>
-              <a:t>Next planned capabilities</a:t>
-            </a:r>
-            <a:endParaRPr lang="en-US" sz="1870" b="0" u="none" strike="noStrike">
-              <a:solidFill>
-                <a:srgbClr val="000000"/>
-              </a:solidFill>
-              <a:effectLst/>
-              <a:uFillTx/>
-              <a:latin typeface="Arial"/>
-            </a:endParaRPr>
-          </a:p>
-        </p:txBody>
-      </p:sp>
-      <p:sp>
-        <p:nvSpPr>
-          <p:cNvPr id="161" name=""/>
-          <p:cNvSpPr/>
-          <p:nvPr/>
-        </p:nvSpPr>
-        <p:spPr>
-          <a:xfrm>
-            <a:off x="6515280" y="2647800"/>
-            <a:ext cx="4190760" cy="1571400"/>
-          </a:xfrm>
-          <a:prstGeom prst="rect">
-            <a:avLst/>
-          </a:prstGeom>
-          <a:noFill/>
-          <a:ln w="0">
-            <a:noFill/>
-          </a:ln>
-        </p:spPr>
-        <p:style>
-          <a:lnRef idx="0"/>
-          <a:fillRef idx="0"/>
-          <a:effectRef idx="0"/>
-          <a:fontRef idx="minor"/>
-        </p:style>
-        <p:txBody>
-          <a:bodyPr lIns="90000" tIns="45000" rIns="90000" bIns="45000" anchor="t">
-            <a:normAutofit fontScale="92500" lnSpcReduction="9999"/>
-          </a:bodyPr>
-          <a:p>
-            <a:pPr>
-              <a:lnSpc>
-                <a:spcPct val="100000"/>
-              </a:lnSpc>
-            </a:pPr>
-            <a:r>
-              <a:rPr lang="en-US" sz="1430" b="0" u="none" strike="noStrike">
-                <a:solidFill>
-                  <a:srgbClr val="17212B"/>
-                </a:solidFill>
-                <a:effectLst/>
-                <a:uFillTx/>
-                <a:latin typeface="C059"/>
-                <a:ea typeface="C059"/>
-              </a:rPr>
-              <a:t>• Artifact photos and richer catalogue information</a:t>
-            </a:r>
-            <a:endParaRPr lang="en-US" sz="1430" b="0" u="none" strike="noStrike">
-              <a:solidFill>
-                <a:srgbClr val="000000"/>
-              </a:solidFill>
-              <a:effectLst/>
-              <a:uFillTx/>
-              <a:latin typeface="Arial"/>
-            </a:endParaRPr>
-          </a:p>
-          <a:p>
-            <a:pPr>
-              <a:lnSpc>
-                <a:spcPct val="100000"/>
-              </a:lnSpc>
-            </a:pPr>
-            <a:endParaRPr lang="en-US" sz="1800" b="0" u="none" strike="noStrike">
-              <a:solidFill>
-                <a:srgbClr val="000000"/>
-              </a:solidFill>
-              <a:effectLst/>
-              <a:uFillTx/>
-              <a:latin typeface="Arial"/>
-            </a:endParaRPr>
-          </a:p>
-          <a:p>
-            <a:pPr>
-              <a:lnSpc>
-                <a:spcPct val="100000"/>
-              </a:lnSpc>
-            </a:pPr>
-            <a:r>
-              <a:rPr lang="en-US" sz="1430" b="0" u="none" strike="noStrike">
-                <a:solidFill>
-                  <a:srgbClr val="17212B"/>
-                </a:solidFill>
-                <a:effectLst/>
-                <a:uFillTx/>
-                <a:latin typeface="C059"/>
-                <a:ea typeface="C059"/>
-              </a:rPr>
-              <a:t>• Seller dashboard for submitted listings</a:t>
-            </a:r>
-            <a:endParaRPr lang="en-US" sz="1430" b="0" u="none" strike="noStrike">
-              <a:solidFill>
-                <a:srgbClr val="000000"/>
-              </a:solidFill>
-              <a:effectLst/>
-              <a:uFillTx/>
-              <a:latin typeface="Arial"/>
-            </a:endParaRPr>
-          </a:p>
-          <a:p>
-            <a:pPr>
-              <a:lnSpc>
-                <a:spcPct val="100000"/>
-              </a:lnSpc>
-            </a:pPr>
-            <a:endParaRPr lang="en-US" sz="1800" b="0" u="none" strike="noStrike">
-              <a:solidFill>
-                <a:srgbClr val="000000"/>
-              </a:solidFill>
-              <a:effectLst/>
-              <a:uFillTx/>
-              <a:latin typeface="Arial"/>
-            </a:endParaRPr>
-          </a:p>
-          <a:p>
-            <a:pPr>
-              <a:lnSpc>
-                <a:spcPct val="100000"/>
-              </a:lnSpc>
-            </a:pPr>
-            <a:r>
-              <a:rPr lang="en-US" sz="1430" b="0" u="none" strike="noStrike">
-                <a:solidFill>
-                  <a:srgbClr val="17212B"/>
-                </a:solidFill>
-                <a:effectLst/>
-                <a:uFillTx/>
-                <a:latin typeface="C059"/>
-                <a:ea typeface="C059"/>
-              </a:rPr>
-              <a:t>• Auction closing logic, winner notification, and payment integration</a:t>
-            </a:r>
-            <a:endParaRPr lang="en-US" sz="1430" b="0" u="none" strike="noStrike">
-              <a:solidFill>
-                <a:srgbClr val="000000"/>
-              </a:solidFill>
-              <a:effectLst/>
-              <a:uFillTx/>
-              <a:latin typeface="Arial"/>
-            </a:endParaRPr>
-          </a:p>
-        </p:txBody>
-      </p:sp>
-      <p:sp>
-        <p:nvSpPr>
-          <p:cNvPr id="162" name=""/>
-          <p:cNvSpPr/>
-          <p:nvPr/>
-        </p:nvSpPr>
-        <p:spPr>
-          <a:xfrm>
-            <a:off x="2343240" y="5581800"/>
-            <a:ext cx="7524360" cy="247320"/>
-          </a:xfrm>
-          <a:prstGeom prst="rect">
-            <a:avLst/>
-          </a:prstGeom>
-          <a:noFill/>
-          <a:ln w="0">
-            <a:noFill/>
-          </a:ln>
-        </p:spPr>
-        <p:style>
-          <a:lnRef idx="0"/>
-          <a:fillRef idx="0"/>
-          <a:effectRef idx="0"/>
-          <a:fontRef idx="minor"/>
-        </p:style>
-        <p:txBody>
-          <a:bodyPr lIns="90000" tIns="45000" rIns="90000" bIns="45000" anchor="t">
-            <a:normAutofit fontScale="85000" lnSpcReduction="9999"/>
-          </a:bodyPr>
-          <a:p>
-            <a:pPr algn="ctr">
-              <a:lnSpc>
-                <a:spcPct val="100000"/>
-              </a:lnSpc>
-            </a:pPr>
-            <a:r>
-              <a:rPr lang="en-US" sz="1280" b="0" u="none" strike="noStrike">
-                <a:solidFill>
-                  <a:srgbClr val="1B5E7A"/>
-                </a:solidFill>
-                <a:effectLst/>
-                <a:uFillTx/>
-                <a:latin typeface="C059"/>
-                <a:ea typeface="C059"/>
-              </a:rPr>
-              <a:t>Future scope items are proposed, not presented as completed features.</a:t>
-            </a:r>
-            <a:endParaRPr lang="en-US" sz="1280" b="0" u="none" strike="noStrike">
+              <a:t>Bidding rules reject invalid actions.</a:t>
+            </a:r>
+            <a:endParaRPr lang="en-US" sz="1350" b="0" u="none" strike="noStrike">
               <a:solidFill>
                 <a:srgbClr val="000000"/>
               </a:solidFill>
